--- a/docs/showcase/slidecraft-overview.pptx
+++ b/docs/showcase/slidecraft-overview.pptx
@@ -2236,7 +2236,7 @@
       </p:grpSpPr>
       <p:sp>
         <p:nvSpPr>
-          <p:cNvPr id="3" name="SlideCraft Title"/>
+          <p:cNvPr id="3" name="SlideCraft Title sc:cover/title"/>
           <p:cNvSpPr>
             <a:spLocks xmlns:a="http://schemas.openxmlformats.org/drawingml/2006/main" noGrp="1"/>
           </p:cNvSpPr>
@@ -2282,7 +2282,7 @@
       </p:sp>
       <p:sp>
         <p:nvSpPr>
-          <p:cNvPr id="2" name="Text 0"/>
+          <p:cNvPr id="2" name="sc:cover/kicker"/>
           <p:cNvSpPr txBox="1"/>
           <p:nvPr/>
         </p:nvSpPr>
@@ -2324,7 +2324,7 @@
       </p:sp>
       <p:sp>
         <p:nvSpPr>
-          <p:cNvPr id="4" name="Text 2"/>
+          <p:cNvPr id="4" name="sc:cover/subtitle"/>
           <p:cNvSpPr txBox="1"/>
           <p:nvPr/>
         </p:nvSpPr>
@@ -2389,7 +2389,7 @@
       </p:sp>
       <p:sp>
         <p:nvSpPr>
-          <p:cNvPr id="6" name="Text 4"/>
+          <p:cNvPr id="6" name="sc:cover/presenter"/>
           <p:cNvSpPr txBox="1"/>
           <p:nvPr/>
         </p:nvSpPr>
@@ -2456,7 +2456,7 @@
       </p:grpSpPr>
       <p:sp>
         <p:nvSpPr>
-          <p:cNvPr id="3" name="SlideCraft Title"/>
+          <p:cNvPr id="3" name="SlideCraft Title sc:brand/title"/>
           <p:cNvSpPr>
             <a:spLocks xmlns:a="http://schemas.openxmlformats.org/drawingml/2006/main" noGrp="1"/>
           </p:cNvSpPr>
@@ -2502,7 +2502,7 @@
       </p:sp>
       <p:sp>
         <p:nvSpPr>
-          <p:cNvPr id="2" name="Text 0"/>
+          <p:cNvPr id="2" name="sc:brand/tracker"/>
           <p:cNvSpPr txBox="1"/>
           <p:nvPr/>
         </p:nvSpPr>
@@ -2567,7 +2567,7 @@
       </p:sp>
       <p:sp>
         <p:nvSpPr>
-          <p:cNvPr id="5" name="Text 3"/>
+          <p:cNvPr id="5" name="sc:brand/points/0/heading"/>
           <p:cNvSpPr txBox="1"/>
           <p:nvPr/>
         </p:nvSpPr>
@@ -2632,7 +2632,7 @@
       </p:sp>
       <p:sp>
         <p:nvSpPr>
-          <p:cNvPr id="7" name="Text 5"/>
+          <p:cNvPr id="7" name="sc:brand/points/1/heading"/>
           <p:cNvSpPr txBox="1"/>
           <p:nvPr/>
         </p:nvSpPr>
@@ -2697,7 +2697,7 @@
       </p:sp>
       <p:sp>
         <p:nvSpPr>
-          <p:cNvPr id="9" name="Text 7"/>
+          <p:cNvPr id="9" name="sc:brand/points/2/heading"/>
           <p:cNvSpPr txBox="1"/>
           <p:nvPr/>
         </p:nvSpPr>
@@ -2739,7 +2739,7 @@
       </p:sp>
       <p:sp>
         <p:nvSpPr>
-          <p:cNvPr id="10" name="Text 8"/>
+          <p:cNvPr id="10" name="sc:brand/points/0/body"/>
           <p:cNvSpPr txBox="1"/>
           <p:nvPr/>
         </p:nvSpPr>
@@ -2781,7 +2781,7 @@
       </p:sp>
       <p:sp>
         <p:nvSpPr>
-          <p:cNvPr id="11" name="Text 9"/>
+          <p:cNvPr id="11" name="sc:brand/points/1/body"/>
           <p:cNvSpPr txBox="1"/>
           <p:nvPr/>
         </p:nvSpPr>
@@ -2823,7 +2823,7 @@
       </p:sp>
       <p:sp>
         <p:nvSpPr>
-          <p:cNvPr id="12" name="Text 10"/>
+          <p:cNvPr id="12" name="sc:brand/points/2/body"/>
           <p:cNvSpPr txBox="1"/>
           <p:nvPr/>
         </p:nvSpPr>
@@ -2938,7 +2938,7 @@
       </p:grpSpPr>
       <p:sp>
         <p:nvSpPr>
-          <p:cNvPr id="3" name="SlideCraft Title"/>
+          <p:cNvPr id="3" name="SlideCraft Title sc:start/title"/>
           <p:cNvSpPr>
             <a:spLocks xmlns:a="http://schemas.openxmlformats.org/drawingml/2006/main" noGrp="1"/>
           </p:cNvSpPr>
@@ -2984,7 +2984,7 @@
       </p:sp>
       <p:sp>
         <p:nvSpPr>
-          <p:cNvPr id="2" name="Text 0"/>
+          <p:cNvPr id="2" name="sc:start/tracker"/>
           <p:cNvSpPr txBox="1"/>
           <p:nvPr/>
         </p:nvSpPr>
@@ -3111,7 +3111,7 @@
       </p:sp>
       <p:sp>
         <p:nvSpPr>
-          <p:cNvPr id="7" name="Text 5"/>
+          <p:cNvPr id="7" name="sc:start/decision"/>
           <p:cNvSpPr txBox="1"/>
           <p:nvPr/>
         </p:nvSpPr>
@@ -3218,7 +3218,7 @@
       </p:sp>
       <p:sp>
         <p:nvSpPr>
-          <p:cNvPr id="10" name="Text 8"/>
+          <p:cNvPr id="10" name="sc:start/steps/0/action"/>
           <p:cNvSpPr txBox="1"/>
           <p:nvPr/>
         </p:nvSpPr>
@@ -3260,7 +3260,7 @@
       </p:sp>
       <p:sp>
         <p:nvSpPr>
-          <p:cNvPr id="11" name="Text 9"/>
+          <p:cNvPr id="11" name="sc:start/steps/0/owner"/>
           <p:cNvSpPr txBox="1"/>
           <p:nvPr/>
         </p:nvSpPr>
@@ -3367,7 +3367,7 @@
       </p:sp>
       <p:sp>
         <p:nvSpPr>
-          <p:cNvPr id="14" name="Text 12"/>
+          <p:cNvPr id="14" name="sc:start/steps/1/action"/>
           <p:cNvSpPr txBox="1"/>
           <p:nvPr/>
         </p:nvSpPr>
@@ -3409,7 +3409,7 @@
       </p:sp>
       <p:sp>
         <p:nvSpPr>
-          <p:cNvPr id="15" name="Text 13"/>
+          <p:cNvPr id="15" name="sc:start/steps/1/owner"/>
           <p:cNvSpPr txBox="1"/>
           <p:nvPr/>
         </p:nvSpPr>
@@ -3516,7 +3516,7 @@
       </p:sp>
       <p:sp>
         <p:nvSpPr>
-          <p:cNvPr id="18" name="Text 16"/>
+          <p:cNvPr id="18" name="sc:start/steps/2/action"/>
           <p:cNvSpPr txBox="1"/>
           <p:nvPr/>
         </p:nvSpPr>
@@ -3558,7 +3558,7 @@
       </p:sp>
       <p:sp>
         <p:nvSpPr>
-          <p:cNvPr id="19" name="Text 17"/>
+          <p:cNvPr id="19" name="sc:start/steps/2/owner"/>
           <p:cNvSpPr txBox="1"/>
           <p:nvPr/>
         </p:nvSpPr>
@@ -3665,7 +3665,7 @@
       </p:sp>
       <p:sp>
         <p:nvSpPr>
-          <p:cNvPr id="22" name="Text 20"/>
+          <p:cNvPr id="22" name="sc:start/steps/3/action"/>
           <p:cNvSpPr txBox="1"/>
           <p:nvPr/>
         </p:nvSpPr>
@@ -3707,7 +3707,7 @@
       </p:sp>
       <p:sp>
         <p:nvSpPr>
-          <p:cNvPr id="23" name="Text 21"/>
+          <p:cNvPr id="23" name="sc:start/steps/3/owner"/>
           <p:cNvSpPr txBox="1"/>
           <p:nvPr/>
         </p:nvSpPr>
@@ -3845,7 +3845,7 @@
       </p:grpSpPr>
       <p:sp>
         <p:nvSpPr>
-          <p:cNvPr id="2" name="SlideCraft Title"/>
+          <p:cNvPr id="2" name="SlideCraft Title sc:close/title"/>
           <p:cNvSpPr>
             <a:spLocks xmlns:a="http://schemas.openxmlformats.org/drawingml/2006/main" noGrp="1"/>
           </p:cNvSpPr>
@@ -3891,7 +3891,7 @@
       </p:sp>
       <p:sp>
         <p:nvSpPr>
-          <p:cNvPr id="3" name="Text 1"/>
+          <p:cNvPr id="3" name="sc:close/subtitle"/>
           <p:cNvSpPr txBox="1"/>
           <p:nvPr/>
         </p:nvSpPr>
@@ -3956,7 +3956,7 @@
       </p:sp>
       <p:sp>
         <p:nvSpPr>
-          <p:cNvPr id="5" name="Text 3"/>
+          <p:cNvPr id="5" name="sc:close/contact"/>
           <p:cNvSpPr txBox="1"/>
           <p:nvPr/>
         </p:nvSpPr>
@@ -4043,7 +4043,7 @@
       </p:grpSpPr>
       <p:sp>
         <p:nvSpPr>
-          <p:cNvPr id="2" name="SlideCraft Title"/>
+          <p:cNvPr id="2" name="SlideCraft Title sc:problem/title"/>
           <p:cNvSpPr>
             <a:spLocks xmlns:a="http://schemas.openxmlformats.org/drawingml/2006/main" noGrp="1"/>
           </p:cNvSpPr>
@@ -4089,7 +4089,7 @@
       </p:sp>
       <p:sp>
         <p:nvSpPr>
-          <p:cNvPr id="3" name="Text 1"/>
+          <p:cNvPr id="3" name="sc:problem/support"/>
           <p:cNvSpPr txBox="1"/>
           <p:nvPr/>
         </p:nvSpPr>
@@ -4227,7 +4227,7 @@
       </p:grpSpPr>
       <p:sp>
         <p:nvSpPr>
-          <p:cNvPr id="3" name="SlideCraft Title"/>
+          <p:cNvPr id="3" name="SlideCraft Title sc:summary/title"/>
           <p:cNvSpPr>
             <a:spLocks xmlns:a="http://schemas.openxmlformats.org/drawingml/2006/main" noGrp="1"/>
           </p:cNvSpPr>
@@ -4273,7 +4273,7 @@
       </p:sp>
       <p:sp>
         <p:nvSpPr>
-          <p:cNvPr id="2" name="Text 0"/>
+          <p:cNvPr id="2" name="sc:summary/tracker"/>
           <p:cNvSpPr txBox="1"/>
           <p:nvPr/>
         </p:nvSpPr>
@@ -4335,7 +4335,7 @@
       </p:sp>
       <p:sp>
         <p:nvSpPr>
-          <p:cNvPr id="5" name="Text 3"/>
+          <p:cNvPr id="5" name="sc:summary/ask"/>
           <p:cNvSpPr txBox="1"/>
           <p:nvPr/>
         </p:nvSpPr>
@@ -4436,7 +4436,7 @@
       </p:sp>
       <p:sp>
         <p:nvSpPr>
-          <p:cNvPr id="7" name="Text 5"/>
+          <p:cNvPr id="7" name="sc:summary/situation"/>
           <p:cNvSpPr txBox="1"/>
           <p:nvPr/>
         </p:nvSpPr>
@@ -4543,7 +4543,7 @@
       </p:sp>
       <p:sp>
         <p:nvSpPr>
-          <p:cNvPr id="10" name="Text 8"/>
+          <p:cNvPr id="10" name="sc:summary/complication"/>
           <p:cNvSpPr txBox="1"/>
           <p:nvPr/>
         </p:nvSpPr>
@@ -4650,7 +4650,7 @@
       </p:sp>
       <p:sp>
         <p:nvSpPr>
-          <p:cNvPr id="13" name="Text 11"/>
+          <p:cNvPr id="13" name="sc:summary/resolution"/>
           <p:cNvSpPr txBox="1"/>
           <p:nvPr/>
         </p:nvSpPr>
@@ -4765,7 +4765,7 @@
       </p:grpSpPr>
       <p:sp>
         <p:nvSpPr>
-          <p:cNvPr id="3" name="SlideCraft Title"/>
+          <p:cNvPr id="3" name="SlideCraft Title sc:how/title"/>
           <p:cNvSpPr>
             <a:spLocks xmlns:a="http://schemas.openxmlformats.org/drawingml/2006/main" noGrp="1"/>
           </p:cNvSpPr>
@@ -4811,7 +4811,7 @@
       </p:sp>
       <p:sp>
         <p:nvSpPr>
-          <p:cNvPr id="2" name="Text 0"/>
+          <p:cNvPr id="2" name="sc:how/tracker"/>
           <p:cNvSpPr txBox="1"/>
           <p:nvPr/>
         </p:nvSpPr>
@@ -4853,7 +4853,7 @@
       </p:sp>
       <p:sp>
         <p:nvSpPr>
-          <p:cNvPr id="4" name="Text 2"/>
+          <p:cNvPr id="4" name="sc:how/lead"/>
           <p:cNvSpPr txBox="1"/>
           <p:nvPr/>
         </p:nvSpPr>
@@ -4939,7 +4939,7 @@
       </p:sp>
       <p:sp>
         <p:nvSpPr>
-          <p:cNvPr id="6" name="Text 4"/>
+          <p:cNvPr id="6" name="sc:how/steps/0/title"/>
           <p:cNvSpPr txBox="1"/>
           <p:nvPr/>
         </p:nvSpPr>
@@ -4981,7 +4981,7 @@
       </p:sp>
       <p:sp>
         <p:nvSpPr>
-          <p:cNvPr id="7" name="Text 5"/>
+          <p:cNvPr id="7" name="sc:how/steps/0/body"/>
           <p:cNvSpPr txBox="1"/>
           <p:nvPr/>
         </p:nvSpPr>
@@ -5070,7 +5070,7 @@
       </p:sp>
       <p:sp>
         <p:nvSpPr>
-          <p:cNvPr id="9" name="Text 7"/>
+          <p:cNvPr id="9" name="sc:how/steps/1/title"/>
           <p:cNvSpPr txBox="1"/>
           <p:nvPr/>
         </p:nvSpPr>
@@ -5112,7 +5112,7 @@
       </p:sp>
       <p:sp>
         <p:nvSpPr>
-          <p:cNvPr id="10" name="Text 8"/>
+          <p:cNvPr id="10" name="sc:how/steps/1/body"/>
           <p:cNvSpPr txBox="1"/>
           <p:nvPr/>
         </p:nvSpPr>
@@ -5201,7 +5201,7 @@
       </p:sp>
       <p:sp>
         <p:nvSpPr>
-          <p:cNvPr id="12" name="Text 10"/>
+          <p:cNvPr id="12" name="sc:how/steps/2/title"/>
           <p:cNvSpPr txBox="1"/>
           <p:nvPr/>
         </p:nvSpPr>
@@ -5243,7 +5243,7 @@
       </p:sp>
       <p:sp>
         <p:nvSpPr>
-          <p:cNvPr id="13" name="Text 11"/>
+          <p:cNvPr id="13" name="sc:how/steps/2/body"/>
           <p:cNvSpPr txBox="1"/>
           <p:nvPr/>
         </p:nvSpPr>
@@ -5332,7 +5332,7 @@
       </p:sp>
       <p:sp>
         <p:nvSpPr>
-          <p:cNvPr id="15" name="Text 13"/>
+          <p:cNvPr id="15" name="sc:how/steps/3/title"/>
           <p:cNvSpPr txBox="1"/>
           <p:nvPr/>
         </p:nvSpPr>
@@ -5374,7 +5374,7 @@
       </p:sp>
       <p:sp>
         <p:nvSpPr>
-          <p:cNvPr id="16" name="Text 14"/>
+          <p:cNvPr id="16" name="sc:how/steps/3/body"/>
           <p:cNvSpPr txBox="1"/>
           <p:nvPr/>
         </p:nvSpPr>
@@ -5463,7 +5463,7 @@
       </p:sp>
       <p:sp>
         <p:nvSpPr>
-          <p:cNvPr id="18" name="Text 16"/>
+          <p:cNvPr id="18" name="sc:how/steps/4/title"/>
           <p:cNvSpPr txBox="1"/>
           <p:nvPr/>
         </p:nvSpPr>
@@ -5505,7 +5505,7 @@
       </p:sp>
       <p:sp>
         <p:nvSpPr>
-          <p:cNvPr id="19" name="Text 17"/>
+          <p:cNvPr id="19" name="sc:how/steps/4/body"/>
           <p:cNvSpPr txBox="1"/>
           <p:nvPr/>
         </p:nvSpPr>
@@ -5620,7 +5620,7 @@
       </p:grpSpPr>
       <p:sp>
         <p:nvSpPr>
-          <p:cNvPr id="3" name="SlideCraft Title"/>
+          <p:cNvPr id="3" name="SlideCraft Title sc:before-after/title"/>
           <p:cNvSpPr>
             <a:spLocks xmlns:a="http://schemas.openxmlformats.org/drawingml/2006/main" noGrp="1"/>
           </p:cNvSpPr>
@@ -5666,7 +5666,7 @@
       </p:sp>
       <p:sp>
         <p:nvSpPr>
-          <p:cNvPr id="2" name="Text 0"/>
+          <p:cNvPr id="2" name="sc:before-after/tracker"/>
           <p:cNvSpPr txBox="1"/>
           <p:nvPr/>
         </p:nvSpPr>
@@ -5728,7 +5728,7 @@
       </p:sp>
       <p:sp>
         <p:nvSpPr>
-          <p:cNvPr id="5" name="Text 3"/>
+          <p:cNvPr id="5" name="sc:before-after/before/label"/>
           <p:cNvSpPr txBox="1"/>
           <p:nvPr/>
         </p:nvSpPr>
@@ -5770,7 +5770,7 @@
       </p:sp>
       <p:sp>
         <p:nvSpPr>
-          <p:cNvPr id="6" name="Text 4"/>
+          <p:cNvPr id="6" name="sc:before-after/before/items"/>
           <p:cNvSpPr txBox="1"/>
           <p:nvPr/>
         </p:nvSpPr>
@@ -5963,7 +5963,7 @@
       </p:sp>
       <p:sp>
         <p:nvSpPr>
-          <p:cNvPr id="10" name="Text 8"/>
+          <p:cNvPr id="10" name="sc:before-after/after/label"/>
           <p:cNvSpPr txBox="1"/>
           <p:nvPr/>
         </p:nvSpPr>
@@ -6005,7 +6005,7 @@
       </p:sp>
       <p:sp>
         <p:nvSpPr>
-          <p:cNvPr id="11" name="Text 9"/>
+          <p:cNvPr id="11" name="sc:before-after/after/items"/>
           <p:cNvSpPr txBox="1"/>
           <p:nvPr/>
         </p:nvSpPr>
@@ -6193,7 +6193,7 @@
       </p:grpSpPr>
       <p:sp>
         <p:nvSpPr>
-          <p:cNvPr id="3" name="SlideCraft Title"/>
+          <p:cNvPr id="3" name="SlideCraft Title sc:who/title"/>
           <p:cNvSpPr>
             <a:spLocks xmlns:a="http://schemas.openxmlformats.org/drawingml/2006/main" noGrp="1"/>
           </p:cNvSpPr>
@@ -6239,7 +6239,7 @@
       </p:sp>
       <p:sp>
         <p:nvSpPr>
-          <p:cNvPr id="2" name="Text 0"/>
+          <p:cNvPr id="2" name="sc:who/tracker"/>
           <p:cNvSpPr txBox="1"/>
           <p:nvPr/>
         </p:nvSpPr>
@@ -6321,7 +6321,7 @@
       </p:sp>
       <p:sp>
         <p:nvSpPr>
-          <p:cNvPr id="6" name="Text 4"/>
+          <p:cNvPr id="6" name="sc:who/points/0/heading"/>
           <p:cNvSpPr txBox="1"/>
           <p:nvPr/>
         </p:nvSpPr>
@@ -6403,7 +6403,7 @@
       </p:sp>
       <p:sp>
         <p:nvSpPr>
-          <p:cNvPr id="9" name="Text 7"/>
+          <p:cNvPr id="9" name="sc:who/points/1/heading"/>
           <p:cNvSpPr txBox="1"/>
           <p:nvPr/>
         </p:nvSpPr>
@@ -6485,7 +6485,7 @@
       </p:sp>
       <p:sp>
         <p:nvSpPr>
-          <p:cNvPr id="12" name="Text 10"/>
+          <p:cNvPr id="12" name="sc:who/points/2/heading"/>
           <p:cNvSpPr txBox="1"/>
           <p:nvPr/>
         </p:nvSpPr>
@@ -6567,7 +6567,7 @@
       </p:sp>
       <p:sp>
         <p:nvSpPr>
-          <p:cNvPr id="15" name="Text 13"/>
+          <p:cNvPr id="15" name="sc:who/points/3/heading"/>
           <p:cNvSpPr txBox="1"/>
           <p:nvPr/>
         </p:nvSpPr>
@@ -6609,7 +6609,7 @@
       </p:sp>
       <p:sp>
         <p:nvSpPr>
-          <p:cNvPr id="16" name="Text 14"/>
+          <p:cNvPr id="16" name="sc:who/points/0/body"/>
           <p:cNvSpPr txBox="1"/>
           <p:nvPr/>
         </p:nvSpPr>
@@ -6651,7 +6651,7 @@
       </p:sp>
       <p:sp>
         <p:nvSpPr>
-          <p:cNvPr id="17" name="Text 15"/>
+          <p:cNvPr id="17" name="sc:who/points/1/body"/>
           <p:cNvSpPr txBox="1"/>
           <p:nvPr/>
         </p:nvSpPr>
@@ -6693,7 +6693,7 @@
       </p:sp>
       <p:sp>
         <p:nvSpPr>
-          <p:cNvPr id="18" name="Text 16"/>
+          <p:cNvPr id="18" name="sc:who/points/2/body"/>
           <p:cNvSpPr txBox="1"/>
           <p:nvPr/>
         </p:nvSpPr>
@@ -6735,7 +6735,7 @@
       </p:sp>
       <p:sp>
         <p:nvSpPr>
-          <p:cNvPr id="19" name="Text 17"/>
+          <p:cNvPr id="19" name="sc:who/points/3/body"/>
           <p:cNvSpPr txBox="1"/>
           <p:nvPr/>
         </p:nvSpPr>
@@ -6850,7 +6850,7 @@
       </p:grpSpPr>
       <p:sp>
         <p:nvSpPr>
-          <p:cNvPr id="3" name="SlideCraft Title"/>
+          <p:cNvPr id="3" name="SlideCraft Title sc:tasks/title"/>
           <p:cNvSpPr>
             <a:spLocks xmlns:a="http://schemas.openxmlformats.org/drawingml/2006/main" noGrp="1"/>
           </p:cNvSpPr>
@@ -6896,7 +6896,7 @@
       </p:sp>
       <p:sp>
         <p:nvSpPr>
-          <p:cNvPr id="2" name="Text 0"/>
+          <p:cNvPr id="2" name="sc:tasks/tracker"/>
           <p:cNvSpPr txBox="1"/>
           <p:nvPr/>
         </p:nvSpPr>
@@ -8185,7 +8185,7 @@
       </p:graphicFrame>
       <p:sp>
         <p:nvSpPr>
-          <p:cNvPr id="5" name="Text 2"/>
+          <p:cNvPr id="5" name="sc:tasks/note"/>
           <p:cNvSpPr txBox="1"/>
           <p:nvPr/>
         </p:nvSpPr>
@@ -8227,7 +8227,7 @@
       </p:sp>
       <p:sp>
         <p:nvSpPr>
-          <p:cNvPr id="6" name="Text 3"/>
+          <p:cNvPr id="6" name="sc:tasks/sources"/>
           <p:cNvSpPr txBox="1"/>
           <p:nvPr/>
         </p:nvSpPr>
@@ -8285,24 +8285,7 @@
                   </a:extLst>
                 </a:hlinkClick>
               </a:rPr>
-              <a:t>SlideCraft 0.4 release notes and test suite</a:t>
-            </a:r>
-            <a:pPr algn="l" indent="0" marL="0">
-              <a:lnSpc>
-                <a:spcPts val="960"/>
-              </a:lnSpc>
-              <a:buNone/>
-            </a:pPr>
-            <a:r>
-              <a:rPr lang="en-US" sz="800" dirty="0">
-                <a:solidFill>
-                  <a:srgbClr val="5B6B7F"/>
-                </a:solidFill>
-                <a:latin typeface="Arial" pitchFamily="34" charset="0"/>
-                <a:ea typeface="Arial" pitchFamily="34" charset="-122"/>
-                <a:cs typeface="Arial" pitchFamily="34" charset="-120"/>
-              </a:rPr>
-              <a:t> (Oct 2026)</a:t>
+              <a:t>SlideCraft 0.4 release notes and test suite (Oct 2026)</a:t>
             </a:r>
             <a:endParaRPr lang="en-US" sz="800" dirty="0"/>
           </a:p>
@@ -8383,7 +8366,7 @@
       </p:grpSpPr>
       <p:sp>
         <p:nvSpPr>
-          <p:cNvPr id="3" name="SlideCraft Title"/>
+          <p:cNvPr id="3" name="SlideCraft Title sc:kit/title"/>
           <p:cNvSpPr>
             <a:spLocks xmlns:a="http://schemas.openxmlformats.org/drawingml/2006/main" noGrp="1"/>
           </p:cNvSpPr>
@@ -8429,7 +8412,7 @@
       </p:sp>
       <p:sp>
         <p:nvSpPr>
-          <p:cNvPr id="2" name="Text 0"/>
+          <p:cNvPr id="2" name="sc:kit/tracker"/>
           <p:cNvSpPr txBox="1"/>
           <p:nvPr/>
         </p:nvSpPr>
@@ -8571,7 +8554,7 @@
       </p:sp>
       <p:sp>
         <p:nvSpPr>
-          <p:cNvPr id="9" name="Text 7"/>
+          <p:cNvPr id="9" name="sc:kit/tiles/0/label"/>
           <p:cNvSpPr txBox="1"/>
           <p:nvPr/>
         </p:nvSpPr>
@@ -8613,7 +8596,7 @@
       </p:sp>
       <p:sp>
         <p:nvSpPr>
-          <p:cNvPr id="10" name="Text 8"/>
+          <p:cNvPr id="10" name="sc:kit/tiles/1/label"/>
           <p:cNvSpPr txBox="1"/>
           <p:nvPr/>
         </p:nvSpPr>
@@ -8655,7 +8638,7 @@
       </p:sp>
       <p:sp>
         <p:nvSpPr>
-          <p:cNvPr id="11" name="Text 9"/>
+          <p:cNvPr id="11" name="sc:kit/tiles/2/label"/>
           <p:cNvSpPr txBox="1"/>
           <p:nvPr/>
         </p:nvSpPr>
@@ -8697,7 +8680,7 @@
       </p:sp>
       <p:sp>
         <p:nvSpPr>
-          <p:cNvPr id="12" name="Text 10"/>
+          <p:cNvPr id="12" name="sc:kit/tiles/3/label"/>
           <p:cNvSpPr txBox="1"/>
           <p:nvPr/>
         </p:nvSpPr>
@@ -8739,7 +8722,7 @@
       </p:sp>
       <p:sp>
         <p:nvSpPr>
-          <p:cNvPr id="13" name="Text 11"/>
+          <p:cNvPr id="13" name="sc:kit/tiles/0/value"/>
           <p:cNvSpPr txBox="1"/>
           <p:nvPr/>
         </p:nvSpPr>
@@ -8804,7 +8787,7 @@
       </p:sp>
       <p:sp>
         <p:nvSpPr>
-          <p:cNvPr id="15" name="Text 13"/>
+          <p:cNvPr id="15" name="sc:kit/tiles/0/note"/>
           <p:cNvSpPr txBox="1"/>
           <p:nvPr/>
         </p:nvSpPr>
@@ -8846,7 +8829,7 @@
       </p:sp>
       <p:sp>
         <p:nvSpPr>
-          <p:cNvPr id="16" name="Text 14"/>
+          <p:cNvPr id="16" name="sc:kit/tiles/1/value"/>
           <p:cNvSpPr txBox="1"/>
           <p:nvPr/>
         </p:nvSpPr>
@@ -8911,7 +8894,7 @@
       </p:sp>
       <p:sp>
         <p:nvSpPr>
-          <p:cNvPr id="18" name="Text 16"/>
+          <p:cNvPr id="18" name="sc:kit/tiles/1/note"/>
           <p:cNvSpPr txBox="1"/>
           <p:nvPr/>
         </p:nvSpPr>
@@ -8953,7 +8936,7 @@
       </p:sp>
       <p:sp>
         <p:nvSpPr>
-          <p:cNvPr id="19" name="Text 17"/>
+          <p:cNvPr id="19" name="sc:kit/tiles/2/value"/>
           <p:cNvSpPr txBox="1"/>
           <p:nvPr/>
         </p:nvSpPr>
@@ -9018,7 +9001,7 @@
       </p:sp>
       <p:sp>
         <p:nvSpPr>
-          <p:cNvPr id="21" name="Text 19"/>
+          <p:cNvPr id="21" name="sc:kit/tiles/2/note"/>
           <p:cNvSpPr txBox="1"/>
           <p:nvPr/>
         </p:nvSpPr>
@@ -9060,7 +9043,7 @@
       </p:sp>
       <p:sp>
         <p:nvSpPr>
-          <p:cNvPr id="22" name="Text 20"/>
+          <p:cNvPr id="22" name="sc:kit/tiles/3/value"/>
           <p:cNvSpPr txBox="1"/>
           <p:nvPr/>
         </p:nvSpPr>
@@ -9125,7 +9108,7 @@
       </p:sp>
       <p:sp>
         <p:nvSpPr>
-          <p:cNvPr id="24" name="Text 22"/>
+          <p:cNvPr id="24" name="sc:kit/tiles/3/note"/>
           <p:cNvSpPr txBox="1"/>
           <p:nvPr/>
         </p:nvSpPr>
@@ -9167,7 +9150,7 @@
       </p:sp>
       <p:sp>
         <p:nvSpPr>
-          <p:cNvPr id="25" name="Text 23"/>
+          <p:cNvPr id="25" name="sc:kit/sources"/>
           <p:cNvSpPr txBox="1"/>
           <p:nvPr/>
         </p:nvSpPr>
@@ -9225,24 +9208,7 @@
                   </a:extLst>
                 </a:hlinkClick>
               </a:rPr>
-              <a:t>SlideCraft 0.4 release notes and test suite</a:t>
-            </a:r>
-            <a:pPr algn="l" indent="0" marL="0">
-              <a:lnSpc>
-                <a:spcPts val="960"/>
-              </a:lnSpc>
-              <a:buNone/>
-            </a:pPr>
-            <a:r>
-              <a:rPr lang="en-US" sz="800" dirty="0">
-                <a:solidFill>
-                  <a:srgbClr val="5B6B7F"/>
-                </a:solidFill>
-                <a:latin typeface="Arial" pitchFamily="34" charset="0"/>
-                <a:ea typeface="Arial" pitchFamily="34" charset="-122"/>
-                <a:cs typeface="Arial" pitchFamily="34" charset="-120"/>
-              </a:rPr>
-              <a:t> (Oct 2026)</a:t>
+              <a:t>SlideCraft 0.4 release notes and test suite (Oct 2026)</a:t>
             </a:r>
             <a:endParaRPr lang="en-US" sz="800" dirty="0"/>
           </a:p>
@@ -9323,7 +9289,7 @@
       </p:grpSpPr>
       <p:sp>
         <p:nvSpPr>
-          <p:cNvPr id="3" name="SlideCraft Title"/>
+          <p:cNvPr id="3" name="SlideCraft Title sc:quality/title"/>
           <p:cNvSpPr>
             <a:spLocks xmlns:a="http://schemas.openxmlformats.org/drawingml/2006/main" noGrp="1"/>
           </p:cNvSpPr>
@@ -9369,7 +9335,7 @@
       </p:sp>
       <p:sp>
         <p:nvSpPr>
-          <p:cNvPr id="2" name="Text 0"/>
+          <p:cNvPr id="2" name="sc:quality/tracker"/>
           <p:cNvSpPr txBox="1"/>
           <p:nvPr/>
         </p:nvSpPr>
@@ -9539,7 +9505,7 @@
       </p:sp>
       <p:sp>
         <p:nvSpPr>
-          <p:cNvPr id="8" name="Text 6"/>
+          <p:cNvPr id="8" name="sc:quality/steps/0/check"/>
           <p:cNvSpPr txBox="1"/>
           <p:nvPr/>
         </p:nvSpPr>
@@ -9581,7 +9547,7 @@
       </p:sp>
       <p:sp>
         <p:nvSpPr>
-          <p:cNvPr id="9" name="Text 7"/>
+          <p:cNvPr id="9" name="sc:quality/steps/0/finding"/>
           <p:cNvSpPr txBox="1"/>
           <p:nvPr/>
         </p:nvSpPr>
@@ -9646,7 +9612,7 @@
       </p:sp>
       <p:sp>
         <p:nvSpPr>
-          <p:cNvPr id="11" name="Text 9"/>
+          <p:cNvPr id="11" name="sc:quality/steps/0/source"/>
           <p:cNvSpPr txBox="1"/>
           <p:nvPr/>
         </p:nvSpPr>
@@ -9854,7 +9820,7 @@
       </p:sp>
       <p:sp>
         <p:nvSpPr>
-          <p:cNvPr id="17" name="Text 15"/>
+          <p:cNvPr id="17" name="sc:quality/steps/1/check"/>
           <p:cNvSpPr txBox="1"/>
           <p:nvPr/>
         </p:nvSpPr>
@@ -9896,7 +9862,7 @@
       </p:sp>
       <p:sp>
         <p:nvSpPr>
-          <p:cNvPr id="18" name="Text 16"/>
+          <p:cNvPr id="18" name="sc:quality/steps/1/finding"/>
           <p:cNvSpPr txBox="1"/>
           <p:nvPr/>
         </p:nvSpPr>
@@ -9961,7 +9927,7 @@
       </p:sp>
       <p:sp>
         <p:nvSpPr>
-          <p:cNvPr id="20" name="Text 18"/>
+          <p:cNvPr id="20" name="sc:quality/steps/1/source"/>
           <p:cNvSpPr txBox="1"/>
           <p:nvPr/>
         </p:nvSpPr>
@@ -10169,7 +10135,7 @@
       </p:sp>
       <p:sp>
         <p:nvSpPr>
-          <p:cNvPr id="26" name="Text 24"/>
+          <p:cNvPr id="26" name="sc:quality/steps/2/check"/>
           <p:cNvSpPr txBox="1"/>
           <p:nvPr/>
         </p:nvSpPr>
@@ -10211,7 +10177,7 @@
       </p:sp>
       <p:sp>
         <p:nvSpPr>
-          <p:cNvPr id="27" name="Text 25"/>
+          <p:cNvPr id="27" name="sc:quality/steps/2/finding"/>
           <p:cNvSpPr txBox="1"/>
           <p:nvPr/>
         </p:nvSpPr>
@@ -10276,7 +10242,7 @@
       </p:sp>
       <p:sp>
         <p:nvSpPr>
-          <p:cNvPr id="29" name="Text 27"/>
+          <p:cNvPr id="29" name="sc:quality/steps/2/source"/>
           <p:cNvSpPr txBox="1"/>
           <p:nvPr/>
         </p:nvSpPr>
@@ -10484,7 +10450,7 @@
       </p:sp>
       <p:sp>
         <p:nvSpPr>
-          <p:cNvPr id="35" name="Text 33"/>
+          <p:cNvPr id="35" name="sc:quality/steps/3/check"/>
           <p:cNvSpPr txBox="1"/>
           <p:nvPr/>
         </p:nvSpPr>
@@ -10526,7 +10492,7 @@
       </p:sp>
       <p:sp>
         <p:nvSpPr>
-          <p:cNvPr id="36" name="Text 34"/>
+          <p:cNvPr id="36" name="sc:quality/steps/3/finding"/>
           <p:cNvSpPr txBox="1"/>
           <p:nvPr/>
         </p:nvSpPr>
@@ -10591,7 +10557,7 @@
       </p:sp>
       <p:sp>
         <p:nvSpPr>
-          <p:cNvPr id="38" name="Text 36"/>
+          <p:cNvPr id="38" name="sc:quality/steps/3/source"/>
           <p:cNvSpPr txBox="1"/>
           <p:nvPr/>
         </p:nvSpPr>
@@ -10653,7 +10619,7 @@
       </p:sp>
       <p:sp>
         <p:nvSpPr>
-          <p:cNvPr id="40" name="Text 38"/>
+          <p:cNvPr id="40" name="sc:quality/conclusion"/>
           <p:cNvSpPr txBox="1"/>
           <p:nvPr/>
         </p:nvSpPr>
@@ -10712,7 +10678,7 @@
       </p:sp>
       <p:sp>
         <p:nvSpPr>
-          <p:cNvPr id="41" name="Text 39"/>
+          <p:cNvPr id="41" name="sc:quality/exception"/>
           <p:cNvSpPr txBox="1"/>
           <p:nvPr/>
         </p:nvSpPr>
@@ -10771,7 +10737,7 @@
       </p:sp>
       <p:sp>
         <p:nvSpPr>
-          <p:cNvPr id="42" name="Text 40"/>
+          <p:cNvPr id="42" name="sc:quality/sources"/>
           <p:cNvSpPr txBox="1"/>
           <p:nvPr/>
         </p:nvSpPr>
@@ -10829,7 +10795,7 @@
                   </a:extLst>
                 </a:hlinkClick>
               </a:rPr>
-              <a:t>SlideCraft calibration against Microsoft PowerPoint, 144 strings</a:t>
+              <a:t>SlideCraft calibration against Microsoft PowerPoint, 144 strings (Oct 2026)</a:t>
             </a:r>
             <a:pPr algn="l" indent="0" marL="0">
               <a:lnSpc>
@@ -10846,7 +10812,7 @@
                 <a:ea typeface="Arial" pitchFamily="34" charset="-122"/>
                 <a:cs typeface="Arial" pitchFamily="34" charset="-120"/>
               </a:rPr>
-              <a:t> (Oct 2026); </a:t>
+              <a:t>; </a:t>
             </a:r>
             <a:pPr algn="l" indent="0" marL="0">
               <a:lnSpc>
@@ -10870,24 +10836,7 @@
                   </a:extLst>
                 </a:hlinkClick>
               </a:rPr>
-              <a:t>SlideCraft 0.4 release notes and test suite</a:t>
-            </a:r>
-            <a:pPr algn="l" indent="0" marL="0">
-              <a:lnSpc>
-                <a:spcPts val="960"/>
-              </a:lnSpc>
-              <a:buNone/>
-            </a:pPr>
-            <a:r>
-              <a:rPr lang="en-US" sz="800" dirty="0">
-                <a:solidFill>
-                  <a:srgbClr val="5B6B7F"/>
-                </a:solidFill>
-                <a:latin typeface="Arial" pitchFamily="34" charset="0"/>
-                <a:ea typeface="Arial" pitchFamily="34" charset="-122"/>
-                <a:cs typeface="Arial" pitchFamily="34" charset="-120"/>
-              </a:rPr>
-              <a:t> (Oct 2026)</a:t>
+              <a:t>SlideCraft 0.4 release notes and test suite (Oct 2026)</a:t>
             </a:r>
             <a:endParaRPr lang="en-US" sz="800" dirty="0"/>
           </a:p>

--- a/docs/showcase/slidecraft-overview.pptx
+++ b/docs/showcase/slidecraft-overview.pptx
@@ -1662,7 +1662,7 @@
           <a:p>
             <a:pPr algn="l" indent="0" marL="0">
               <a:lnSpc>
-                <a:spcPts val="1020"/>
+                <a:spcPct val="100000"/>
               </a:lnSpc>
               <a:buNone/>
             </a:pPr>
@@ -1814,7 +1814,7 @@
           <a:p>
             <a:pPr algn="l" indent="0" marL="0">
               <a:lnSpc>
-                <a:spcPts val="1020"/>
+                <a:spcPct val="100000"/>
               </a:lnSpc>
               <a:buNone/>
             </a:pPr>
@@ -1881,6 +1881,38 @@
           </a:p>
         </p:txBody>
       </p:sp>
+    </p:spTree>
+  </p:cSld>
+  <p:clrMapOvr>
+    <a:masterClrMapping/>
+  </p:clrMapOvr>
+</p:sldLayout>
+</file>
+
+<file path=ppt/slideLayouts/slideLayout5.xml><?xml version="1.0" encoding="utf-8"?>
+<p:sldLayout xmlns:a="http://schemas.openxmlformats.org/drawingml/2006/main" xmlns:r="http://schemas.openxmlformats.org/officeDocument/2006/relationships" xmlns:p="http://schemas.openxmlformats.org/presentationml/2006/main" preserve="1">
+  <p:cSld name="canvas">
+    <p:bg>
+      <p:bgPr>
+        <a:solidFill>
+          <a:srgbClr val="FFFFFF"/>
+        </a:solidFill>
+      </p:bgPr>
+    </p:bg>
+    <p:spTree>
+      <p:nvGrpSpPr>
+        <p:cNvPr id="1" name=""/>
+        <p:cNvGrpSpPr/>
+        <p:nvPr/>
+      </p:nvGrpSpPr>
+      <p:grpSpPr>
+        <a:xfrm>
+          <a:off x="0" y="0"/>
+          <a:ext cx="0" cy="0"/>
+          <a:chOff x="0" y="0"/>
+          <a:chExt cx="0" cy="0"/>
+        </a:xfrm>
+      </p:grpSpPr>
     </p:spTree>
   </p:cSld>
   <p:clrMapOvr>
@@ -1962,6 +1994,7 @@
     <p:sldLayoutId id="2147483650" r:id="rId2"/>
     <p:sldLayoutId id="2147483651" r:id="rId3"/>
     <p:sldLayoutId id="2147483652" r:id="rId4"/>
+    <p:sldLayoutId id="2147483653" r:id="rId5"/>
   </p:sldLayoutIdLst>
   <p:hf sldNum="0" hdr="0" ftr="0" dt="0"/>
   <p:txStyles>
@@ -2261,12 +2294,12 @@
           <a:p>
             <a:pPr algn="l" indent="0" marL="0">
               <a:lnSpc>
-                <a:spcPts val="4320"/>
+                <a:spcPct val="90000"/>
               </a:lnSpc>
               <a:buNone/>
             </a:pPr>
             <a:r>
-              <a:rPr lang="en-US" sz="4000" b="1" dirty="0">
+              <a:rPr lang="en-US" sz="4000" b="1" dirty="0" kern="400000">
                 <a:solidFill>
                   <a:srgbClr val="0B1F3A"/>
                 </a:solidFill>
@@ -2276,7 +2309,14 @@
               </a:rPr>
               <a:t>SlideCraft turns a goal into a partner-ready deck you can edit</a:t>
             </a:r>
-            <a:endParaRPr lang="en-US" sz="4000" dirty="0"/>
+            <a:endParaRPr lang="en-US" sz="4000" b="1" dirty="0" kern="400000">
+              <a:solidFill>
+                <a:srgbClr val="0B1F3A"/>
+              </a:solidFill>
+              <a:latin typeface="Arial" pitchFamily="34" charset="0"/>
+              <a:ea typeface="Arial" pitchFamily="34" charset="-122"/>
+              <a:cs typeface="Arial" pitchFamily="34" charset="-120"/>
+            </a:endParaRPr>
           </a:p>
         </p:txBody>
       </p:sp>
@@ -2303,12 +2343,12 @@
           <a:p>
             <a:pPr algn="l" indent="0" marL="0">
               <a:lnSpc>
-                <a:spcPts val="1200"/>
+                <a:spcPct val="100000"/>
               </a:lnSpc>
               <a:buNone/>
             </a:pPr>
             <a:r>
-              <a:rPr lang="en-US" sz="1000" b="1" dirty="0">
+              <a:rPr lang="en-US" sz="1000" b="1" dirty="0" kern="400000">
                 <a:solidFill>
                   <a:srgbClr val="1F5FBF"/>
                 </a:solidFill>
@@ -2318,7 +2358,14 @@
               </a:rPr>
               <a:t>PRODUCT OVERVIEW · FOR PEOPLE WHO PRESENT</a:t>
             </a:r>
-            <a:endParaRPr lang="en-US" sz="1000" dirty="0"/>
+            <a:endParaRPr lang="en-US" sz="1000" b="1" dirty="0" kern="400000">
+              <a:solidFill>
+                <a:srgbClr val="1F5FBF"/>
+              </a:solidFill>
+              <a:latin typeface="Arial" pitchFamily="34" charset="0"/>
+              <a:ea typeface="Arial" pitchFamily="34" charset="-122"/>
+              <a:cs typeface="Arial" pitchFamily="34" charset="-120"/>
+            </a:endParaRPr>
           </a:p>
         </p:txBody>
       </p:sp>
@@ -2345,12 +2392,12 @@
           <a:p>
             <a:pPr algn="l" indent="0" marL="0">
               <a:lnSpc>
-                <a:spcPts val="1920"/>
+                <a:spcPct val="100000"/>
               </a:lnSpc>
               <a:buNone/>
             </a:pPr>
             <a:r>
-              <a:rPr lang="en-US" sz="1600" dirty="0">
+              <a:rPr lang="en-US" sz="1600" dirty="0" kern="400000">
                 <a:solidFill>
                   <a:srgbClr val="5B6B7F"/>
                 </a:solidFill>
@@ -2360,7 +2407,14 @@
               </a:rPr>
               <a:t>Describe what the deck must achieve and approve four checkpoints. Get an editable PowerPoint, a PDF and a partner-style review.</a:t>
             </a:r>
-            <a:endParaRPr lang="en-US" sz="1600" dirty="0"/>
+            <a:endParaRPr lang="en-US" sz="1600" dirty="0" kern="400000">
+              <a:solidFill>
+                <a:srgbClr val="5B6B7F"/>
+              </a:solidFill>
+              <a:latin typeface="Arial" pitchFamily="34" charset="0"/>
+              <a:ea typeface="Arial" pitchFamily="34" charset="-122"/>
+              <a:cs typeface="Arial" pitchFamily="34" charset="-120"/>
+            </a:endParaRPr>
           </a:p>
         </p:txBody>
       </p:sp>
@@ -2373,11 +2427,25 @@
         <p:spPr>
           <a:xfrm>
             <a:off x="822960" y="5715000"/>
-            <a:ext cx="822960" cy="91"/>
-          </a:xfrm>
-          <a:prstGeom prst="line">
-            <a:avLst/>
-          </a:prstGeom>
+            <a:ext cx="822960" cy="0"/>
+          </a:xfrm>
+          <a:custGeom>
+            <a:avLst/>
+            <a:gdLst/>
+            <a:ahLst/>
+            <a:cxnLst/>
+            <a:rect l="0" t="0" r="r" b="b"/>
+            <a:pathLst>
+              <a:path w="822960" h="0" fill="none">
+                <a:moveTo>
+                  <a:pt x="0" y="0"/>
+                </a:moveTo>
+                <a:lnTo>
+                  <a:pt x="822960" y="0"/>
+                </a:lnTo>
+              </a:path>
+            </a:pathLst>
+          </a:custGeom>
           <a:noFill/>
           <a:ln w="25400">
             <a:solidFill>
@@ -2410,12 +2478,12 @@
           <a:p>
             <a:pPr algn="l" indent="0" marL="0">
               <a:lnSpc>
-                <a:spcPts val="1200"/>
+                <a:spcPct val="100000"/>
               </a:lnSpc>
               <a:buNone/>
             </a:pPr>
             <a:r>
-              <a:rPr lang="en-US" sz="1000" dirty="0">
+              <a:rPr lang="en-US" sz="1000" dirty="0" kern="400000">
                 <a:solidFill>
                   <a:srgbClr val="5B6B7F"/>
                 </a:solidFill>
@@ -2425,7 +2493,14 @@
               </a:rPr>
               <a:t>Denis Ermilov · SlideCraft   ·   2026</a:t>
             </a:r>
-            <a:endParaRPr lang="en-US" sz="1000" dirty="0"/>
+            <a:endParaRPr lang="en-US" sz="1000" dirty="0" kern="400000">
+              <a:solidFill>
+                <a:srgbClr val="5B6B7F"/>
+              </a:solidFill>
+              <a:latin typeface="Arial" pitchFamily="34" charset="0"/>
+              <a:ea typeface="Arial" pitchFamily="34" charset="-122"/>
+              <a:cs typeface="Arial" pitchFamily="34" charset="-120"/>
+            </a:endParaRPr>
           </a:p>
         </p:txBody>
       </p:sp>
@@ -2481,12 +2556,12 @@
           <a:p>
             <a:pPr algn="l" indent="0" marL="0">
               <a:lnSpc>
-                <a:spcPts val="2688"/>
+                <a:spcPct val="93333"/>
               </a:lnSpc>
               <a:buNone/>
             </a:pPr>
             <a:r>
-              <a:rPr lang="en-US" sz="2400" b="1" dirty="0">
+              <a:rPr lang="en-US" sz="2400" b="1" dirty="0" kern="400000">
                 <a:solidFill>
                   <a:srgbClr val="0B1F3A"/>
                 </a:solidFill>
@@ -2496,7 +2571,14 @@
               </a:rPr>
               <a:t>Your brand, your old decks and your readers all come along</a:t>
             </a:r>
-            <a:endParaRPr lang="en-US" sz="2400" dirty="0"/>
+            <a:endParaRPr lang="en-US" sz="2400" b="1" dirty="0" kern="400000">
+              <a:solidFill>
+                <a:srgbClr val="0B1F3A"/>
+              </a:solidFill>
+              <a:latin typeface="Arial" pitchFamily="34" charset="0"/>
+              <a:ea typeface="Arial" pitchFamily="34" charset="-122"/>
+              <a:cs typeface="Arial" pitchFamily="34" charset="-120"/>
+            </a:endParaRPr>
           </a:p>
         </p:txBody>
       </p:sp>
@@ -2523,12 +2605,12 @@
           <a:p>
             <a:pPr algn="l" indent="0" marL="0">
               <a:lnSpc>
-                <a:spcPts val="1200"/>
+                <a:spcPct val="100000"/>
               </a:lnSpc>
               <a:buNone/>
             </a:pPr>
             <a:r>
-              <a:rPr lang="en-US" sz="1000" b="1" dirty="0">
+              <a:rPr lang="en-US" sz="1000" b="1" dirty="0" kern="400000">
                 <a:solidFill>
                   <a:srgbClr val="1F5FBF"/>
                 </a:solidFill>
@@ -2538,7 +2620,14 @@
               </a:rPr>
               <a:t>FITS YOUR WORK</a:t>
             </a:r>
-            <a:endParaRPr lang="en-US" sz="1000" dirty="0"/>
+            <a:endParaRPr lang="en-US" sz="1000" b="1" dirty="0" kern="400000">
+              <a:solidFill>
+                <a:srgbClr val="1F5FBF"/>
+              </a:solidFill>
+              <a:latin typeface="Arial" pitchFamily="34" charset="0"/>
+              <a:ea typeface="Arial" pitchFamily="34" charset="-122"/>
+              <a:cs typeface="Arial" pitchFamily="34" charset="-120"/>
+            </a:endParaRPr>
           </a:p>
         </p:txBody>
       </p:sp>
@@ -2551,11 +2640,25 @@
         <p:spPr>
           <a:xfrm>
             <a:off x="548640" y="1682496"/>
-            <a:ext cx="3362858" cy="91"/>
-          </a:xfrm>
-          <a:prstGeom prst="line">
-            <a:avLst/>
-          </a:prstGeom>
+            <a:ext cx="3362858" cy="0"/>
+          </a:xfrm>
+          <a:custGeom>
+            <a:avLst/>
+            <a:gdLst/>
+            <a:ahLst/>
+            <a:cxnLst/>
+            <a:rect l="0" t="0" r="r" b="b"/>
+            <a:pathLst>
+              <a:path w="3362858" h="0" fill="none">
+                <a:moveTo>
+                  <a:pt x="0" y="0"/>
+                </a:moveTo>
+                <a:lnTo>
+                  <a:pt x="3362858" y="0"/>
+                </a:lnTo>
+              </a:path>
+            </a:pathLst>
+          </a:custGeom>
           <a:noFill/>
           <a:ln w="31750">
             <a:solidFill>
@@ -2588,12 +2691,12 @@
           <a:p>
             <a:pPr algn="l" indent="0" marL="0">
               <a:lnSpc>
-                <a:spcPts val="2160"/>
+                <a:spcPct val="100000"/>
               </a:lnSpc>
               <a:buNone/>
             </a:pPr>
             <a:r>
-              <a:rPr lang="en-US" sz="1800" b="1" dirty="0">
+              <a:rPr lang="en-US" sz="1800" b="1" dirty="0" kern="400000">
                 <a:solidFill>
                   <a:srgbClr val="0B1F3A"/>
                 </a:solidFill>
@@ -2603,7 +2706,14 @@
               </a:rPr>
               <a:t>Your template, your look</a:t>
             </a:r>
-            <a:endParaRPr lang="en-US" sz="1800" dirty="0"/>
+            <a:endParaRPr lang="en-US" sz="1800" b="1" dirty="0" kern="400000">
+              <a:solidFill>
+                <a:srgbClr val="0B1F3A"/>
+              </a:solidFill>
+              <a:latin typeface="Arial" pitchFamily="34" charset="0"/>
+              <a:ea typeface="Arial" pitchFamily="34" charset="-122"/>
+              <a:cs typeface="Arial" pitchFamily="34" charset="-120"/>
+            </a:endParaRPr>
           </a:p>
         </p:txBody>
       </p:sp>
@@ -2616,11 +2726,25 @@
         <p:spPr>
           <a:xfrm>
             <a:off x="4414418" y="1682496"/>
-            <a:ext cx="3362858" cy="91"/>
-          </a:xfrm>
-          <a:prstGeom prst="line">
-            <a:avLst/>
-          </a:prstGeom>
+            <a:ext cx="3362858" cy="0"/>
+          </a:xfrm>
+          <a:custGeom>
+            <a:avLst/>
+            <a:gdLst/>
+            <a:ahLst/>
+            <a:cxnLst/>
+            <a:rect l="0" t="0" r="r" b="b"/>
+            <a:pathLst>
+              <a:path w="3362858" h="0" fill="none">
+                <a:moveTo>
+                  <a:pt x="0" y="0"/>
+                </a:moveTo>
+                <a:lnTo>
+                  <a:pt x="3362858" y="0"/>
+                </a:lnTo>
+              </a:path>
+            </a:pathLst>
+          </a:custGeom>
           <a:noFill/>
           <a:ln w="31750">
             <a:solidFill>
@@ -2653,12 +2777,12 @@
           <a:p>
             <a:pPr algn="l" indent="0" marL="0">
               <a:lnSpc>
-                <a:spcPts val="2160"/>
+                <a:spcPct val="100000"/>
               </a:lnSpc>
               <a:buNone/>
             </a:pPr>
             <a:r>
-              <a:rPr lang="en-US" sz="1800" b="1" dirty="0">
+              <a:rPr lang="en-US" sz="1800" b="1" dirty="0" kern="400000">
                 <a:solidFill>
                   <a:srgbClr val="0B1F3A"/>
                 </a:solidFill>
@@ -2668,7 +2792,14 @@
               </a:rPr>
               <a:t>Old decks, restyled</a:t>
             </a:r>
-            <a:endParaRPr lang="en-US" sz="1800" dirty="0"/>
+            <a:endParaRPr lang="en-US" sz="1800" b="1" dirty="0" kern="400000">
+              <a:solidFill>
+                <a:srgbClr val="0B1F3A"/>
+              </a:solidFill>
+              <a:latin typeface="Arial" pitchFamily="34" charset="0"/>
+              <a:ea typeface="Arial" pitchFamily="34" charset="-122"/>
+              <a:cs typeface="Arial" pitchFamily="34" charset="-120"/>
+            </a:endParaRPr>
           </a:p>
         </p:txBody>
       </p:sp>
@@ -2681,11 +2812,25 @@
         <p:spPr>
           <a:xfrm>
             <a:off x="8280197" y="1682496"/>
-            <a:ext cx="3362858" cy="91"/>
-          </a:xfrm>
-          <a:prstGeom prst="line">
-            <a:avLst/>
-          </a:prstGeom>
+            <a:ext cx="3362858" cy="0"/>
+          </a:xfrm>
+          <a:custGeom>
+            <a:avLst/>
+            <a:gdLst/>
+            <a:ahLst/>
+            <a:cxnLst/>
+            <a:rect l="0" t="0" r="r" b="b"/>
+            <a:pathLst>
+              <a:path w="3362858" h="0" fill="none">
+                <a:moveTo>
+                  <a:pt x="0" y="0"/>
+                </a:moveTo>
+                <a:lnTo>
+                  <a:pt x="3362858" y="0"/>
+                </a:lnTo>
+              </a:path>
+            </a:pathLst>
+          </a:custGeom>
           <a:noFill/>
           <a:ln w="31750">
             <a:solidFill>
@@ -2718,12 +2863,12 @@
           <a:p>
             <a:pPr algn="l" indent="0" marL="0">
               <a:lnSpc>
-                <a:spcPts val="2160"/>
+                <a:spcPct val="100000"/>
               </a:lnSpc>
               <a:buNone/>
             </a:pPr>
             <a:r>
-              <a:rPr lang="en-US" sz="1800" b="1" dirty="0">
+              <a:rPr lang="en-US" sz="1800" b="1" dirty="0" kern="400000">
                 <a:solidFill>
                   <a:srgbClr val="0B1F3A"/>
                 </a:solidFill>
@@ -2733,7 +2878,14 @@
               </a:rPr>
               <a:t>The format each reader needs</a:t>
             </a:r>
-            <a:endParaRPr lang="en-US" sz="1800" dirty="0"/>
+            <a:endParaRPr lang="en-US" sz="1800" b="1" dirty="0" kern="400000">
+              <a:solidFill>
+                <a:srgbClr val="0B1F3A"/>
+              </a:solidFill>
+              <a:latin typeface="Arial" pitchFamily="34" charset="0"/>
+              <a:ea typeface="Arial" pitchFamily="34" charset="-122"/>
+              <a:cs typeface="Arial" pitchFamily="34" charset="-120"/>
+            </a:endParaRPr>
           </a:p>
         </p:txBody>
       </p:sp>
@@ -2760,12 +2912,12 @@
           <a:p>
             <a:pPr algn="l" indent="0" marL="0">
               <a:lnSpc>
-                <a:spcPts val="1800"/>
+                <a:spcPct val="100000"/>
               </a:lnSpc>
               <a:buNone/>
             </a:pPr>
             <a:r>
-              <a:rPr lang="en-US" sz="1500" dirty="0">
+              <a:rPr lang="en-US" sz="1500" dirty="0" kern="400000">
                 <a:solidFill>
                   <a:srgbClr val="0B1F3A"/>
                 </a:solidFill>
@@ -2775,7 +2927,14 @@
               </a:rPr>
               <a:t>Import a .potx once. Colours, fonts, logo and layouts apply, and PowerPoint files are built inside your template.</a:t>
             </a:r>
-            <a:endParaRPr lang="en-US" sz="1500" dirty="0"/>
+            <a:endParaRPr lang="en-US" sz="1500" dirty="0" kern="400000">
+              <a:solidFill>
+                <a:srgbClr val="0B1F3A"/>
+              </a:solidFill>
+              <a:latin typeface="Arial" pitchFamily="34" charset="0"/>
+              <a:ea typeface="Arial" pitchFamily="34" charset="-122"/>
+              <a:cs typeface="Arial" pitchFamily="34" charset="-120"/>
+            </a:endParaRPr>
           </a:p>
         </p:txBody>
       </p:sp>
@@ -2802,12 +2961,12 @@
           <a:p>
             <a:pPr algn="l" indent="0" marL="0">
               <a:lnSpc>
-                <a:spcPts val="1800"/>
+                <a:spcPct val="100000"/>
               </a:lnSpc>
               <a:buNone/>
             </a:pPr>
             <a:r>
-              <a:rPr lang="en-US" sz="1500" dirty="0">
+              <a:rPr lang="en-US" sz="1500" dirty="0" kern="400000">
                 <a:solidFill>
                   <a:srgbClr val="0B1F3A"/>
                 </a:solidFill>
@@ -2817,7 +2976,14 @@
               </a:rPr>
               <a:t>Bring an existing PowerPoint. The assistant rewrites the titles as claims and rebuilds the charts from the data.</a:t>
             </a:r>
-            <a:endParaRPr lang="en-US" sz="1500" dirty="0"/>
+            <a:endParaRPr lang="en-US" sz="1500" dirty="0" kern="400000">
+              <a:solidFill>
+                <a:srgbClr val="0B1F3A"/>
+              </a:solidFill>
+              <a:latin typeface="Arial" pitchFamily="34" charset="0"/>
+              <a:ea typeface="Arial" pitchFamily="34" charset="-122"/>
+              <a:cs typeface="Arial" pitchFamily="34" charset="-120"/>
+            </a:endParaRPr>
           </a:p>
         </p:txBody>
       </p:sp>
@@ -2844,12 +3010,12 @@
           <a:p>
             <a:pPr algn="l" indent="0" marL="0">
               <a:lnSpc>
-                <a:spcPts val="1800"/>
+                <a:spcPct val="100000"/>
               </a:lnSpc>
               <a:buNone/>
             </a:pPr>
             <a:r>
-              <a:rPr lang="en-US" sz="1500" dirty="0">
+              <a:rPr lang="en-US" sz="1500" dirty="0" kern="400000">
                 <a:solidFill>
                   <a:srgbClr val="0B1F3A"/>
                 </a:solidFill>
@@ -2859,7 +3025,14 @@
               </a:rPr>
               <a:t>A PDF for the board, a one-page summary, a Word memo for pre-reading, an HTML deck for presenting.</a:t>
             </a:r>
-            <a:endParaRPr lang="en-US" sz="1500" dirty="0"/>
+            <a:endParaRPr lang="en-US" sz="1500" dirty="0" kern="400000">
+              <a:solidFill>
+                <a:srgbClr val="0B1F3A"/>
+              </a:solidFill>
+              <a:latin typeface="Arial" pitchFamily="34" charset="0"/>
+              <a:ea typeface="Arial" pitchFamily="34" charset="-122"/>
+              <a:cs typeface="Arial" pitchFamily="34" charset="-120"/>
+            </a:endParaRPr>
           </a:p>
         </p:txBody>
       </p:sp>
@@ -2891,7 +3064,7 @@
           <a:bodyPr lIns="0" tIns="0" rIns="0" bIns="0"/>
           <a:lstStyle>
             <a:lvl1pPr>
-              <a:defRPr sz="850">
+              <a:defRPr sz="850" kern="400000">
                 <a:solidFill>
                   <a:srgbClr val="5B6B7F"/>
                 </a:solidFill>
@@ -2904,10 +3077,10 @@
           <a:p>
             <a:pPr algn="r"/>
             <a:fld id="{F7021451-1387-4CA6-816F-3879F97B5CBC}" type="slidenum">
-              <a:rPr b="0" lang="en-US"/>
+              <a:rPr b="0" lang="en-US" kern="400000"/>
               <a:t>10</a:t>
             </a:fld>
-            <a:endParaRPr lang="en-US"/>
+            <a:endParaRPr b="0" lang="en-US" kern="400000"/>
           </a:p>
         </p:txBody>
       </p:sp>
@@ -2963,12 +3136,12 @@
           <a:p>
             <a:pPr algn="l" indent="0" marL="0">
               <a:lnSpc>
-                <a:spcPts val="2688"/>
+                <a:spcPct val="93333"/>
               </a:lnSpc>
               <a:buNone/>
             </a:pPr>
             <a:r>
-              <a:rPr lang="en-US" sz="2400" b="1" dirty="0">
+              <a:rPr lang="en-US" sz="2400" b="1" dirty="0" kern="400000">
                 <a:solidFill>
                   <a:srgbClr val="0B1F3A"/>
                 </a:solidFill>
@@ -2978,7 +3151,14 @@
               </a:rPr>
               <a:t>Start with your next deck in about ten minutes</a:t>
             </a:r>
-            <a:endParaRPr lang="en-US" sz="2400" dirty="0"/>
+            <a:endParaRPr lang="en-US" sz="2400" b="1" dirty="0" kern="400000">
+              <a:solidFill>
+                <a:srgbClr val="0B1F3A"/>
+              </a:solidFill>
+              <a:latin typeface="Arial" pitchFamily="34" charset="0"/>
+              <a:ea typeface="Arial" pitchFamily="34" charset="-122"/>
+              <a:cs typeface="Arial" pitchFamily="34" charset="-120"/>
+            </a:endParaRPr>
           </a:p>
         </p:txBody>
       </p:sp>
@@ -3005,12 +3185,12 @@
           <a:p>
             <a:pPr algn="l" indent="0" marL="0">
               <a:lnSpc>
-                <a:spcPts val="1200"/>
+                <a:spcPct val="100000"/>
               </a:lnSpc>
               <a:buNone/>
             </a:pPr>
             <a:r>
-              <a:rPr lang="en-US" sz="1000" b="1" dirty="0">
+              <a:rPr lang="en-US" sz="1000" b="1" dirty="0" kern="400000">
                 <a:solidFill>
                   <a:srgbClr val="1F5FBF"/>
                 </a:solidFill>
@@ -3020,7 +3200,14 @@
               </a:rPr>
               <a:t>GET STARTED</a:t>
             </a:r>
-            <a:endParaRPr lang="en-US" sz="1000" dirty="0"/>
+            <a:endParaRPr lang="en-US" sz="1000" b="1" dirty="0" kern="400000">
+              <a:solidFill>
+                <a:srgbClr val="1F5FBF"/>
+              </a:solidFill>
+              <a:latin typeface="Arial" pitchFamily="34" charset="0"/>
+              <a:ea typeface="Arial" pitchFamily="34" charset="-122"/>
+              <a:cs typeface="Arial" pitchFamily="34" charset="-120"/>
+            </a:endParaRPr>
           </a:p>
         </p:txBody>
       </p:sp>
@@ -3067,12 +3254,12 @@
           <a:p>
             <a:pPr algn="l" indent="0" marL="0">
               <a:lnSpc>
-                <a:spcPts val="1200"/>
+                <a:spcPct val="100000"/>
               </a:lnSpc>
               <a:buNone/>
             </a:pPr>
             <a:r>
-              <a:rPr lang="en-US" sz="1000" b="1" dirty="0">
+              <a:rPr lang="en-US" sz="1000" b="1" dirty="0" kern="400000">
                 <a:solidFill>
                   <a:srgbClr val="FFFFFF"/>
                 </a:solidFill>
@@ -3082,7 +3269,14 @@
               </a:rPr>
               <a:t>DECISION REQUESTED</a:t>
             </a:r>
-            <a:endParaRPr lang="en-US" sz="1000" dirty="0"/>
+            <a:endParaRPr lang="en-US" sz="1000" b="1" dirty="0" kern="400000">
+              <a:solidFill>
+                <a:srgbClr val="FFFFFF"/>
+              </a:solidFill>
+              <a:latin typeface="Arial" pitchFamily="34" charset="0"/>
+              <a:ea typeface="Arial" pitchFamily="34" charset="-122"/>
+              <a:cs typeface="Arial" pitchFamily="34" charset="-120"/>
+            </a:endParaRPr>
           </a:p>
         </p:txBody>
       </p:sp>
@@ -3095,11 +3289,25 @@
         <p:spPr>
           <a:xfrm>
             <a:off x="914400" y="2432304"/>
-            <a:ext cx="457200" cy="91"/>
-          </a:xfrm>
-          <a:prstGeom prst="line">
-            <a:avLst/>
-          </a:prstGeom>
+            <a:ext cx="457200" cy="0"/>
+          </a:xfrm>
+          <a:custGeom>
+            <a:avLst/>
+            <a:gdLst/>
+            <a:ahLst/>
+            <a:cxnLst/>
+            <a:rect l="0" t="0" r="r" b="b"/>
+            <a:pathLst>
+              <a:path w="457200" h="0" fill="none">
+                <a:moveTo>
+                  <a:pt x="0" y="0"/>
+                </a:moveTo>
+                <a:lnTo>
+                  <a:pt x="457200" y="0"/>
+                </a:lnTo>
+              </a:path>
+            </a:pathLst>
+          </a:custGeom>
           <a:noFill/>
           <a:ln w="19050">
             <a:solidFill>
@@ -3132,12 +3340,12 @@
           <a:p>
             <a:pPr algn="l" indent="0" marL="0">
               <a:lnSpc>
-                <a:spcPts val="2596"/>
+                <a:spcPct val="98333"/>
               </a:lnSpc>
               <a:buNone/>
             </a:pPr>
             <a:r>
-              <a:rPr lang="en-US" sz="2200" b="1" dirty="0">
+              <a:rPr lang="en-US" sz="2200" b="1" dirty="0" kern="400000">
                 <a:solidFill>
                   <a:srgbClr val="FFFFFF"/>
                 </a:solidFill>
@@ -3147,7 +3355,14 @@
               </a:rPr>
               <a:t>Try SlideCraft on one real deck this week</a:t>
             </a:r>
-            <a:endParaRPr lang="en-US" sz="2200" dirty="0"/>
+            <a:endParaRPr lang="en-US" sz="2200" b="1" dirty="0" kern="400000">
+              <a:solidFill>
+                <a:srgbClr val="FFFFFF"/>
+              </a:solidFill>
+              <a:latin typeface="Arial" pitchFamily="34" charset="0"/>
+              <a:ea typeface="Arial" pitchFamily="34" charset="-122"/>
+              <a:cs typeface="Arial" pitchFamily="34" charset="-120"/>
+            </a:endParaRPr>
           </a:p>
         </p:txBody>
       </p:sp>
@@ -3160,11 +3375,25 @@
         <p:spPr>
           <a:xfrm>
             <a:off x="5047982" y="1682496"/>
-            <a:ext cx="6595073" cy="91"/>
-          </a:xfrm>
-          <a:prstGeom prst="line">
-            <a:avLst/>
-          </a:prstGeom>
+            <a:ext cx="6595073" cy="0"/>
+          </a:xfrm>
+          <a:custGeom>
+            <a:avLst/>
+            <a:gdLst/>
+            <a:ahLst/>
+            <a:cxnLst/>
+            <a:rect l="0" t="0" r="r" b="b"/>
+            <a:pathLst>
+              <a:path w="6595073" h="0" fill="none">
+                <a:moveTo>
+                  <a:pt x="0" y="0"/>
+                </a:moveTo>
+                <a:lnTo>
+                  <a:pt x="6595073" y="0"/>
+                </a:lnTo>
+              </a:path>
+            </a:pathLst>
+          </a:custGeom>
           <a:noFill/>
           <a:ln w="12700">
             <a:solidFill>
@@ -3197,12 +3426,12 @@
           <a:p>
             <a:pPr algn="l" indent="0" marL="0">
               <a:lnSpc>
-                <a:spcPts val="2880"/>
+                <a:spcPct val="100000"/>
               </a:lnSpc>
               <a:buNone/>
             </a:pPr>
             <a:r>
-              <a:rPr lang="en-US" sz="2400" b="1" dirty="0">
+              <a:rPr lang="en-US" sz="2400" b="1" dirty="0" kern="400000">
                 <a:solidFill>
                   <a:srgbClr val="1F5FBF"/>
                 </a:solidFill>
@@ -3212,7 +3441,14 @@
               </a:rPr>
               <a:t>1</a:t>
             </a:r>
-            <a:endParaRPr lang="en-US" sz="2400" dirty="0"/>
+            <a:endParaRPr lang="en-US" sz="2400" b="1" dirty="0" kern="400000">
+              <a:solidFill>
+                <a:srgbClr val="1F5FBF"/>
+              </a:solidFill>
+              <a:latin typeface="Arial" pitchFamily="34" charset="0"/>
+              <a:ea typeface="Arial" pitchFamily="34" charset="-122"/>
+              <a:cs typeface="Arial" pitchFamily="34" charset="-120"/>
+            </a:endParaRPr>
           </a:p>
         </p:txBody>
       </p:sp>
@@ -3239,12 +3475,12 @@
           <a:p>
             <a:pPr algn="l" indent="0" marL="0">
               <a:lnSpc>
-                <a:spcPts val="1680"/>
+                <a:spcPct val="100000"/>
               </a:lnSpc>
               <a:buNone/>
             </a:pPr>
             <a:r>
-              <a:rPr lang="en-US" sz="1400" b="1" dirty="0">
+              <a:rPr lang="en-US" sz="1400" b="1" dirty="0" kern="400000">
                 <a:solidFill>
                   <a:srgbClr val="0B1F3A"/>
                 </a:solidFill>
@@ -3254,7 +3490,14 @@
               </a:rPr>
               <a:t>Install it for your AI assistant — Claude Code, Codex, Cursor or another</a:t>
             </a:r>
-            <a:endParaRPr lang="en-US" sz="1400" dirty="0"/>
+            <a:endParaRPr lang="en-US" sz="1400" b="1" dirty="0" kern="400000">
+              <a:solidFill>
+                <a:srgbClr val="0B1F3A"/>
+              </a:solidFill>
+              <a:latin typeface="Arial" pitchFamily="34" charset="0"/>
+              <a:ea typeface="Arial" pitchFamily="34" charset="-122"/>
+              <a:cs typeface="Arial" pitchFamily="34" charset="-120"/>
+            </a:endParaRPr>
           </a:p>
         </p:txBody>
       </p:sp>
@@ -3281,12 +3524,12 @@
           <a:p>
             <a:pPr algn="l" indent="0" marL="0">
               <a:lnSpc>
-                <a:spcPts val="1200"/>
+                <a:spcPct val="100000"/>
               </a:lnSpc>
               <a:buNone/>
             </a:pPr>
             <a:r>
-              <a:rPr lang="en-US" sz="1000" dirty="0">
+              <a:rPr lang="en-US" sz="1000" dirty="0" kern="400000">
                 <a:solidFill>
                   <a:srgbClr val="5B6B7F"/>
                 </a:solidFill>
@@ -3296,7 +3539,14 @@
               </a:rPr>
               <a:t>You · 2 min</a:t>
             </a:r>
-            <a:endParaRPr lang="en-US" sz="1000" dirty="0"/>
+            <a:endParaRPr lang="en-US" sz="1000" dirty="0" kern="400000">
+              <a:solidFill>
+                <a:srgbClr val="5B6B7F"/>
+              </a:solidFill>
+              <a:latin typeface="Arial" pitchFamily="34" charset="0"/>
+              <a:ea typeface="Arial" pitchFamily="34" charset="-122"/>
+              <a:cs typeface="Arial" pitchFamily="34" charset="-120"/>
+            </a:endParaRPr>
           </a:p>
         </p:txBody>
       </p:sp>
@@ -3309,11 +3559,25 @@
         <p:spPr>
           <a:xfrm>
             <a:off x="5047982" y="2596896"/>
-            <a:ext cx="6595073" cy="91"/>
-          </a:xfrm>
-          <a:prstGeom prst="line">
-            <a:avLst/>
-          </a:prstGeom>
+            <a:ext cx="6595073" cy="0"/>
+          </a:xfrm>
+          <a:custGeom>
+            <a:avLst/>
+            <a:gdLst/>
+            <a:ahLst/>
+            <a:cxnLst/>
+            <a:rect l="0" t="0" r="r" b="b"/>
+            <a:pathLst>
+              <a:path w="6595073" h="0" fill="none">
+                <a:moveTo>
+                  <a:pt x="0" y="0"/>
+                </a:moveTo>
+                <a:lnTo>
+                  <a:pt x="6595073" y="0"/>
+                </a:lnTo>
+              </a:path>
+            </a:pathLst>
+          </a:custGeom>
           <a:noFill/>
           <a:ln w="6350">
             <a:solidFill>
@@ -3346,12 +3610,12 @@
           <a:p>
             <a:pPr algn="l" indent="0" marL="0">
               <a:lnSpc>
-                <a:spcPts val="2880"/>
+                <a:spcPct val="100000"/>
               </a:lnSpc>
               <a:buNone/>
             </a:pPr>
             <a:r>
-              <a:rPr lang="en-US" sz="2400" b="1" dirty="0">
+              <a:rPr lang="en-US" sz="2400" b="1" dirty="0" kern="400000">
                 <a:solidFill>
                   <a:srgbClr val="1F5FBF"/>
                 </a:solidFill>
@@ -3361,7 +3625,14 @@
               </a:rPr>
               <a:t>2</a:t>
             </a:r>
-            <a:endParaRPr lang="en-US" sz="2400" dirty="0"/>
+            <a:endParaRPr lang="en-US" sz="2400" b="1" dirty="0" kern="400000">
+              <a:solidFill>
+                <a:srgbClr val="1F5FBF"/>
+              </a:solidFill>
+              <a:latin typeface="Arial" pitchFamily="34" charset="0"/>
+              <a:ea typeface="Arial" pitchFamily="34" charset="-122"/>
+              <a:cs typeface="Arial" pitchFamily="34" charset="-120"/>
+            </a:endParaRPr>
           </a:p>
         </p:txBody>
       </p:sp>
@@ -3388,12 +3659,12 @@
           <a:p>
             <a:pPr algn="l" indent="0" marL="0">
               <a:lnSpc>
-                <a:spcPts val="1680"/>
+                <a:spcPct val="100000"/>
               </a:lnSpc>
               <a:buNone/>
             </a:pPr>
             <a:r>
-              <a:rPr lang="en-US" sz="1400" b="1" dirty="0">
+              <a:rPr lang="en-US" sz="1400" b="1" dirty="0" kern="400000">
                 <a:solidFill>
                   <a:srgbClr val="0B1F3A"/>
                 </a:solidFill>
@@ -3403,7 +3674,14 @@
               </a:rPr>
               <a:t>Say what the deck must achieve and for whom</a:t>
             </a:r>
-            <a:endParaRPr lang="en-US" sz="1400" dirty="0"/>
+            <a:endParaRPr lang="en-US" sz="1400" b="1" dirty="0" kern="400000">
+              <a:solidFill>
+                <a:srgbClr val="0B1F3A"/>
+              </a:solidFill>
+              <a:latin typeface="Arial" pitchFamily="34" charset="0"/>
+              <a:ea typeface="Arial" pitchFamily="34" charset="-122"/>
+              <a:cs typeface="Arial" pitchFamily="34" charset="-120"/>
+            </a:endParaRPr>
           </a:p>
         </p:txBody>
       </p:sp>
@@ -3430,12 +3708,12 @@
           <a:p>
             <a:pPr algn="l" indent="0" marL="0">
               <a:lnSpc>
-                <a:spcPts val="1200"/>
+                <a:spcPct val="100000"/>
               </a:lnSpc>
               <a:buNone/>
             </a:pPr>
             <a:r>
-              <a:rPr lang="en-US" sz="1000" dirty="0">
+              <a:rPr lang="en-US" sz="1000" dirty="0" kern="400000">
                 <a:solidFill>
                   <a:srgbClr val="5B6B7F"/>
                 </a:solidFill>
@@ -3445,7 +3723,14 @@
               </a:rPr>
               <a:t>You · 1 min</a:t>
             </a:r>
-            <a:endParaRPr lang="en-US" sz="1000" dirty="0"/>
+            <a:endParaRPr lang="en-US" sz="1000" dirty="0" kern="400000">
+              <a:solidFill>
+                <a:srgbClr val="5B6B7F"/>
+              </a:solidFill>
+              <a:latin typeface="Arial" pitchFamily="34" charset="0"/>
+              <a:ea typeface="Arial" pitchFamily="34" charset="-122"/>
+              <a:cs typeface="Arial" pitchFamily="34" charset="-120"/>
+            </a:endParaRPr>
           </a:p>
         </p:txBody>
       </p:sp>
@@ -3458,11 +3743,25 @@
         <p:spPr>
           <a:xfrm>
             <a:off x="5047982" y="3511296"/>
-            <a:ext cx="6595073" cy="91"/>
-          </a:xfrm>
-          <a:prstGeom prst="line">
-            <a:avLst/>
-          </a:prstGeom>
+            <a:ext cx="6595073" cy="0"/>
+          </a:xfrm>
+          <a:custGeom>
+            <a:avLst/>
+            <a:gdLst/>
+            <a:ahLst/>
+            <a:cxnLst/>
+            <a:rect l="0" t="0" r="r" b="b"/>
+            <a:pathLst>
+              <a:path w="6595073" h="0" fill="none">
+                <a:moveTo>
+                  <a:pt x="0" y="0"/>
+                </a:moveTo>
+                <a:lnTo>
+                  <a:pt x="6595073" y="0"/>
+                </a:lnTo>
+              </a:path>
+            </a:pathLst>
+          </a:custGeom>
           <a:noFill/>
           <a:ln w="6350">
             <a:solidFill>
@@ -3495,12 +3794,12 @@
           <a:p>
             <a:pPr algn="l" indent="0" marL="0">
               <a:lnSpc>
-                <a:spcPts val="2880"/>
+                <a:spcPct val="100000"/>
               </a:lnSpc>
               <a:buNone/>
             </a:pPr>
             <a:r>
-              <a:rPr lang="en-US" sz="2400" b="1" dirty="0">
+              <a:rPr lang="en-US" sz="2400" b="1" dirty="0" kern="400000">
                 <a:solidFill>
                   <a:srgbClr val="1F5FBF"/>
                 </a:solidFill>
@@ -3510,7 +3809,14 @@
               </a:rPr>
               <a:t>3</a:t>
             </a:r>
-            <a:endParaRPr lang="en-US" sz="2400" dirty="0"/>
+            <a:endParaRPr lang="en-US" sz="2400" b="1" dirty="0" kern="400000">
+              <a:solidFill>
+                <a:srgbClr val="1F5FBF"/>
+              </a:solidFill>
+              <a:latin typeface="Arial" pitchFamily="34" charset="0"/>
+              <a:ea typeface="Arial" pitchFamily="34" charset="-122"/>
+              <a:cs typeface="Arial" pitchFamily="34" charset="-120"/>
+            </a:endParaRPr>
           </a:p>
         </p:txBody>
       </p:sp>
@@ -3537,12 +3843,12 @@
           <a:p>
             <a:pPr algn="l" indent="0" marL="0">
               <a:lnSpc>
-                <a:spcPts val="1680"/>
+                <a:spcPct val="100000"/>
               </a:lnSpc>
               <a:buNone/>
             </a:pPr>
             <a:r>
-              <a:rPr lang="en-US" sz="1400" b="1" dirty="0">
+              <a:rPr lang="en-US" sz="1400" b="1" dirty="0" kern="400000">
                 <a:solidFill>
                   <a:srgbClr val="0B1F3A"/>
                 </a:solidFill>
@@ -3552,7 +3858,14 @@
               </a:rPr>
               <a:t>Approve the template, the titles and the review</a:t>
             </a:r>
-            <a:endParaRPr lang="en-US" sz="1400" dirty="0"/>
+            <a:endParaRPr lang="en-US" sz="1400" b="1" dirty="0" kern="400000">
+              <a:solidFill>
+                <a:srgbClr val="0B1F3A"/>
+              </a:solidFill>
+              <a:latin typeface="Arial" pitchFamily="34" charset="0"/>
+              <a:ea typeface="Arial" pitchFamily="34" charset="-122"/>
+              <a:cs typeface="Arial" pitchFamily="34" charset="-120"/>
+            </a:endParaRPr>
           </a:p>
         </p:txBody>
       </p:sp>
@@ -3579,12 +3892,12 @@
           <a:p>
             <a:pPr algn="l" indent="0" marL="0">
               <a:lnSpc>
-                <a:spcPts val="1200"/>
+                <a:spcPct val="100000"/>
               </a:lnSpc>
               <a:buNone/>
             </a:pPr>
             <a:r>
-              <a:rPr lang="en-US" sz="1000" dirty="0">
+              <a:rPr lang="en-US" sz="1000" dirty="0" kern="400000">
                 <a:solidFill>
                   <a:srgbClr val="5B6B7F"/>
                 </a:solidFill>
@@ -3594,7 +3907,14 @@
               </a:rPr>
               <a:t>You · 5 min</a:t>
             </a:r>
-            <a:endParaRPr lang="en-US" sz="1000" dirty="0"/>
+            <a:endParaRPr lang="en-US" sz="1000" dirty="0" kern="400000">
+              <a:solidFill>
+                <a:srgbClr val="5B6B7F"/>
+              </a:solidFill>
+              <a:latin typeface="Arial" pitchFamily="34" charset="0"/>
+              <a:ea typeface="Arial" pitchFamily="34" charset="-122"/>
+              <a:cs typeface="Arial" pitchFamily="34" charset="-120"/>
+            </a:endParaRPr>
           </a:p>
         </p:txBody>
       </p:sp>
@@ -3607,11 +3927,25 @@
         <p:spPr>
           <a:xfrm>
             <a:off x="5047982" y="4425696"/>
-            <a:ext cx="6595073" cy="91"/>
-          </a:xfrm>
-          <a:prstGeom prst="line">
-            <a:avLst/>
-          </a:prstGeom>
+            <a:ext cx="6595073" cy="0"/>
+          </a:xfrm>
+          <a:custGeom>
+            <a:avLst/>
+            <a:gdLst/>
+            <a:ahLst/>
+            <a:cxnLst/>
+            <a:rect l="0" t="0" r="r" b="b"/>
+            <a:pathLst>
+              <a:path w="6595073" h="0" fill="none">
+                <a:moveTo>
+                  <a:pt x="0" y="0"/>
+                </a:moveTo>
+                <a:lnTo>
+                  <a:pt x="6595073" y="0"/>
+                </a:lnTo>
+              </a:path>
+            </a:pathLst>
+          </a:custGeom>
           <a:noFill/>
           <a:ln w="6350">
             <a:solidFill>
@@ -3644,12 +3978,12 @@
           <a:p>
             <a:pPr algn="l" indent="0" marL="0">
               <a:lnSpc>
-                <a:spcPts val="2880"/>
+                <a:spcPct val="100000"/>
               </a:lnSpc>
               <a:buNone/>
             </a:pPr>
             <a:r>
-              <a:rPr lang="en-US" sz="2400" b="1" dirty="0">
+              <a:rPr lang="en-US" sz="2400" b="1" dirty="0" kern="400000">
                 <a:solidFill>
                   <a:srgbClr val="1F5FBF"/>
                 </a:solidFill>
@@ -3659,7 +3993,14 @@
               </a:rPr>
               <a:t>4</a:t>
             </a:r>
-            <a:endParaRPr lang="en-US" sz="2400" dirty="0"/>
+            <a:endParaRPr lang="en-US" sz="2400" b="1" dirty="0" kern="400000">
+              <a:solidFill>
+                <a:srgbClr val="1F5FBF"/>
+              </a:solidFill>
+              <a:latin typeface="Arial" pitchFamily="34" charset="0"/>
+              <a:ea typeface="Arial" pitchFamily="34" charset="-122"/>
+              <a:cs typeface="Arial" pitchFamily="34" charset="-120"/>
+            </a:endParaRPr>
           </a:p>
         </p:txBody>
       </p:sp>
@@ -3686,12 +4027,12 @@
           <a:p>
             <a:pPr algn="l" indent="0" marL="0">
               <a:lnSpc>
-                <a:spcPts val="1680"/>
+                <a:spcPct val="100000"/>
               </a:lnSpc>
               <a:buNone/>
             </a:pPr>
             <a:r>
-              <a:rPr lang="en-US" sz="1400" b="1" dirty="0">
+              <a:rPr lang="en-US" sz="1400" b="1" dirty="0" kern="400000">
                 <a:solidFill>
                   <a:srgbClr val="0B1F3A"/>
                 </a:solidFill>
@@ -3701,7 +4042,14 @@
               </a:rPr>
               <a:t>Open the PowerPoint and PDF, then edit freely</a:t>
             </a:r>
-            <a:endParaRPr lang="en-US" sz="1400" dirty="0"/>
+            <a:endParaRPr lang="en-US" sz="1400" b="1" dirty="0" kern="400000">
+              <a:solidFill>
+                <a:srgbClr val="0B1F3A"/>
+              </a:solidFill>
+              <a:latin typeface="Arial" pitchFamily="34" charset="0"/>
+              <a:ea typeface="Arial" pitchFamily="34" charset="-122"/>
+              <a:cs typeface="Arial" pitchFamily="34" charset="-120"/>
+            </a:endParaRPr>
           </a:p>
         </p:txBody>
       </p:sp>
@@ -3728,12 +4076,12 @@
           <a:p>
             <a:pPr algn="l" indent="0" marL="0">
               <a:lnSpc>
-                <a:spcPts val="1200"/>
+                <a:spcPct val="100000"/>
               </a:lnSpc>
               <a:buNone/>
             </a:pPr>
             <a:r>
-              <a:rPr lang="en-US" sz="1000" dirty="0">
+              <a:rPr lang="en-US" sz="1000" dirty="0" kern="400000">
                 <a:solidFill>
                   <a:srgbClr val="5B6B7F"/>
                 </a:solidFill>
@@ -3743,7 +4091,14 @@
               </a:rPr>
               <a:t>You · Done</a:t>
             </a:r>
-            <a:endParaRPr lang="en-US" sz="1000" dirty="0"/>
+            <a:endParaRPr lang="en-US" sz="1000" dirty="0" kern="400000">
+              <a:solidFill>
+                <a:srgbClr val="5B6B7F"/>
+              </a:solidFill>
+              <a:latin typeface="Arial" pitchFamily="34" charset="0"/>
+              <a:ea typeface="Arial" pitchFamily="34" charset="-122"/>
+              <a:cs typeface="Arial" pitchFamily="34" charset="-120"/>
+            </a:endParaRPr>
           </a:p>
         </p:txBody>
       </p:sp>
@@ -3756,11 +4111,25 @@
         <p:spPr>
           <a:xfrm>
             <a:off x="5047982" y="5340096"/>
-            <a:ext cx="6595073" cy="91"/>
-          </a:xfrm>
-          <a:prstGeom prst="line">
-            <a:avLst/>
-          </a:prstGeom>
+            <a:ext cx="6595073" cy="0"/>
+          </a:xfrm>
+          <a:custGeom>
+            <a:avLst/>
+            <a:gdLst/>
+            <a:ahLst/>
+            <a:cxnLst/>
+            <a:rect l="0" t="0" r="r" b="b"/>
+            <a:pathLst>
+              <a:path w="6595073" h="0" fill="none">
+                <a:moveTo>
+                  <a:pt x="0" y="0"/>
+                </a:moveTo>
+                <a:lnTo>
+                  <a:pt x="6595073" y="0"/>
+                </a:lnTo>
+              </a:path>
+            </a:pathLst>
+          </a:custGeom>
           <a:noFill/>
           <a:ln w="6350">
             <a:solidFill>
@@ -3798,7 +4167,7 @@
           <a:bodyPr lIns="0" tIns="0" rIns="0" bIns="0"/>
           <a:lstStyle>
             <a:lvl1pPr>
-              <a:defRPr sz="850">
+              <a:defRPr sz="850" kern="400000">
                 <a:solidFill>
                   <a:srgbClr val="5B6B7F"/>
                 </a:solidFill>
@@ -3811,10 +4180,10 @@
           <a:p>
             <a:pPr algn="r"/>
             <a:fld id="{F7021451-1387-4CA6-816F-3879F97B5CBC}" type="slidenum">
-              <a:rPr b="0" lang="en-US"/>
+              <a:rPr b="0" lang="en-US" kern="400000"/>
               <a:t>11</a:t>
             </a:fld>
-            <a:endParaRPr lang="en-US"/>
+            <a:endParaRPr b="0" lang="en-US" kern="400000"/>
           </a:p>
         </p:txBody>
       </p:sp>
@@ -3870,12 +4239,12 @@
           <a:p>
             <a:pPr algn="ctr" indent="0" marL="0">
               <a:lnSpc>
-                <a:spcPts val="3840"/>
+                <a:spcPct val="100000"/>
               </a:lnSpc>
               <a:buNone/>
             </a:pPr>
             <a:r>
-              <a:rPr lang="en-US" sz="3200" b="1" dirty="0">
+              <a:rPr lang="en-US" sz="3200" b="1" dirty="0" kern="400000">
                 <a:solidFill>
                   <a:srgbClr val="0B1F3A"/>
                 </a:solidFill>
@@ -3885,7 +4254,14 @@
               </a:rPr>
               <a:t>Describe the goal. Pick a look. Ship a partner-ready deck.</a:t>
             </a:r>
-            <a:endParaRPr lang="en-US" sz="3200" dirty="0"/>
+            <a:endParaRPr lang="en-US" sz="3200" b="1" dirty="0" kern="400000">
+              <a:solidFill>
+                <a:srgbClr val="0B1F3A"/>
+              </a:solidFill>
+              <a:latin typeface="Arial" pitchFamily="34" charset="0"/>
+              <a:ea typeface="Arial" pitchFamily="34" charset="-122"/>
+              <a:cs typeface="Arial" pitchFamily="34" charset="-120"/>
+            </a:endParaRPr>
           </a:p>
         </p:txBody>
       </p:sp>
@@ -3912,12 +4288,12 @@
           <a:p>
             <a:pPr algn="ctr" indent="0" marL="0">
               <a:lnSpc>
-                <a:spcPts val="1920"/>
+                <a:spcPct val="100000"/>
               </a:lnSpc>
               <a:buNone/>
             </a:pPr>
             <a:r>
-              <a:rPr lang="en-US" sz="1600" dirty="0">
+              <a:rPr lang="en-US" sz="1600" dirty="0" kern="400000">
                 <a:solidFill>
                   <a:srgbClr val="5B6B7F"/>
                 </a:solidFill>
@@ -3927,7 +4303,14 @@
               </a:rPr>
               <a:t>Free and open source under the MIT licence</a:t>
             </a:r>
-            <a:endParaRPr lang="en-US" sz="1600" dirty="0"/>
+            <a:endParaRPr lang="en-US" sz="1600" dirty="0" kern="400000">
+              <a:solidFill>
+                <a:srgbClr val="5B6B7F"/>
+              </a:solidFill>
+              <a:latin typeface="Arial" pitchFamily="34" charset="0"/>
+              <a:ea typeface="Arial" pitchFamily="34" charset="-122"/>
+              <a:cs typeface="Arial" pitchFamily="34" charset="-120"/>
+            </a:endParaRPr>
           </a:p>
         </p:txBody>
       </p:sp>
@@ -3940,11 +4323,25 @@
         <p:spPr>
           <a:xfrm>
             <a:off x="5547208" y="4617720"/>
-            <a:ext cx="1097280" cy="91"/>
-          </a:xfrm>
-          <a:prstGeom prst="line">
-            <a:avLst/>
-          </a:prstGeom>
+            <a:ext cx="1097280" cy="0"/>
+          </a:xfrm>
+          <a:custGeom>
+            <a:avLst/>
+            <a:gdLst/>
+            <a:ahLst/>
+            <a:cxnLst/>
+            <a:rect l="0" t="0" r="r" b="b"/>
+            <a:pathLst>
+              <a:path w="1097280" h="0" fill="none">
+                <a:moveTo>
+                  <a:pt x="0" y="0"/>
+                </a:moveTo>
+                <a:lnTo>
+                  <a:pt x="1097280" y="0"/>
+                </a:lnTo>
+              </a:path>
+            </a:pathLst>
+          </a:custGeom>
           <a:noFill/>
           <a:ln w="19050">
             <a:solidFill>
@@ -3977,12 +4374,12 @@
           <a:p>
             <a:pPr algn="ctr" indent="0" marL="0">
               <a:lnSpc>
-                <a:spcPts val="1680"/>
+                <a:spcPct val="100000"/>
               </a:lnSpc>
               <a:buNone/>
             </a:pPr>
             <a:r>
-              <a:rPr lang="en-US" sz="1400" dirty="0">
+              <a:rPr lang="en-US" sz="1400" dirty="0" kern="400000">
                 <a:solidFill>
                   <a:srgbClr val="0B1F3A"/>
                 </a:solidFill>
@@ -3992,17 +4389,24 @@
               </a:rPr>
               <a:t>github.com/eiler2005/slidecraft</a:t>
             </a:r>
-            <a:endParaRPr lang="en-US" sz="1400" dirty="0"/>
+            <a:endParaRPr lang="en-US" sz="1400" dirty="0" kern="400000">
+              <a:solidFill>
+                <a:srgbClr val="0B1F3A"/>
+              </a:solidFill>
+              <a:latin typeface="Arial" pitchFamily="34" charset="0"/>
+              <a:ea typeface="Arial" pitchFamily="34" charset="-122"/>
+              <a:cs typeface="Arial" pitchFamily="34" charset="-120"/>
+            </a:endParaRPr>
           </a:p>
           <a:p>
             <a:pPr algn="ctr" indent="0" marL="0">
               <a:lnSpc>
-                <a:spcPts val="1680"/>
+                <a:spcPct val="100000"/>
               </a:lnSpc>
               <a:buNone/>
             </a:pPr>
             <a:r>
-              <a:rPr lang="en-US" sz="1400" dirty="0">
+              <a:rPr lang="en-US" sz="1400" dirty="0" kern="400000">
                 <a:solidFill>
                   <a:srgbClr val="0B1F3A"/>
                 </a:solidFill>
@@ -4012,7 +4416,14 @@
               </a:rPr>
               <a:t>eiler2005.github.io/slidecraft</a:t>
             </a:r>
-            <a:endParaRPr lang="en-US" sz="1400" dirty="0"/>
+            <a:endParaRPr lang="en-US" sz="1400" dirty="0" kern="400000">
+              <a:solidFill>
+                <a:srgbClr val="0B1F3A"/>
+              </a:solidFill>
+              <a:latin typeface="Arial" pitchFamily="34" charset="0"/>
+              <a:ea typeface="Arial" pitchFamily="34" charset="-122"/>
+              <a:cs typeface="Arial" pitchFamily="34" charset="-120"/>
+            </a:endParaRPr>
           </a:p>
         </p:txBody>
       </p:sp>
@@ -4068,12 +4479,12 @@
           <a:p>
             <a:pPr algn="l" indent="0" marL="0">
               <a:lnSpc>
-                <a:spcPts val="5280"/>
+                <a:spcPct val="91667"/>
               </a:lnSpc>
               <a:buNone/>
             </a:pPr>
             <a:r>
-              <a:rPr lang="en-US" sz="4800" b="1" dirty="0">
+              <a:rPr lang="en-US" sz="4800" b="1" dirty="0" kern="400000">
                 <a:solidFill>
                   <a:srgbClr val="0B1F3A"/>
                 </a:solidFill>
@@ -4083,7 +4494,14 @@
               </a:rPr>
               <a:t>Most of a deck's time goes into work that is not thinking</a:t>
             </a:r>
-            <a:endParaRPr lang="en-US" sz="4800" dirty="0"/>
+            <a:endParaRPr lang="en-US" sz="4800" b="1" dirty="0" kern="400000">
+              <a:solidFill>
+                <a:srgbClr val="0B1F3A"/>
+              </a:solidFill>
+              <a:latin typeface="Arial" pitchFamily="34" charset="0"/>
+              <a:ea typeface="Arial" pitchFamily="34" charset="-122"/>
+              <a:cs typeface="Arial" pitchFamily="34" charset="-120"/>
+            </a:endParaRPr>
           </a:p>
         </p:txBody>
       </p:sp>
@@ -4110,12 +4528,12 @@
           <a:p>
             <a:pPr algn="l" indent="0" marL="0">
               <a:lnSpc>
-                <a:spcPts val="2160"/>
+                <a:spcPct val="100000"/>
               </a:lnSpc>
               <a:buNone/>
             </a:pPr>
             <a:r>
-              <a:rPr lang="en-US" sz="1800" dirty="0">
+              <a:rPr lang="en-US" sz="1800" dirty="0" kern="400000">
                 <a:solidFill>
                   <a:srgbClr val="5B6B7F"/>
                 </a:solidFill>
@@ -4125,7 +4543,14 @@
               </a:rPr>
               <a:t>Formatting, fitting text, chasing sources and fixing alignment take the hours that should go into the argument.</a:t>
             </a:r>
-            <a:endParaRPr lang="en-US" sz="1800" dirty="0"/>
+            <a:endParaRPr lang="en-US" sz="1800" dirty="0" kern="400000">
+              <a:solidFill>
+                <a:srgbClr val="5B6B7F"/>
+              </a:solidFill>
+              <a:latin typeface="Arial" pitchFamily="34" charset="0"/>
+              <a:ea typeface="Arial" pitchFamily="34" charset="-122"/>
+              <a:cs typeface="Arial" pitchFamily="34" charset="-120"/>
+            </a:endParaRPr>
           </a:p>
         </p:txBody>
       </p:sp>
@@ -4138,11 +4563,25 @@
         <p:spPr>
           <a:xfrm>
             <a:off x="914400" y="1976628"/>
-            <a:ext cx="822960" cy="91"/>
-          </a:xfrm>
-          <a:prstGeom prst="line">
-            <a:avLst/>
-          </a:prstGeom>
+            <a:ext cx="822960" cy="0"/>
+          </a:xfrm>
+          <a:custGeom>
+            <a:avLst/>
+            <a:gdLst/>
+            <a:ahLst/>
+            <a:cxnLst/>
+            <a:rect l="0" t="0" r="r" b="b"/>
+            <a:pathLst>
+              <a:path w="822960" h="0" fill="none">
+                <a:moveTo>
+                  <a:pt x="0" y="0"/>
+                </a:moveTo>
+                <a:lnTo>
+                  <a:pt x="822960" y="0"/>
+                </a:lnTo>
+              </a:path>
+            </a:pathLst>
+          </a:custGeom>
           <a:noFill/>
           <a:ln w="50800">
             <a:solidFill>
@@ -4180,7 +4619,7 @@
           <a:bodyPr lIns="0" tIns="0" rIns="0" bIns="0"/>
           <a:lstStyle>
             <a:lvl1pPr>
-              <a:defRPr sz="850">
+              <a:defRPr sz="850" kern="400000">
                 <a:solidFill>
                   <a:srgbClr val="5B6B7F"/>
                 </a:solidFill>
@@ -4193,10 +4632,10 @@
           <a:p>
             <a:pPr algn="r"/>
             <a:fld id="{F7021451-1387-4CA6-816F-3879F97B5CBC}" type="slidenum">
-              <a:rPr b="0" lang="en-US"/>
+              <a:rPr b="0" lang="en-US" kern="400000"/>
               <a:t>2</a:t>
             </a:fld>
-            <a:endParaRPr lang="en-US"/>
+            <a:endParaRPr b="0" lang="en-US" kern="400000"/>
           </a:p>
         </p:txBody>
       </p:sp>
@@ -4238,7 +4677,7 @@
         <p:spPr>
           <a:xfrm>
             <a:off x="548640" y="640080"/>
-            <a:ext cx="11094415" cy="896112"/>
+            <a:ext cx="6259512" cy="896112"/>
           </a:xfrm>
           <a:prstGeom prst="rect">
             <a:avLst/>
@@ -4252,12 +4691,12 @@
           <a:p>
             <a:pPr algn="l" indent="0" marL="0">
               <a:lnSpc>
-                <a:spcPts val="2688"/>
+                <a:spcPct val="93333"/>
               </a:lnSpc>
               <a:buNone/>
             </a:pPr>
             <a:r>
-              <a:rPr lang="en-US" sz="2400" b="1" dirty="0">
+              <a:rPr lang="en-US" sz="2400" b="1" dirty="0" kern="400000">
                 <a:solidFill>
                   <a:srgbClr val="0B1F3A"/>
                 </a:solidFill>
@@ -4267,7 +4706,14 @@
               </a:rPr>
               <a:t>SlideCraft applies consulting rules automatically and leaves you the decisions</a:t>
             </a:r>
-            <a:endParaRPr lang="en-US" sz="2400" dirty="0"/>
+            <a:endParaRPr lang="en-US" sz="2400" b="1" dirty="0" kern="400000">
+              <a:solidFill>
+                <a:srgbClr val="0B1F3A"/>
+              </a:solidFill>
+              <a:latin typeface="Arial" pitchFamily="34" charset="0"/>
+              <a:ea typeface="Arial" pitchFamily="34" charset="-122"/>
+              <a:cs typeface="Arial" pitchFamily="34" charset="-120"/>
+            </a:endParaRPr>
           </a:p>
         </p:txBody>
       </p:sp>
@@ -4294,12 +4740,12 @@
           <a:p>
             <a:pPr algn="l" indent="0" marL="0">
               <a:lnSpc>
-                <a:spcPts val="1200"/>
+                <a:spcPct val="100000"/>
               </a:lnSpc>
               <a:buNone/>
             </a:pPr>
             <a:r>
-              <a:rPr lang="en-US" sz="1000" b="1" dirty="0">
+              <a:rPr lang="en-US" sz="1000" b="1" dirty="0" kern="400000">
                 <a:solidFill>
                   <a:srgbClr val="1F5FBF"/>
                 </a:solidFill>
@@ -4309,7 +4755,14 @@
               </a:rPr>
               <a:t>IN ONE PAGE</a:t>
             </a:r>
-            <a:endParaRPr lang="en-US" sz="1000" dirty="0"/>
+            <a:endParaRPr lang="en-US" sz="1000" b="1" dirty="0" kern="400000">
+              <a:solidFill>
+                <a:srgbClr val="1F5FBF"/>
+              </a:solidFill>
+              <a:latin typeface="Arial" pitchFamily="34" charset="0"/>
+              <a:ea typeface="Arial" pitchFamily="34" charset="-122"/>
+              <a:cs typeface="Arial" pitchFamily="34" charset="-120"/>
+            </a:endParaRPr>
           </a:p>
         </p:txBody>
       </p:sp>
@@ -4356,12 +4809,12 @@
           <a:p>
             <a:pPr algn="l" indent="0" marL="0">
               <a:lnSpc>
-                <a:spcPts val="1680"/>
+                <a:spcPct val="100000"/>
               </a:lnSpc>
               <a:buNone/>
             </a:pPr>
             <a:r>
-              <a:rPr lang="en-US" sz="1400" b="1" dirty="0">
+              <a:rPr lang="en-US" sz="1400" b="1" dirty="0" kern="400000">
                 <a:solidFill>
                   <a:srgbClr val="FFFFFF"/>
                 </a:solidFill>
@@ -4373,12 +4826,12 @@
             </a:r>
             <a:pPr algn="l" indent="0" marL="0">
               <a:lnSpc>
-                <a:spcPts val="1680"/>
+                <a:spcPct val="100000"/>
               </a:lnSpc>
               <a:buNone/>
             </a:pPr>
             <a:r>
-              <a:rPr lang="en-US" sz="1400" dirty="0">
+              <a:rPr lang="en-US" sz="1400" dirty="0" kern="400000">
                 <a:solidFill>
                   <a:srgbClr val="FFFFFF"/>
                 </a:solidFill>
@@ -4388,7 +4841,14 @@
               </a:rPr>
               <a:t> Try it on your next board, client or pitch deck</a:t>
             </a:r>
-            <a:endParaRPr lang="en-US" sz="1400" dirty="0"/>
+            <a:endParaRPr lang="en-US" sz="1400" dirty="0" kern="400000">
+              <a:solidFill>
+                <a:srgbClr val="FFFFFF"/>
+              </a:solidFill>
+              <a:latin typeface="Arial" pitchFamily="34" charset="0"/>
+              <a:ea typeface="Arial" pitchFamily="34" charset="-122"/>
+              <a:cs typeface="Arial" pitchFamily="34" charset="-120"/>
+            </a:endParaRPr>
           </a:p>
         </p:txBody>
       </p:sp>
@@ -4415,12 +4875,12 @@
           <a:p>
             <a:pPr algn="l" indent="0" marL="0">
               <a:lnSpc>
-                <a:spcPts val="1200"/>
+                <a:spcPct val="100000"/>
               </a:lnSpc>
               <a:buNone/>
             </a:pPr>
             <a:r>
-              <a:rPr lang="en-US" sz="1000" b="1" dirty="0">
+              <a:rPr lang="en-US" sz="1000" b="1" dirty="0" kern="400000">
                 <a:solidFill>
                   <a:srgbClr val="5B6B7F"/>
                 </a:solidFill>
@@ -4430,7 +4890,14 @@
               </a:rPr>
               <a:t>SITUATION</a:t>
             </a:r>
-            <a:endParaRPr lang="en-US" sz="1000" dirty="0"/>
+            <a:endParaRPr lang="en-US" sz="1000" b="1" dirty="0" kern="400000">
+              <a:solidFill>
+                <a:srgbClr val="5B6B7F"/>
+              </a:solidFill>
+              <a:latin typeface="Arial" pitchFamily="34" charset="0"/>
+              <a:ea typeface="Arial" pitchFamily="34" charset="-122"/>
+              <a:cs typeface="Arial" pitchFamily="34" charset="-120"/>
+            </a:endParaRPr>
           </a:p>
         </p:txBody>
       </p:sp>
@@ -4457,12 +4924,12 @@
           <a:p>
             <a:pPr algn="l" indent="0" marL="0">
               <a:lnSpc>
-                <a:spcPts val="1680"/>
+                <a:spcPct val="100000"/>
               </a:lnSpc>
               <a:buNone/>
             </a:pPr>
             <a:r>
-              <a:rPr lang="en-US" sz="1400" dirty="0">
+              <a:rPr lang="en-US" sz="1400" dirty="0" kern="400000">
                 <a:solidFill>
                   <a:srgbClr val="0B1F3A"/>
                 </a:solidFill>
@@ -4472,7 +4939,14 @@
               </a:rPr>
               <a:t>Decks drive decisions. Boards, steering committees, clients and investors judge the work by the pages they see.</a:t>
             </a:r>
-            <a:endParaRPr lang="en-US" sz="1400" dirty="0"/>
+            <a:endParaRPr lang="en-US" sz="1400" dirty="0" kern="400000">
+              <a:solidFill>
+                <a:srgbClr val="0B1F3A"/>
+              </a:solidFill>
+              <a:latin typeface="Arial" pitchFamily="34" charset="0"/>
+              <a:ea typeface="Arial" pitchFamily="34" charset="-122"/>
+              <a:cs typeface="Arial" pitchFamily="34" charset="-120"/>
+            </a:endParaRPr>
           </a:p>
         </p:txBody>
       </p:sp>
@@ -4485,11 +4959,25 @@
         <p:spPr>
           <a:xfrm>
             <a:off x="548640" y="2797568"/>
-            <a:ext cx="11094415" cy="91"/>
-          </a:xfrm>
-          <a:prstGeom prst="line">
-            <a:avLst/>
-          </a:prstGeom>
+            <a:ext cx="11094415" cy="0"/>
+          </a:xfrm>
+          <a:custGeom>
+            <a:avLst/>
+            <a:gdLst/>
+            <a:ahLst/>
+            <a:cxnLst/>
+            <a:rect l="0" t="0" r="r" b="b"/>
+            <a:pathLst>
+              <a:path w="11094415" h="0" fill="none">
+                <a:moveTo>
+                  <a:pt x="0" y="0"/>
+                </a:moveTo>
+                <a:lnTo>
+                  <a:pt x="11094415" y="0"/>
+                </a:lnTo>
+              </a:path>
+            </a:pathLst>
+          </a:custGeom>
           <a:noFill/>
           <a:ln w="9525">
             <a:solidFill>
@@ -4522,12 +5010,12 @@
           <a:p>
             <a:pPr algn="l" indent="0" marL="0">
               <a:lnSpc>
-                <a:spcPts val="1200"/>
+                <a:spcPct val="100000"/>
               </a:lnSpc>
               <a:buNone/>
             </a:pPr>
             <a:r>
-              <a:rPr lang="en-US" sz="1000" b="1" dirty="0">
+              <a:rPr lang="en-US" sz="1000" b="1" dirty="0" kern="400000">
                 <a:solidFill>
                   <a:srgbClr val="5B6B7F"/>
                 </a:solidFill>
@@ -4537,7 +5025,14 @@
               </a:rPr>
               <a:t>COMPLICATION</a:t>
             </a:r>
-            <a:endParaRPr lang="en-US" sz="1000" dirty="0"/>
+            <a:endParaRPr lang="en-US" sz="1000" b="1" dirty="0" kern="400000">
+              <a:solidFill>
+                <a:srgbClr val="5B6B7F"/>
+              </a:solidFill>
+              <a:latin typeface="Arial" pitchFamily="34" charset="0"/>
+              <a:ea typeface="Arial" pitchFamily="34" charset="-122"/>
+              <a:cs typeface="Arial" pitchFamily="34" charset="-120"/>
+            </a:endParaRPr>
           </a:p>
         </p:txBody>
       </p:sp>
@@ -4564,12 +5059,12 @@
           <a:p>
             <a:pPr algn="l" indent="0" marL="0">
               <a:lnSpc>
-                <a:spcPts val="1680"/>
+                <a:spcPct val="100000"/>
               </a:lnSpc>
               <a:buNone/>
             </a:pPr>
             <a:r>
-              <a:rPr lang="en-US" sz="1400" dirty="0">
+              <a:rPr lang="en-US" sz="1400" dirty="0" kern="400000">
                 <a:solidFill>
                   <a:srgbClr val="0B1F3A"/>
                 </a:solidFill>
@@ -4579,7 +5074,14 @@
               </a:rPr>
               <a:t>Good decks follow strict rules — answer first, one claim per slide, every number sourced — and applying them by hand is slow and uneven.</a:t>
             </a:r>
-            <a:endParaRPr lang="en-US" sz="1400" dirty="0"/>
+            <a:endParaRPr lang="en-US" sz="1400" dirty="0" kern="400000">
+              <a:solidFill>
+                <a:srgbClr val="0B1F3A"/>
+              </a:solidFill>
+              <a:latin typeface="Arial" pitchFamily="34" charset="0"/>
+              <a:ea typeface="Arial" pitchFamily="34" charset="-122"/>
+              <a:cs typeface="Arial" pitchFamily="34" charset="-120"/>
+            </a:endParaRPr>
           </a:p>
         </p:txBody>
       </p:sp>
@@ -4592,11 +5094,25 @@
         <p:spPr>
           <a:xfrm>
             <a:off x="548640" y="3912639"/>
-            <a:ext cx="11094415" cy="91"/>
-          </a:xfrm>
-          <a:prstGeom prst="line">
-            <a:avLst/>
-          </a:prstGeom>
+            <a:ext cx="11094415" cy="0"/>
+          </a:xfrm>
+          <a:custGeom>
+            <a:avLst/>
+            <a:gdLst/>
+            <a:ahLst/>
+            <a:cxnLst/>
+            <a:rect l="0" t="0" r="r" b="b"/>
+            <a:pathLst>
+              <a:path w="11094415" h="0" fill="none">
+                <a:moveTo>
+                  <a:pt x="0" y="0"/>
+                </a:moveTo>
+                <a:lnTo>
+                  <a:pt x="11094415" y="0"/>
+                </a:lnTo>
+              </a:path>
+            </a:pathLst>
+          </a:custGeom>
           <a:noFill/>
           <a:ln w="9525">
             <a:solidFill>
@@ -4629,12 +5145,12 @@
           <a:p>
             <a:pPr algn="l" indent="0" marL="0">
               <a:lnSpc>
-                <a:spcPts val="1200"/>
+                <a:spcPct val="100000"/>
               </a:lnSpc>
               <a:buNone/>
             </a:pPr>
             <a:r>
-              <a:rPr lang="en-US" sz="1000" b="1" dirty="0">
+              <a:rPr lang="en-US" sz="1000" b="1" dirty="0" kern="400000">
                 <a:solidFill>
                   <a:srgbClr val="1F5FBF"/>
                 </a:solidFill>
@@ -4644,7 +5160,14 @@
               </a:rPr>
               <a:t>RESOLUTION</a:t>
             </a:r>
-            <a:endParaRPr lang="en-US" sz="1000" dirty="0"/>
+            <a:endParaRPr lang="en-US" sz="1000" b="1" dirty="0" kern="400000">
+              <a:solidFill>
+                <a:srgbClr val="1F5FBF"/>
+              </a:solidFill>
+              <a:latin typeface="Arial" pitchFamily="34" charset="0"/>
+              <a:ea typeface="Arial" pitchFamily="34" charset="-122"/>
+              <a:cs typeface="Arial" pitchFamily="34" charset="-120"/>
+            </a:endParaRPr>
           </a:p>
         </p:txBody>
       </p:sp>
@@ -4671,12 +5194,12 @@
           <a:p>
             <a:pPr algn="l" indent="0" marL="0">
               <a:lnSpc>
-                <a:spcPts val="1800"/>
+                <a:spcPct val="100000"/>
               </a:lnSpc>
               <a:buNone/>
             </a:pPr>
             <a:r>
-              <a:rPr lang="en-US" sz="1500" b="1" dirty="0">
+              <a:rPr lang="en-US" sz="1500" b="1" dirty="0" kern="400000">
                 <a:solidFill>
                   <a:srgbClr val="0B1F3A"/>
                 </a:solidFill>
@@ -4686,7 +5209,14 @@
               </a:rPr>
               <a:t>SlideCraft builds the deck from a brief with your AI assistant, applies the rules on every slide and checks the result before you see it.</a:t>
             </a:r>
-            <a:endParaRPr lang="en-US" sz="1500" dirty="0"/>
+            <a:endParaRPr lang="en-US" sz="1500" b="1" dirty="0" kern="400000">
+              <a:solidFill>
+                <a:srgbClr val="0B1F3A"/>
+              </a:solidFill>
+              <a:latin typeface="Arial" pitchFamily="34" charset="0"/>
+              <a:ea typeface="Arial" pitchFamily="34" charset="-122"/>
+              <a:cs typeface="Arial" pitchFamily="34" charset="-120"/>
+            </a:endParaRPr>
           </a:p>
         </p:txBody>
       </p:sp>
@@ -4718,7 +5248,7 @@
           <a:bodyPr lIns="0" tIns="0" rIns="0" bIns="0"/>
           <a:lstStyle>
             <a:lvl1pPr>
-              <a:defRPr sz="850">
+              <a:defRPr sz="850" kern="400000">
                 <a:solidFill>
                   <a:srgbClr val="5B6B7F"/>
                 </a:solidFill>
@@ -4731,10 +5261,10 @@
           <a:p>
             <a:pPr algn="r"/>
             <a:fld id="{F7021451-1387-4CA6-816F-3879F97B5CBC}" type="slidenum">
-              <a:rPr b="0" lang="en-US"/>
+              <a:rPr b="0" lang="en-US" kern="400000"/>
               <a:t>3</a:t>
             </a:fld>
-            <a:endParaRPr lang="en-US"/>
+            <a:endParaRPr b="0" lang="en-US" kern="400000"/>
           </a:p>
         </p:txBody>
       </p:sp>
@@ -4790,12 +5320,12 @@
           <a:p>
             <a:pPr algn="l" indent="0" marL="0">
               <a:lnSpc>
-                <a:spcPts val="2688"/>
+                <a:spcPct val="93333"/>
               </a:lnSpc>
               <a:buNone/>
             </a:pPr>
             <a:r>
-              <a:rPr lang="en-US" sz="2400" b="1" dirty="0">
+              <a:rPr lang="en-US" sz="2400" b="1" dirty="0" kern="400000">
                 <a:solidFill>
                   <a:srgbClr val="0B1F3A"/>
                 </a:solidFill>
@@ -4805,7 +5335,14 @@
               </a:rPr>
               <a:t>Four checkpoints keep you in charge while the assistant does the work</a:t>
             </a:r>
-            <a:endParaRPr lang="en-US" sz="2400" dirty="0"/>
+            <a:endParaRPr lang="en-US" sz="2400" b="1" dirty="0" kern="400000">
+              <a:solidFill>
+                <a:srgbClr val="0B1F3A"/>
+              </a:solidFill>
+              <a:latin typeface="Arial" pitchFamily="34" charset="0"/>
+              <a:ea typeface="Arial" pitchFamily="34" charset="-122"/>
+              <a:cs typeface="Arial" pitchFamily="34" charset="-120"/>
+            </a:endParaRPr>
           </a:p>
         </p:txBody>
       </p:sp>
@@ -4832,12 +5369,12 @@
           <a:p>
             <a:pPr algn="l" indent="0" marL="0">
               <a:lnSpc>
-                <a:spcPts val="1200"/>
+                <a:spcPct val="100000"/>
               </a:lnSpc>
               <a:buNone/>
             </a:pPr>
             <a:r>
-              <a:rPr lang="en-US" sz="1000" b="1" dirty="0">
+              <a:rPr lang="en-US" sz="1000" b="1" dirty="0" kern="400000">
                 <a:solidFill>
                   <a:srgbClr val="1F5FBF"/>
                 </a:solidFill>
@@ -4847,7 +5384,14 @@
               </a:rPr>
               <a:t>HOW IT WORKS</a:t>
             </a:r>
-            <a:endParaRPr lang="en-US" sz="1000" dirty="0"/>
+            <a:endParaRPr lang="en-US" sz="1000" b="1" dirty="0" kern="400000">
+              <a:solidFill>
+                <a:srgbClr val="1F5FBF"/>
+              </a:solidFill>
+              <a:latin typeface="Arial" pitchFamily="34" charset="0"/>
+              <a:ea typeface="Arial" pitchFamily="34" charset="-122"/>
+              <a:cs typeface="Arial" pitchFamily="34" charset="-120"/>
+            </a:endParaRPr>
           </a:p>
         </p:txBody>
       </p:sp>
@@ -4874,12 +5418,12 @@
           <a:p>
             <a:pPr algn="l" indent="0" marL="0">
               <a:lnSpc>
-                <a:spcPts val="1920"/>
+                <a:spcPct val="100000"/>
               </a:lnSpc>
               <a:buNone/>
             </a:pPr>
             <a:r>
-              <a:rPr lang="en-US" sz="1600" dirty="0">
+              <a:rPr lang="en-US" sz="1600" dirty="0" kern="400000">
                 <a:solidFill>
                   <a:srgbClr val="5B6B7F"/>
                 </a:solidFill>
@@ -4889,7 +5433,14 @@
               </a:rPr>
               <a:t>You approve steps 1, 2, 3 and 5; everything in between is automated.</a:t>
             </a:r>
-            <a:endParaRPr lang="en-US" sz="1600" dirty="0"/>
+            <a:endParaRPr lang="en-US" sz="1600" dirty="0" kern="400000">
+              <a:solidFill>
+                <a:srgbClr val="5B6B7F"/>
+              </a:solidFill>
+              <a:latin typeface="Arial" pitchFamily="34" charset="0"/>
+              <a:ea typeface="Arial" pitchFamily="34" charset="-122"/>
+              <a:cs typeface="Arial" pitchFamily="34" charset="-120"/>
+            </a:endParaRPr>
           </a:p>
         </p:txBody>
       </p:sp>
@@ -4960,12 +5511,12 @@
           <a:p>
             <a:pPr algn="l" indent="0" marL="0">
               <a:lnSpc>
-                <a:spcPts val="1800"/>
+                <a:spcPct val="100000"/>
               </a:lnSpc>
               <a:buNone/>
             </a:pPr>
             <a:r>
-              <a:rPr lang="en-US" sz="1500" b="1" dirty="0">
+              <a:rPr lang="en-US" sz="1500" b="1" dirty="0" kern="400000">
                 <a:solidFill>
                   <a:srgbClr val="0B1F3A"/>
                 </a:solidFill>
@@ -4975,7 +5526,14 @@
               </a:rPr>
               <a:t>Describe the goal</a:t>
             </a:r>
-            <a:endParaRPr lang="en-US" sz="1500" dirty="0"/>
+            <a:endParaRPr lang="en-US" sz="1500" b="1" dirty="0" kern="400000">
+              <a:solidFill>
+                <a:srgbClr val="0B1F3A"/>
+              </a:solidFill>
+              <a:latin typeface="Arial" pitchFamily="34" charset="0"/>
+              <a:ea typeface="Arial" pitchFamily="34" charset="-122"/>
+              <a:cs typeface="Arial" pitchFamily="34" charset="-120"/>
+            </a:endParaRPr>
           </a:p>
         </p:txBody>
       </p:sp>
@@ -5002,12 +5560,12 @@
           <a:p>
             <a:pPr algn="l" indent="0" marL="0">
               <a:lnSpc>
-                <a:spcPts val="1680"/>
+                <a:spcPct val="100000"/>
               </a:lnSpc>
               <a:buNone/>
             </a:pPr>
             <a:r>
-              <a:rPr lang="en-US" sz="1400" dirty="0">
+              <a:rPr lang="en-US" sz="1400" dirty="0" kern="400000">
                 <a:solidFill>
                   <a:srgbClr val="0B1F3A"/>
                 </a:solidFill>
@@ -5017,7 +5575,14 @@
               </a:rPr>
               <a:t>Who the audience is, what you need from them, and what you will do with the deck</a:t>
             </a:r>
-            <a:endParaRPr lang="en-US" sz="1400" dirty="0"/>
+            <a:endParaRPr lang="en-US" sz="1400" dirty="0" kern="400000">
+              <a:solidFill>
+                <a:srgbClr val="0B1F3A"/>
+              </a:solidFill>
+              <a:latin typeface="Arial" pitchFamily="34" charset="0"/>
+              <a:ea typeface="Arial" pitchFamily="34" charset="-122"/>
+              <a:cs typeface="Arial" pitchFamily="34" charset="-120"/>
+            </a:endParaRPr>
           </a:p>
         </p:txBody>
       </p:sp>
@@ -5091,12 +5656,12 @@
           <a:p>
             <a:pPr algn="l" indent="0" marL="0">
               <a:lnSpc>
-                <a:spcPts val="1800"/>
+                <a:spcPct val="100000"/>
               </a:lnSpc>
               <a:buNone/>
             </a:pPr>
             <a:r>
-              <a:rPr lang="en-US" sz="1500" b="1" dirty="0">
+              <a:rPr lang="en-US" sz="1500" b="1" dirty="0" kern="400000">
                 <a:solidFill>
                   <a:srgbClr val="0B1F3A"/>
                 </a:solidFill>
@@ -5106,7 +5671,14 @@
               </a:rPr>
               <a:t>Pick a template</a:t>
             </a:r>
-            <a:endParaRPr lang="en-US" sz="1500" dirty="0"/>
+            <a:endParaRPr lang="en-US" sz="1500" b="1" dirty="0" kern="400000">
+              <a:solidFill>
+                <a:srgbClr val="0B1F3A"/>
+              </a:solidFill>
+              <a:latin typeface="Arial" pitchFamily="34" charset="0"/>
+              <a:ea typeface="Arial" pitchFamily="34" charset="-122"/>
+              <a:cs typeface="Arial" pitchFamily="34" charset="-120"/>
+            </a:endParaRPr>
           </a:p>
         </p:txBody>
       </p:sp>
@@ -5133,12 +5705,12 @@
           <a:p>
             <a:pPr algn="l" indent="0" marL="0">
               <a:lnSpc>
-                <a:spcPts val="1680"/>
+                <a:spcPct val="100000"/>
               </a:lnSpc>
               <a:buNone/>
             </a:pPr>
             <a:r>
-              <a:rPr lang="en-US" sz="1400" dirty="0">
+              <a:rPr lang="en-US" sz="1400" dirty="0" kern="400000">
                 <a:solidFill>
                   <a:srgbClr val="0B1F3A"/>
                 </a:solidFill>
@@ -5148,7 +5720,14 @@
               </a:rPr>
               <a:t>Three options for your task, each shown as a contact sheet of real slides</a:t>
             </a:r>
-            <a:endParaRPr lang="en-US" sz="1400" dirty="0"/>
+            <a:endParaRPr lang="en-US" sz="1400" dirty="0" kern="400000">
+              <a:solidFill>
+                <a:srgbClr val="0B1F3A"/>
+              </a:solidFill>
+              <a:latin typeface="Arial" pitchFamily="34" charset="0"/>
+              <a:ea typeface="Arial" pitchFamily="34" charset="-122"/>
+              <a:cs typeface="Arial" pitchFamily="34" charset="-120"/>
+            </a:endParaRPr>
           </a:p>
         </p:txBody>
       </p:sp>
@@ -5222,12 +5801,12 @@
           <a:p>
             <a:pPr algn="l" indent="0" marL="0">
               <a:lnSpc>
-                <a:spcPts val="1800"/>
+                <a:spcPct val="100000"/>
               </a:lnSpc>
               <a:buNone/>
             </a:pPr>
             <a:r>
-              <a:rPr lang="en-US" sz="1500" b="1" dirty="0">
+              <a:rPr lang="en-US" sz="1500" b="1" dirty="0" kern="400000">
                 <a:solidFill>
                   <a:srgbClr val="0B1F3A"/>
                 </a:solidFill>
@@ -5237,7 +5816,14 @@
               </a:rPr>
               <a:t>Approve the titles</a:t>
             </a:r>
-            <a:endParaRPr lang="en-US" sz="1500" dirty="0"/>
+            <a:endParaRPr lang="en-US" sz="1500" b="1" dirty="0" kern="400000">
+              <a:solidFill>
+                <a:srgbClr val="0B1F3A"/>
+              </a:solidFill>
+              <a:latin typeface="Arial" pitchFamily="34" charset="0"/>
+              <a:ea typeface="Arial" pitchFamily="34" charset="-122"/>
+              <a:cs typeface="Arial" pitchFamily="34" charset="-120"/>
+            </a:endParaRPr>
           </a:p>
         </p:txBody>
       </p:sp>
@@ -5264,12 +5850,12 @@
           <a:p>
             <a:pPr algn="l" indent="0" marL="0">
               <a:lnSpc>
-                <a:spcPts val="1680"/>
+                <a:spcPct val="100000"/>
               </a:lnSpc>
               <a:buNone/>
             </a:pPr>
             <a:r>
-              <a:rPr lang="en-US" sz="1400" dirty="0">
+              <a:rPr lang="en-US" sz="1400" dirty="0" kern="400000">
                 <a:solidFill>
                   <a:srgbClr val="0B1F3A"/>
                 </a:solidFill>
@@ -5279,7 +5865,14 @@
               </a:rPr>
               <a:t>The storyline as a chain of claims — read the titles and you have the argument</a:t>
             </a:r>
-            <a:endParaRPr lang="en-US" sz="1400" dirty="0"/>
+            <a:endParaRPr lang="en-US" sz="1400" dirty="0" kern="400000">
+              <a:solidFill>
+                <a:srgbClr val="0B1F3A"/>
+              </a:solidFill>
+              <a:latin typeface="Arial" pitchFamily="34" charset="0"/>
+              <a:ea typeface="Arial" pitchFamily="34" charset="-122"/>
+              <a:cs typeface="Arial" pitchFamily="34" charset="-120"/>
+            </a:endParaRPr>
           </a:p>
         </p:txBody>
       </p:sp>
@@ -5353,12 +5946,12 @@
           <a:p>
             <a:pPr algn="l" indent="0" marL="0">
               <a:lnSpc>
-                <a:spcPts val="1800"/>
+                <a:spcPct val="100000"/>
               </a:lnSpc>
               <a:buNone/>
             </a:pPr>
             <a:r>
-              <a:rPr lang="en-US" sz="1500" b="1" dirty="0">
+              <a:rPr lang="en-US" sz="1500" b="1" dirty="0" kern="400000">
                 <a:solidFill>
                   <a:srgbClr val="0B1F3A"/>
                 </a:solidFill>
@@ -5368,7 +5961,14 @@
               </a:rPr>
               <a:t>Build the slides</a:t>
             </a:r>
-            <a:endParaRPr lang="en-US" sz="1500" dirty="0"/>
+            <a:endParaRPr lang="en-US" sz="1500" b="1" dirty="0" kern="400000">
+              <a:solidFill>
+                <a:srgbClr val="0B1F3A"/>
+              </a:solidFill>
+              <a:latin typeface="Arial" pitchFamily="34" charset="0"/>
+              <a:ea typeface="Arial" pitchFamily="34" charset="-122"/>
+              <a:cs typeface="Arial" pitchFamily="34" charset="-120"/>
+            </a:endParaRPr>
           </a:p>
         </p:txBody>
       </p:sp>
@@ -5395,12 +5995,12 @@
           <a:p>
             <a:pPr algn="l" indent="0" marL="0">
               <a:lnSpc>
-                <a:spcPts val="1680"/>
+                <a:spcPct val="100000"/>
               </a:lnSpc>
               <a:buNone/>
             </a:pPr>
             <a:r>
-              <a:rPr lang="en-US" sz="1400" dirty="0">
+              <a:rPr lang="en-US" sz="1400" dirty="0" kern="400000">
                 <a:solidFill>
                   <a:srgbClr val="0B1F3A"/>
                 </a:solidFill>
@@ -5410,7 +6010,14 @@
               </a:rPr>
               <a:t>Charts, tables and text written to fit, with sources on every number</a:t>
             </a:r>
-            <a:endParaRPr lang="en-US" sz="1400" dirty="0"/>
+            <a:endParaRPr lang="en-US" sz="1400" dirty="0" kern="400000">
+              <a:solidFill>
+                <a:srgbClr val="0B1F3A"/>
+              </a:solidFill>
+              <a:latin typeface="Arial" pitchFamily="34" charset="0"/>
+              <a:ea typeface="Arial" pitchFamily="34" charset="-122"/>
+              <a:cs typeface="Arial" pitchFamily="34" charset="-120"/>
+            </a:endParaRPr>
           </a:p>
         </p:txBody>
       </p:sp>
@@ -5484,12 +6091,12 @@
           <a:p>
             <a:pPr algn="l" indent="0" marL="0">
               <a:lnSpc>
-                <a:spcPts val="1800"/>
+                <a:spcPct val="100000"/>
               </a:lnSpc>
               <a:buNone/>
             </a:pPr>
             <a:r>
-              <a:rPr lang="en-US" sz="1500" b="1" dirty="0">
+              <a:rPr lang="en-US" sz="1500" b="1" dirty="0" kern="400000">
                 <a:solidFill>
                   <a:srgbClr val="0B1F3A"/>
                 </a:solidFill>
@@ -5499,7 +6106,14 @@
               </a:rPr>
               <a:t>Review and send</a:t>
             </a:r>
-            <a:endParaRPr lang="en-US" sz="1500" dirty="0"/>
+            <a:endParaRPr lang="en-US" sz="1500" b="1" dirty="0" kern="400000">
+              <a:solidFill>
+                <a:srgbClr val="0B1F3A"/>
+              </a:solidFill>
+              <a:latin typeface="Arial" pitchFamily="34" charset="0"/>
+              <a:ea typeface="Arial" pitchFamily="34" charset="-122"/>
+              <a:cs typeface="Arial" pitchFamily="34" charset="-120"/>
+            </a:endParaRPr>
           </a:p>
         </p:txBody>
       </p:sp>
@@ -5526,12 +6140,12 @@
           <a:p>
             <a:pPr algn="l" indent="0" marL="0">
               <a:lnSpc>
-                <a:spcPts val="1680"/>
+                <a:spcPct val="100000"/>
               </a:lnSpc>
               <a:buNone/>
             </a:pPr>
             <a:r>
-              <a:rPr lang="en-US" sz="1400" dirty="0">
+              <a:rPr lang="en-US" sz="1400" dirty="0" kern="400000">
                 <a:solidFill>
                   <a:srgbClr val="0B1F3A"/>
                 </a:solidFill>
@@ -5541,7 +6155,14 @@
               </a:rPr>
               <a:t>A partner-style review, fixes applied, then PowerPoint, PDF and more</a:t>
             </a:r>
-            <a:endParaRPr lang="en-US" sz="1400" dirty="0"/>
+            <a:endParaRPr lang="en-US" sz="1400" dirty="0" kern="400000">
+              <a:solidFill>
+                <a:srgbClr val="0B1F3A"/>
+              </a:solidFill>
+              <a:latin typeface="Arial" pitchFamily="34" charset="0"/>
+              <a:ea typeface="Arial" pitchFamily="34" charset="-122"/>
+              <a:cs typeface="Arial" pitchFamily="34" charset="-120"/>
+            </a:endParaRPr>
           </a:p>
         </p:txBody>
       </p:sp>
@@ -5573,7 +6194,7 @@
           <a:bodyPr lIns="0" tIns="0" rIns="0" bIns="0"/>
           <a:lstStyle>
             <a:lvl1pPr>
-              <a:defRPr sz="850">
+              <a:defRPr sz="850" kern="400000">
                 <a:solidFill>
                   <a:srgbClr val="5B6B7F"/>
                 </a:solidFill>
@@ -5586,10 +6207,10 @@
           <a:p>
             <a:pPr algn="r"/>
             <a:fld id="{F7021451-1387-4CA6-816F-3879F97B5CBC}" type="slidenum">
-              <a:rPr b="0" lang="en-US"/>
+              <a:rPr b="0" lang="en-US" kern="400000"/>
               <a:t>4</a:t>
             </a:fld>
-            <a:endParaRPr lang="en-US"/>
+            <a:endParaRPr b="0" lang="en-US" kern="400000"/>
           </a:p>
         </p:txBody>
       </p:sp>
@@ -5645,12 +6266,12 @@
           <a:p>
             <a:pPr algn="l" indent="0" marL="0">
               <a:lnSpc>
-                <a:spcPts val="2688"/>
+                <a:spcPct val="93333"/>
               </a:lnSpc>
               <a:buNone/>
             </a:pPr>
             <a:r>
-              <a:rPr lang="en-US" sz="2400" b="1" dirty="0">
+              <a:rPr lang="en-US" sz="2400" b="1" dirty="0" kern="400000">
                 <a:solidFill>
                   <a:srgbClr val="0B1F3A"/>
                 </a:solidFill>
@@ -5660,7 +6281,14 @@
               </a:rPr>
               <a:t>The same deck, without the late-night rework</a:t>
             </a:r>
-            <a:endParaRPr lang="en-US" sz="2400" dirty="0"/>
+            <a:endParaRPr lang="en-US" sz="2400" b="1" dirty="0" kern="400000">
+              <a:solidFill>
+                <a:srgbClr val="0B1F3A"/>
+              </a:solidFill>
+              <a:latin typeface="Arial" pitchFamily="34" charset="0"/>
+              <a:ea typeface="Arial" pitchFamily="34" charset="-122"/>
+              <a:cs typeface="Arial" pitchFamily="34" charset="-120"/>
+            </a:endParaRPr>
           </a:p>
         </p:txBody>
       </p:sp>
@@ -5687,12 +6315,12 @@
           <a:p>
             <a:pPr algn="l" indent="0" marL="0">
               <a:lnSpc>
-                <a:spcPts val="1200"/>
+                <a:spcPct val="100000"/>
               </a:lnSpc>
               <a:buNone/>
             </a:pPr>
             <a:r>
-              <a:rPr lang="en-US" sz="1000" b="1" dirty="0">
+              <a:rPr lang="en-US" sz="1000" b="1" dirty="0" kern="400000">
                 <a:solidFill>
                   <a:srgbClr val="1F5FBF"/>
                 </a:solidFill>
@@ -5702,7 +6330,14 @@
               </a:rPr>
               <a:t>WHAT CHANGES</a:t>
             </a:r>
-            <a:endParaRPr lang="en-US" sz="1000" dirty="0"/>
+            <a:endParaRPr lang="en-US" sz="1000" b="1" dirty="0" kern="400000">
+              <a:solidFill>
+                <a:srgbClr val="1F5FBF"/>
+              </a:solidFill>
+              <a:latin typeface="Arial" pitchFamily="34" charset="0"/>
+              <a:ea typeface="Arial" pitchFamily="34" charset="-122"/>
+              <a:cs typeface="Arial" pitchFamily="34" charset="-120"/>
+            </a:endParaRPr>
           </a:p>
         </p:txBody>
       </p:sp>
@@ -5749,12 +6384,12 @@
           <a:p>
             <a:pPr algn="l" indent="0" marL="0">
               <a:lnSpc>
-                <a:spcPts val="1200"/>
+                <a:spcPct val="100000"/>
               </a:lnSpc>
               <a:buNone/>
             </a:pPr>
             <a:r>
-              <a:rPr lang="en-US" sz="1000" b="1" dirty="0">
+              <a:rPr lang="en-US" sz="1000" b="1" dirty="0" kern="400000">
                 <a:solidFill>
                   <a:srgbClr val="5B6B7F"/>
                 </a:solidFill>
@@ -5764,7 +6399,14 @@
               </a:rPr>
               <a:t>BUILDING IT BY HAND</a:t>
             </a:r>
-            <a:endParaRPr lang="en-US" sz="1000" dirty="0"/>
+            <a:endParaRPr lang="en-US" sz="1000" b="1" dirty="0" kern="400000">
+              <a:solidFill>
+                <a:srgbClr val="5B6B7F"/>
+              </a:solidFill>
+              <a:latin typeface="Arial" pitchFamily="34" charset="0"/>
+              <a:ea typeface="Arial" pitchFamily="34" charset="-122"/>
+              <a:cs typeface="Arial" pitchFamily="34" charset="-120"/>
+            </a:endParaRPr>
           </a:p>
         </p:txBody>
       </p:sp>
@@ -5791,13 +6433,13 @@
           <a:p>
             <a:pPr algn="l" marL="177800" indent="-177800">
               <a:lnSpc>
-                <a:spcPts val="1680"/>
+                <a:spcPct val="100000"/>
               </a:lnSpc>
               <a:buSzPct val="100000"/>
               <a:buChar char="•"/>
             </a:pPr>
             <a:r>
-              <a:rPr lang="en-US" sz="1400" dirty="0">
+              <a:rPr lang="en-US" sz="1400" dirty="0" kern="400000">
                 <a:solidFill>
                   <a:srgbClr val="0B1F3A"/>
                 </a:solidFill>
@@ -5807,12 +6449,19 @@
               </a:rPr>
               <a:t>Blank slides and copy-pasted templates</a:t>
             </a:r>
-            <a:endParaRPr lang="en-US" sz="1400" dirty="0"/>
+            <a:endParaRPr lang="en-US" sz="1400" dirty="0" kern="400000">
+              <a:solidFill>
+                <a:srgbClr val="0B1F3A"/>
+              </a:solidFill>
+              <a:latin typeface="Arial" pitchFamily="34" charset="0"/>
+              <a:ea typeface="Arial" pitchFamily="34" charset="-122"/>
+              <a:cs typeface="Arial" pitchFamily="34" charset="-120"/>
+            </a:endParaRPr>
           </a:p>
           <a:p>
             <a:pPr algn="l" marL="177800" indent="-177800">
               <a:lnSpc>
-                <a:spcPts val="1680"/>
+                <a:spcPct val="100000"/>
               </a:lnSpc>
               <a:spcBef>
                 <a:spcPts val="1000"/>
@@ -5821,7 +6470,7 @@
               <a:buChar char="•"/>
             </a:pPr>
             <a:r>
-              <a:rPr lang="en-US" sz="1400" dirty="0">
+              <a:rPr lang="en-US" sz="1400" dirty="0" kern="400000">
                 <a:solidFill>
                   <a:srgbClr val="0B1F3A"/>
                 </a:solidFill>
@@ -5831,12 +6480,19 @@
               </a:rPr>
               <a:t>Text that overflows, or shrinks until no one can read it</a:t>
             </a:r>
-            <a:endParaRPr lang="en-US" sz="1400" dirty="0"/>
+            <a:endParaRPr lang="en-US" sz="1400" dirty="0" kern="400000">
+              <a:solidFill>
+                <a:srgbClr val="0B1F3A"/>
+              </a:solidFill>
+              <a:latin typeface="Arial" pitchFamily="34" charset="0"/>
+              <a:ea typeface="Arial" pitchFamily="34" charset="-122"/>
+              <a:cs typeface="Arial" pitchFamily="34" charset="-120"/>
+            </a:endParaRPr>
           </a:p>
           <a:p>
             <a:pPr algn="l" marL="177800" indent="-177800">
               <a:lnSpc>
-                <a:spcPts val="1680"/>
+                <a:spcPct val="100000"/>
               </a:lnSpc>
               <a:spcBef>
                 <a:spcPts val="1000"/>
@@ -5845,7 +6501,7 @@
               <a:buChar char="•"/>
             </a:pPr>
             <a:r>
-              <a:rPr lang="en-US" sz="1400" dirty="0">
+              <a:rPr lang="en-US" sz="1400" dirty="0" kern="400000">
                 <a:solidFill>
                   <a:srgbClr val="0B1F3A"/>
                 </a:solidFill>
@@ -5855,12 +6511,19 @@
               </a:rPr>
               <a:t>Numbers without sources, found by the reviewer</a:t>
             </a:r>
-            <a:endParaRPr lang="en-US" sz="1400" dirty="0"/>
+            <a:endParaRPr lang="en-US" sz="1400" dirty="0" kern="400000">
+              <a:solidFill>
+                <a:srgbClr val="0B1F3A"/>
+              </a:solidFill>
+              <a:latin typeface="Arial" pitchFamily="34" charset="0"/>
+              <a:ea typeface="Arial" pitchFamily="34" charset="-122"/>
+              <a:cs typeface="Arial" pitchFamily="34" charset="-120"/>
+            </a:endParaRPr>
           </a:p>
           <a:p>
             <a:pPr algn="l" marL="177800" indent="-177800">
               <a:lnSpc>
-                <a:spcPts val="1680"/>
+                <a:spcPct val="100000"/>
               </a:lnSpc>
               <a:spcBef>
                 <a:spcPts val="1000"/>
@@ -5869,7 +6532,7 @@
               <a:buChar char="•"/>
             </a:pPr>
             <a:r>
-              <a:rPr lang="en-US" sz="1400" dirty="0">
+              <a:rPr lang="en-US" sz="1400" dirty="0" kern="400000">
                 <a:solidFill>
                   <a:srgbClr val="0B1F3A"/>
                 </a:solidFill>
@@ -5879,7 +6542,14 @@
               </a:rPr>
               <a:t>Last-minute fixes the night before the meeting</a:t>
             </a:r>
-            <a:endParaRPr lang="en-US" sz="1400" dirty="0"/>
+            <a:endParaRPr lang="en-US" sz="1400" dirty="0" kern="400000">
+              <a:solidFill>
+                <a:srgbClr val="0B1F3A"/>
+              </a:solidFill>
+              <a:latin typeface="Arial" pitchFamily="34" charset="0"/>
+              <a:ea typeface="Arial" pitchFamily="34" charset="-122"/>
+              <a:cs typeface="Arial" pitchFamily="34" charset="-120"/>
+            </a:endParaRPr>
           </a:p>
         </p:txBody>
       </p:sp>
@@ -5984,12 +6654,12 @@
           <a:p>
             <a:pPr algn="l" indent="0" marL="0">
               <a:lnSpc>
-                <a:spcPts val="1200"/>
+                <a:spcPct val="100000"/>
               </a:lnSpc>
               <a:buNone/>
             </a:pPr>
             <a:r>
-              <a:rPr lang="en-US" sz="1000" b="1" dirty="0">
+              <a:rPr lang="en-US" sz="1000" b="1" dirty="0" kern="400000">
                 <a:solidFill>
                   <a:srgbClr val="1F5FBF"/>
                 </a:solidFill>
@@ -5999,7 +6669,14 @@
               </a:rPr>
               <a:t>WITH SLIDECRAFT</a:t>
             </a:r>
-            <a:endParaRPr lang="en-US" sz="1000" dirty="0"/>
+            <a:endParaRPr lang="en-US" sz="1000" b="1" dirty="0" kern="400000">
+              <a:solidFill>
+                <a:srgbClr val="1F5FBF"/>
+              </a:solidFill>
+              <a:latin typeface="Arial" pitchFamily="34" charset="0"/>
+              <a:ea typeface="Arial" pitchFamily="34" charset="-122"/>
+              <a:cs typeface="Arial" pitchFamily="34" charset="-120"/>
+            </a:endParaRPr>
           </a:p>
         </p:txBody>
       </p:sp>
@@ -6026,13 +6703,13 @@
           <a:p>
             <a:pPr algn="l" marL="177800" indent="-177800">
               <a:lnSpc>
-                <a:spcPts val="1680"/>
+                <a:spcPct val="100000"/>
               </a:lnSpc>
               <a:buSzPct val="100000"/>
               <a:buChar char="•"/>
             </a:pPr>
             <a:r>
-              <a:rPr lang="en-US" sz="1400" dirty="0">
+              <a:rPr lang="en-US" sz="1400" dirty="0" kern="400000">
                 <a:solidFill>
                   <a:srgbClr val="0B1F3A"/>
                 </a:solidFill>
@@ -6042,12 +6719,19 @@
               </a:rPr>
               <a:t>The storyline and title chain agreed before any slide is drawn</a:t>
             </a:r>
-            <a:endParaRPr lang="en-US" sz="1400" dirty="0"/>
+            <a:endParaRPr lang="en-US" sz="1400" dirty="0" kern="400000">
+              <a:solidFill>
+                <a:srgbClr val="0B1F3A"/>
+              </a:solidFill>
+              <a:latin typeface="Arial" pitchFamily="34" charset="0"/>
+              <a:ea typeface="Arial" pitchFamily="34" charset="-122"/>
+              <a:cs typeface="Arial" pitchFamily="34" charset="-120"/>
+            </a:endParaRPr>
           </a:p>
           <a:p>
             <a:pPr algn="l" marL="177800" indent="-177800">
               <a:lnSpc>
-                <a:spcPts val="1680"/>
+                <a:spcPct val="100000"/>
               </a:lnSpc>
               <a:spcBef>
                 <a:spcPts val="1000"/>
@@ -6056,7 +6740,7 @@
               <a:buChar char="•"/>
             </a:pPr>
             <a:r>
-              <a:rPr lang="en-US" sz="1400" dirty="0">
+              <a:rPr lang="en-US" sz="1400" dirty="0" kern="400000">
                 <a:solidFill>
                   <a:srgbClr val="0B1F3A"/>
                 </a:solidFill>
@@ -6066,12 +6750,19 @@
               </a:rPr>
               <a:t>Text measured to fit, exactly as PowerPoint will show it</a:t>
             </a:r>
-            <a:endParaRPr lang="en-US" sz="1400" dirty="0"/>
+            <a:endParaRPr lang="en-US" sz="1400" dirty="0" kern="400000">
+              <a:solidFill>
+                <a:srgbClr val="0B1F3A"/>
+              </a:solidFill>
+              <a:latin typeface="Arial" pitchFamily="34" charset="0"/>
+              <a:ea typeface="Arial" pitchFamily="34" charset="-122"/>
+              <a:cs typeface="Arial" pitchFamily="34" charset="-120"/>
+            </a:endParaRPr>
           </a:p>
           <a:p>
             <a:pPr algn="l" marL="177800" indent="-177800">
               <a:lnSpc>
-                <a:spcPts val="1680"/>
+                <a:spcPct val="100000"/>
               </a:lnSpc>
               <a:spcBef>
                 <a:spcPts val="1000"/>
@@ -6080,7 +6771,7 @@
               <a:buChar char="•"/>
             </a:pPr>
             <a:r>
-              <a:rPr lang="en-US" sz="1400" dirty="0">
+              <a:rPr lang="en-US" sz="1400" dirty="0" kern="400000">
                 <a:solidFill>
                   <a:srgbClr val="0B1F3A"/>
                 </a:solidFill>
@@ -6090,12 +6781,19 @@
               </a:rPr>
               <a:t>Every number cited on the slide where it appears</a:t>
             </a:r>
-            <a:endParaRPr lang="en-US" sz="1400" dirty="0"/>
+            <a:endParaRPr lang="en-US" sz="1400" dirty="0" kern="400000">
+              <a:solidFill>
+                <a:srgbClr val="0B1F3A"/>
+              </a:solidFill>
+              <a:latin typeface="Arial" pitchFamily="34" charset="0"/>
+              <a:ea typeface="Arial" pitchFamily="34" charset="-122"/>
+              <a:cs typeface="Arial" pitchFamily="34" charset="-120"/>
+            </a:endParaRPr>
           </a:p>
           <a:p>
             <a:pPr algn="l" marL="177800" indent="-177800">
               <a:lnSpc>
-                <a:spcPts val="1680"/>
+                <a:spcPct val="100000"/>
               </a:lnSpc>
               <a:spcBef>
                 <a:spcPts val="1000"/>
@@ -6104,7 +6802,7 @@
               <a:buChar char="•"/>
             </a:pPr>
             <a:r>
-              <a:rPr lang="en-US" sz="1400" dirty="0">
+              <a:rPr lang="en-US" sz="1400" dirty="0" kern="400000">
                 <a:solidFill>
                   <a:srgbClr val="0B1F3A"/>
                 </a:solidFill>
@@ -6114,7 +6812,14 @@
               </a:rPr>
               <a:t>A partner-style review before you press send</a:t>
             </a:r>
-            <a:endParaRPr lang="en-US" sz="1400" dirty="0"/>
+            <a:endParaRPr lang="en-US" sz="1400" dirty="0" kern="400000">
+              <a:solidFill>
+                <a:srgbClr val="0B1F3A"/>
+              </a:solidFill>
+              <a:latin typeface="Arial" pitchFamily="34" charset="0"/>
+              <a:ea typeface="Arial" pitchFamily="34" charset="-122"/>
+              <a:cs typeface="Arial" pitchFamily="34" charset="-120"/>
+            </a:endParaRPr>
           </a:p>
         </p:txBody>
       </p:sp>
@@ -6146,7 +6851,7 @@
           <a:bodyPr lIns="0" tIns="0" rIns="0" bIns="0"/>
           <a:lstStyle>
             <a:lvl1pPr>
-              <a:defRPr sz="850">
+              <a:defRPr sz="850" kern="400000">
                 <a:solidFill>
                   <a:srgbClr val="5B6B7F"/>
                 </a:solidFill>
@@ -6159,10 +6864,10 @@
           <a:p>
             <a:pPr algn="r"/>
             <a:fld id="{F7021451-1387-4CA6-816F-3879F97B5CBC}" type="slidenum">
-              <a:rPr b="0" lang="en-US"/>
+              <a:rPr b="0" lang="en-US" kern="400000"/>
               <a:t>5</a:t>
             </a:fld>
-            <a:endParaRPr lang="en-US"/>
+            <a:endParaRPr b="0" lang="en-US" kern="400000"/>
           </a:p>
         </p:txBody>
       </p:sp>
@@ -6218,12 +6923,12 @@
           <a:p>
             <a:pPr algn="l" indent="0" marL="0">
               <a:lnSpc>
-                <a:spcPts val="2688"/>
+                <a:spcPct val="93333"/>
               </a:lnSpc>
               <a:buNone/>
             </a:pPr>
             <a:r>
-              <a:rPr lang="en-US" sz="2400" b="1" dirty="0">
+              <a:rPr lang="en-US" sz="2400" b="1" dirty="0" kern="400000">
                 <a:solidFill>
                   <a:srgbClr val="0B1F3A"/>
                 </a:solidFill>
@@ -6233,7 +6938,14 @@
               </a:rPr>
               <a:t>It helps everyone who has to convince people with slides</a:t>
             </a:r>
-            <a:endParaRPr lang="en-US" sz="2400" dirty="0"/>
+            <a:endParaRPr lang="en-US" sz="2400" b="1" dirty="0" kern="400000">
+              <a:solidFill>
+                <a:srgbClr val="0B1F3A"/>
+              </a:solidFill>
+              <a:latin typeface="Arial" pitchFamily="34" charset="0"/>
+              <a:ea typeface="Arial" pitchFamily="34" charset="-122"/>
+              <a:cs typeface="Arial" pitchFamily="34" charset="-120"/>
+            </a:endParaRPr>
           </a:p>
         </p:txBody>
       </p:sp>
@@ -6260,12 +6972,12 @@
           <a:p>
             <a:pPr algn="l" indent="0" marL="0">
               <a:lnSpc>
-                <a:spcPts val="1200"/>
+                <a:spcPct val="100000"/>
               </a:lnSpc>
               <a:buNone/>
             </a:pPr>
             <a:r>
-              <a:rPr lang="en-US" sz="1000" b="1" dirty="0">
+              <a:rPr lang="en-US" sz="1000" b="1" dirty="0" kern="400000">
                 <a:solidFill>
                   <a:srgbClr val="1F5FBF"/>
                 </a:solidFill>
@@ -6275,7 +6987,14 @@
               </a:rPr>
               <a:t>WHO IT HELPS</a:t>
             </a:r>
-            <a:endParaRPr lang="en-US" sz="1000" dirty="0"/>
+            <a:endParaRPr lang="en-US" sz="1000" b="1" dirty="0" kern="400000">
+              <a:solidFill>
+                <a:srgbClr val="1F5FBF"/>
+              </a:solidFill>
+              <a:latin typeface="Arial" pitchFamily="34" charset="0"/>
+              <a:ea typeface="Arial" pitchFamily="34" charset="-122"/>
+              <a:cs typeface="Arial" pitchFamily="34" charset="-120"/>
+            </a:endParaRPr>
           </a:p>
         </p:txBody>
       </p:sp>
@@ -6342,12 +7061,12 @@
           <a:p>
             <a:pPr algn="l" indent="0" marL="0">
               <a:lnSpc>
-                <a:spcPts val="1920"/>
+                <a:spcPct val="100000"/>
               </a:lnSpc>
               <a:buNone/>
             </a:pPr>
             <a:r>
-              <a:rPr lang="en-US" sz="1600" b="1" dirty="0">
+              <a:rPr lang="en-US" sz="1600" b="1" dirty="0" kern="400000">
                 <a:solidFill>
                   <a:srgbClr val="0B1F3A"/>
                 </a:solidFill>
@@ -6357,7 +7076,14 @@
               </a:rPr>
               <a:t>Consultants and strategy teams</a:t>
             </a:r>
-            <a:endParaRPr lang="en-US" sz="1600" dirty="0"/>
+            <a:endParaRPr lang="en-US" sz="1600" b="1" dirty="0" kern="400000">
+              <a:solidFill>
+                <a:srgbClr val="0B1F3A"/>
+              </a:solidFill>
+              <a:latin typeface="Arial" pitchFamily="34" charset="0"/>
+              <a:ea typeface="Arial" pitchFamily="34" charset="-122"/>
+              <a:cs typeface="Arial" pitchFamily="34" charset="-120"/>
+            </a:endParaRPr>
           </a:p>
         </p:txBody>
       </p:sp>
@@ -6424,12 +7150,12 @@
           <a:p>
             <a:pPr algn="l" indent="0" marL="0">
               <a:lnSpc>
-                <a:spcPts val="1920"/>
+                <a:spcPct val="100000"/>
               </a:lnSpc>
               <a:buNone/>
             </a:pPr>
             <a:r>
-              <a:rPr lang="en-US" sz="1600" b="1" dirty="0">
+              <a:rPr lang="en-US" sz="1600" b="1" dirty="0" kern="400000">
                 <a:solidFill>
                   <a:srgbClr val="0B1F3A"/>
                 </a:solidFill>
@@ -6439,7 +7165,14 @@
               </a:rPr>
               <a:t>Managers and executives</a:t>
             </a:r>
-            <a:endParaRPr lang="en-US" sz="1600" dirty="0"/>
+            <a:endParaRPr lang="en-US" sz="1600" b="1" dirty="0" kern="400000">
+              <a:solidFill>
+                <a:srgbClr val="0B1F3A"/>
+              </a:solidFill>
+              <a:latin typeface="Arial" pitchFamily="34" charset="0"/>
+              <a:ea typeface="Arial" pitchFamily="34" charset="-122"/>
+              <a:cs typeface="Arial" pitchFamily="34" charset="-120"/>
+            </a:endParaRPr>
           </a:p>
         </p:txBody>
       </p:sp>
@@ -6506,12 +7239,12 @@
           <a:p>
             <a:pPr algn="l" indent="0" marL="0">
               <a:lnSpc>
-                <a:spcPts val="1920"/>
+                <a:spcPct val="100000"/>
               </a:lnSpc>
               <a:buNone/>
             </a:pPr>
             <a:r>
-              <a:rPr lang="en-US" sz="1600" b="1" dirty="0">
+              <a:rPr lang="en-US" sz="1600" b="1" dirty="0" kern="400000">
                 <a:solidFill>
                   <a:srgbClr val="0B1F3A"/>
                 </a:solidFill>
@@ -6521,7 +7254,14 @@
               </a:rPr>
               <a:t>Founders and sales teams</a:t>
             </a:r>
-            <a:endParaRPr lang="en-US" sz="1600" dirty="0"/>
+            <a:endParaRPr lang="en-US" sz="1600" b="1" dirty="0" kern="400000">
+              <a:solidFill>
+                <a:srgbClr val="0B1F3A"/>
+              </a:solidFill>
+              <a:latin typeface="Arial" pitchFamily="34" charset="0"/>
+              <a:ea typeface="Arial" pitchFamily="34" charset="-122"/>
+              <a:cs typeface="Arial" pitchFamily="34" charset="-120"/>
+            </a:endParaRPr>
           </a:p>
         </p:txBody>
       </p:sp>
@@ -6588,12 +7328,12 @@
           <a:p>
             <a:pPr algn="l" indent="0" marL="0">
               <a:lnSpc>
-                <a:spcPts val="1920"/>
+                <a:spcPct val="100000"/>
               </a:lnSpc>
               <a:buNone/>
             </a:pPr>
             <a:r>
-              <a:rPr lang="en-US" sz="1600" b="1" dirty="0">
+              <a:rPr lang="en-US" sz="1600" b="1" dirty="0" kern="400000">
                 <a:solidFill>
                   <a:srgbClr val="0B1F3A"/>
                 </a:solidFill>
@@ -6603,7 +7343,14 @@
               </a:rPr>
               <a:t>Speakers and trainers</a:t>
             </a:r>
-            <a:endParaRPr lang="en-US" sz="1600" dirty="0"/>
+            <a:endParaRPr lang="en-US" sz="1600" b="1" dirty="0" kern="400000">
+              <a:solidFill>
+                <a:srgbClr val="0B1F3A"/>
+              </a:solidFill>
+              <a:latin typeface="Arial" pitchFamily="34" charset="0"/>
+              <a:ea typeface="Arial" pitchFamily="34" charset="-122"/>
+              <a:cs typeface="Arial" pitchFamily="34" charset="-120"/>
+            </a:endParaRPr>
           </a:p>
         </p:txBody>
       </p:sp>
@@ -6630,12 +7377,12 @@
           <a:p>
             <a:pPr algn="l" indent="0" marL="0">
               <a:lnSpc>
-                <a:spcPts val="1680"/>
+                <a:spcPct val="100000"/>
               </a:lnSpc>
               <a:buNone/>
             </a:pPr>
             <a:r>
-              <a:rPr lang="en-US" sz="1400" dirty="0">
+              <a:rPr lang="en-US" sz="1400" dirty="0" kern="400000">
                 <a:solidFill>
                   <a:srgbClr val="0B1F3A"/>
                 </a:solidFill>
@@ -6645,7 +7392,14 @@
               </a:rPr>
               <a:t>Board-ready recommendations with an answer-first storyline, issue trees and options on shared criteria.</a:t>
             </a:r>
-            <a:endParaRPr lang="en-US" sz="1400" dirty="0"/>
+            <a:endParaRPr lang="en-US" sz="1400" dirty="0" kern="400000">
+              <a:solidFill>
+                <a:srgbClr val="0B1F3A"/>
+              </a:solidFill>
+              <a:latin typeface="Arial" pitchFamily="34" charset="0"/>
+              <a:ea typeface="Arial" pitchFamily="34" charset="-122"/>
+              <a:cs typeface="Arial" pitchFamily="34" charset="-120"/>
+            </a:endParaRPr>
           </a:p>
         </p:txBody>
       </p:sp>
@@ -6672,12 +7426,12 @@
           <a:p>
             <a:pPr algn="l" indent="0" marL="0">
               <a:lnSpc>
-                <a:spcPts val="1680"/>
+                <a:spcPct val="100000"/>
               </a:lnSpc>
               <a:buNone/>
             </a:pPr>
             <a:r>
-              <a:rPr lang="en-US" sz="1400" dirty="0">
+              <a:rPr lang="en-US" sz="1400" dirty="0" kern="400000">
                 <a:solidFill>
                   <a:srgbClr val="0B1F3A"/>
                 </a:solidFill>
@@ -6687,7 +7441,14 @@
               </a:rPr>
               <a:t>Steering-committee updates, business cases and QBRs that show plan, actual and the decision needed.</a:t>
             </a:r>
-            <a:endParaRPr lang="en-US" sz="1400" dirty="0"/>
+            <a:endParaRPr lang="en-US" sz="1400" dirty="0" kern="400000">
+              <a:solidFill>
+                <a:srgbClr val="0B1F3A"/>
+              </a:solidFill>
+              <a:latin typeface="Arial" pitchFamily="34" charset="0"/>
+              <a:ea typeface="Arial" pitchFamily="34" charset="-122"/>
+              <a:cs typeface="Arial" pitchFamily="34" charset="-120"/>
+            </a:endParaRPr>
           </a:p>
         </p:txBody>
       </p:sp>
@@ -6714,12 +7475,12 @@
           <a:p>
             <a:pPr algn="l" indent="0" marL="0">
               <a:lnSpc>
-                <a:spcPts val="1680"/>
+                <a:spcPct val="100000"/>
               </a:lnSpc>
               <a:buNone/>
             </a:pPr>
             <a:r>
-              <a:rPr lang="en-US" sz="1400" dirty="0">
+              <a:rPr lang="en-US" sz="1400" dirty="0" kern="400000">
                 <a:solidFill>
                   <a:srgbClr val="0B1F3A"/>
                 </a:solidFill>
@@ -6729,7 +7490,14 @@
               </a:rPr>
               <a:t>Pitch decks and client proposals that lead with the problem, the proof and a clear ask.</a:t>
             </a:r>
-            <a:endParaRPr lang="en-US" sz="1400" dirty="0"/>
+            <a:endParaRPr lang="en-US" sz="1400" dirty="0" kern="400000">
+              <a:solidFill>
+                <a:srgbClr val="0B1F3A"/>
+              </a:solidFill>
+              <a:latin typeface="Arial" pitchFamily="34" charset="0"/>
+              <a:ea typeface="Arial" pitchFamily="34" charset="-122"/>
+              <a:cs typeface="Arial" pitchFamily="34" charset="-120"/>
+            </a:endParaRPr>
           </a:p>
         </p:txBody>
       </p:sp>
@@ -6756,12 +7524,12 @@
           <a:p>
             <a:pPr algn="l" indent="0" marL="0">
               <a:lnSpc>
-                <a:spcPts val="1680"/>
+                <a:spcPct val="100000"/>
               </a:lnSpc>
               <a:buNone/>
             </a:pPr>
             <a:r>
-              <a:rPr lang="en-US" sz="1400" dirty="0">
+              <a:rPr lang="en-US" sz="1400" dirty="0" kern="400000">
                 <a:solidFill>
                   <a:srgbClr val="0B1F3A"/>
                 </a:solidFill>
@@ -6771,7 +7539,14 @@
               </a:rPr>
               <a:t>Story-led talks and workshops, presented from the browser or sent as a PDF.</a:t>
             </a:r>
-            <a:endParaRPr lang="en-US" sz="1400" dirty="0"/>
+            <a:endParaRPr lang="en-US" sz="1400" dirty="0" kern="400000">
+              <a:solidFill>
+                <a:srgbClr val="0B1F3A"/>
+              </a:solidFill>
+              <a:latin typeface="Arial" pitchFamily="34" charset="0"/>
+              <a:ea typeface="Arial" pitchFamily="34" charset="-122"/>
+              <a:cs typeface="Arial" pitchFamily="34" charset="-120"/>
+            </a:endParaRPr>
           </a:p>
         </p:txBody>
       </p:sp>
@@ -6803,7 +7578,7 @@
           <a:bodyPr lIns="0" tIns="0" rIns="0" bIns="0"/>
           <a:lstStyle>
             <a:lvl1pPr>
-              <a:defRPr sz="850">
+              <a:defRPr sz="850" kern="400000">
                 <a:solidFill>
                   <a:srgbClr val="5B6B7F"/>
                 </a:solidFill>
@@ -6816,10 +7591,10 @@
           <a:p>
             <a:pPr algn="r"/>
             <a:fld id="{F7021451-1387-4CA6-816F-3879F97B5CBC}" type="slidenum">
-              <a:rPr b="0" lang="en-US"/>
+              <a:rPr b="0" lang="en-US" kern="400000"/>
               <a:t>6</a:t>
             </a:fld>
-            <a:endParaRPr lang="en-US"/>
+            <a:endParaRPr b="0" lang="en-US" kern="400000"/>
           </a:p>
         </p:txBody>
       </p:sp>
@@ -6875,12 +7650,12 @@
           <a:p>
             <a:pPr algn="l" indent="0" marL="0">
               <a:lnSpc>
-                <a:spcPts val="2688"/>
+                <a:spcPct val="93333"/>
               </a:lnSpc>
               <a:buNone/>
             </a:pPr>
             <a:r>
-              <a:rPr lang="en-US" sz="2400" b="1" dirty="0">
+              <a:rPr lang="en-US" sz="2400" b="1" dirty="0" kern="400000">
                 <a:solidFill>
                   <a:srgbClr val="0B1F3A"/>
                 </a:solidFill>
@@ -6890,7 +7665,14 @@
               </a:rPr>
               <a:t>Pick the storyline for your task; the look is a separate choice</a:t>
             </a:r>
-            <a:endParaRPr lang="en-US" sz="2400" dirty="0"/>
+            <a:endParaRPr lang="en-US" sz="2400" b="1" dirty="0" kern="400000">
+              <a:solidFill>
+                <a:srgbClr val="0B1F3A"/>
+              </a:solidFill>
+              <a:latin typeface="Arial" pitchFamily="34" charset="0"/>
+              <a:ea typeface="Arial" pitchFamily="34" charset="-122"/>
+              <a:cs typeface="Arial" pitchFamily="34" charset="-120"/>
+            </a:endParaRPr>
           </a:p>
         </p:txBody>
       </p:sp>
@@ -6917,12 +7699,12 @@
           <a:p>
             <a:pPr algn="l" indent="0" marL="0">
               <a:lnSpc>
-                <a:spcPts val="1200"/>
+                <a:spcPct val="100000"/>
               </a:lnSpc>
               <a:buNone/>
             </a:pPr>
             <a:r>
-              <a:rPr lang="en-US" sz="1000" b="1" dirty="0">
+              <a:rPr lang="en-US" sz="1000" b="1" dirty="0" kern="400000">
                 <a:solidFill>
                   <a:srgbClr val="1F5FBF"/>
                 </a:solidFill>
@@ -6932,7 +7714,14 @@
               </a:rPr>
               <a:t>CHOOSE YOUR TASK</a:t>
             </a:r>
-            <a:endParaRPr lang="en-US" sz="1000" dirty="0"/>
+            <a:endParaRPr lang="en-US" sz="1000" b="1" dirty="0" kern="400000">
+              <a:solidFill>
+                <a:srgbClr val="1F5FBF"/>
+              </a:solidFill>
+              <a:latin typeface="Arial" pitchFamily="34" charset="0"/>
+              <a:ea typeface="Arial" pitchFamily="34" charset="-122"/>
+              <a:cs typeface="Arial" pitchFamily="34" charset="-120"/>
+            </a:endParaRPr>
           </a:p>
         </p:txBody>
       </p:sp>
@@ -6971,7 +7760,7 @@
                     <a:p>
                       <a:pPr algn="l" indent="0" marL="0">
                         <a:lnSpc>
-                          <a:spcPts val="1416"/>
+                          <a:spcPct val="98333"/>
                         </a:lnSpc>
                         <a:buNone/>
                       </a:pPr>
@@ -6986,10 +7775,13 @@
                         </a:rPr>
                         <a:t>Your task</a:t>
                       </a:r>
-                      <a:endParaRPr lang="en-US" sz="1200" dirty="0">
-                        <a:latin typeface="Arial" charset="0"/>
-                        <a:ea typeface="Arial" charset="0"/>
-                        <a:cs typeface="Arial" charset="0"/>
+                      <a:endParaRPr lang="en-US" sz="1200" b="1" dirty="0">
+                        <a:solidFill>
+                          <a:srgbClr val="5B6B7F"/>
+                        </a:solidFill>
+                        <a:latin typeface="Arial" pitchFamily="34" charset="0"/>
+                        <a:ea typeface="Arial" pitchFamily="34" charset="-122"/>
+                        <a:cs typeface="Arial" pitchFamily="34" charset="-120"/>
                       </a:endParaRPr>
                     </a:p>
                   </a:txBody>
@@ -7021,7 +7813,7 @@
                     <a:p>
                       <a:pPr algn="l" indent="0" marL="0">
                         <a:lnSpc>
-                          <a:spcPts val="1416"/>
+                          <a:spcPct val="98333"/>
                         </a:lnSpc>
                         <a:buNone/>
                       </a:pPr>
@@ -7036,10 +7828,13 @@
                         </a:rPr>
                         <a:t>Storyline</a:t>
                       </a:r>
-                      <a:endParaRPr lang="en-US" sz="1200" dirty="0">
-                        <a:latin typeface="Arial" charset="0"/>
-                        <a:ea typeface="Arial" charset="0"/>
-                        <a:cs typeface="Arial" charset="0"/>
+                      <a:endParaRPr lang="en-US" sz="1200" b="1" dirty="0">
+                        <a:solidFill>
+                          <a:srgbClr val="5B6B7F"/>
+                        </a:solidFill>
+                        <a:latin typeface="Arial" pitchFamily="34" charset="0"/>
+                        <a:ea typeface="Arial" pitchFamily="34" charset="-122"/>
+                        <a:cs typeface="Arial" pitchFamily="34" charset="-120"/>
                       </a:endParaRPr>
                     </a:p>
                   </a:txBody>
@@ -7071,7 +7866,7 @@
                     <a:p>
                       <a:pPr algn="l" indent="0" marL="0">
                         <a:lnSpc>
-                          <a:spcPts val="1416"/>
+                          <a:spcPct val="98333"/>
                         </a:lnSpc>
                         <a:buNone/>
                       </a:pPr>
@@ -7086,10 +7881,13 @@
                         </a:rPr>
                         <a:t>Typical audience</a:t>
                       </a:r>
-                      <a:endParaRPr lang="en-US" sz="1200" dirty="0">
-                        <a:latin typeface="Arial" charset="0"/>
-                        <a:ea typeface="Arial" charset="0"/>
-                        <a:cs typeface="Arial" charset="0"/>
+                      <a:endParaRPr lang="en-US" sz="1200" b="1" dirty="0">
+                        <a:solidFill>
+                          <a:srgbClr val="5B6B7F"/>
+                        </a:solidFill>
+                        <a:latin typeface="Arial" pitchFamily="34" charset="0"/>
+                        <a:ea typeface="Arial" pitchFamily="34" charset="-122"/>
+                        <a:cs typeface="Arial" pitchFamily="34" charset="-120"/>
                       </a:endParaRPr>
                     </a:p>
                   </a:txBody>
@@ -7123,7 +7921,7 @@
                     <a:p>
                       <a:pPr algn="l" indent="0" marL="0">
                         <a:lnSpc>
-                          <a:spcPts val="1534"/>
+                          <a:spcPct val="98333"/>
                         </a:lnSpc>
                         <a:buNone/>
                       </a:pPr>
@@ -7138,10 +7936,13 @@
                         </a:rPr>
                         <a:t>Recommend a strategy</a:t>
                       </a:r>
-                      <a:endParaRPr lang="en-US" sz="1300" dirty="0">
-                        <a:latin typeface="Arial" charset="0"/>
-                        <a:ea typeface="Arial" charset="0"/>
-                        <a:cs typeface="Arial" charset="0"/>
+                      <a:endParaRPr lang="en-US" sz="1300" b="1" dirty="0">
+                        <a:solidFill>
+                          <a:srgbClr val="0B1F3A"/>
+                        </a:solidFill>
+                        <a:latin typeface="Arial" pitchFamily="34" charset="0"/>
+                        <a:ea typeface="Arial" pitchFamily="34" charset="-122"/>
+                        <a:cs typeface="Arial" pitchFamily="34" charset="-120"/>
                       </a:endParaRPr>
                     </a:p>
                   </a:txBody>
@@ -7173,7 +7974,7 @@
                     <a:p>
                       <a:pPr algn="l" indent="0" marL="0">
                         <a:lnSpc>
-                          <a:spcPts val="1534"/>
+                          <a:spcPct val="98333"/>
                         </a:lnSpc>
                         <a:buNone/>
                       </a:pPr>
@@ -7189,9 +7990,12 @@
                         <a:t>Strategy recommendation</a:t>
                       </a:r>
                       <a:endParaRPr lang="en-US" sz="1300" dirty="0">
-                        <a:latin typeface="Arial" charset="0"/>
-                        <a:ea typeface="Arial" charset="0"/>
-                        <a:cs typeface="Arial" charset="0"/>
+                        <a:solidFill>
+                          <a:srgbClr val="0B1F3A"/>
+                        </a:solidFill>
+                        <a:latin typeface="Arial" pitchFamily="34" charset="0"/>
+                        <a:ea typeface="Arial" pitchFamily="34" charset="-122"/>
+                        <a:cs typeface="Arial" pitchFamily="34" charset="-120"/>
                       </a:endParaRPr>
                     </a:p>
                   </a:txBody>
@@ -7223,7 +8027,7 @@
                     <a:p>
                       <a:pPr algn="l" indent="0" marL="0">
                         <a:lnSpc>
-                          <a:spcPts val="1534"/>
+                          <a:spcPct val="98333"/>
                         </a:lnSpc>
                         <a:buNone/>
                       </a:pPr>
@@ -7239,9 +8043,12 @@
                         <a:t>Board, leadership team</a:t>
                       </a:r>
                       <a:endParaRPr lang="en-US" sz="1300" dirty="0">
-                        <a:latin typeface="Arial" charset="0"/>
-                        <a:ea typeface="Arial" charset="0"/>
-                        <a:cs typeface="Arial" charset="0"/>
+                        <a:solidFill>
+                          <a:srgbClr val="0B1F3A"/>
+                        </a:solidFill>
+                        <a:latin typeface="Arial" pitchFamily="34" charset="0"/>
+                        <a:ea typeface="Arial" pitchFamily="34" charset="-122"/>
+                        <a:cs typeface="Arial" pitchFamily="34" charset="-120"/>
                       </a:endParaRPr>
                     </a:p>
                   </a:txBody>
@@ -7275,7 +8082,7 @@
                     <a:p>
                       <a:pPr algn="l" indent="0" marL="0">
                         <a:lnSpc>
-                          <a:spcPts val="1534"/>
+                          <a:spcPct val="98333"/>
                         </a:lnSpc>
                         <a:buNone/>
                       </a:pPr>
@@ -7290,10 +8097,13 @@
                         </a:rPr>
                         <a:t>Report progress</a:t>
                       </a:r>
-                      <a:endParaRPr lang="en-US" sz="1300" dirty="0">
-                        <a:latin typeface="Arial" charset="0"/>
-                        <a:ea typeface="Arial" charset="0"/>
-                        <a:cs typeface="Arial" charset="0"/>
+                      <a:endParaRPr lang="en-US" sz="1300" b="1" dirty="0">
+                        <a:solidFill>
+                          <a:srgbClr val="0B1F3A"/>
+                        </a:solidFill>
+                        <a:latin typeface="Arial" pitchFamily="34" charset="0"/>
+                        <a:ea typeface="Arial" pitchFamily="34" charset="-122"/>
+                        <a:cs typeface="Arial" pitchFamily="34" charset="-120"/>
                       </a:endParaRPr>
                     </a:p>
                   </a:txBody>
@@ -7325,7 +8135,7 @@
                     <a:p>
                       <a:pPr algn="l" indent="0" marL="0">
                         <a:lnSpc>
-                          <a:spcPts val="1534"/>
+                          <a:spcPct val="98333"/>
                         </a:lnSpc>
                         <a:buNone/>
                       </a:pPr>
@@ -7341,9 +8151,12 @@
                         <a:t>Executive update</a:t>
                       </a:r>
                       <a:endParaRPr lang="en-US" sz="1300" dirty="0">
-                        <a:latin typeface="Arial" charset="0"/>
-                        <a:ea typeface="Arial" charset="0"/>
-                        <a:cs typeface="Arial" charset="0"/>
+                        <a:solidFill>
+                          <a:srgbClr val="0B1F3A"/>
+                        </a:solidFill>
+                        <a:latin typeface="Arial" pitchFamily="34" charset="0"/>
+                        <a:ea typeface="Arial" pitchFamily="34" charset="-122"/>
+                        <a:cs typeface="Arial" pitchFamily="34" charset="-120"/>
                       </a:endParaRPr>
                     </a:p>
                   </a:txBody>
@@ -7375,7 +8188,7 @@
                     <a:p>
                       <a:pPr algn="l" indent="0" marL="0">
                         <a:lnSpc>
-                          <a:spcPts val="1534"/>
+                          <a:spcPct val="98333"/>
                         </a:lnSpc>
                         <a:buNone/>
                       </a:pPr>
@@ -7391,9 +8204,12 @@
                         <a:t>Steering committee</a:t>
                       </a:r>
                       <a:endParaRPr lang="en-US" sz="1300" dirty="0">
-                        <a:latin typeface="Arial" charset="0"/>
-                        <a:ea typeface="Arial" charset="0"/>
-                        <a:cs typeface="Arial" charset="0"/>
+                        <a:solidFill>
+                          <a:srgbClr val="0B1F3A"/>
+                        </a:solidFill>
+                        <a:latin typeface="Arial" pitchFamily="34" charset="0"/>
+                        <a:ea typeface="Arial" pitchFamily="34" charset="-122"/>
+                        <a:cs typeface="Arial" pitchFamily="34" charset="-120"/>
                       </a:endParaRPr>
                     </a:p>
                   </a:txBody>
@@ -7427,7 +8243,7 @@
                     <a:p>
                       <a:pPr algn="l" indent="0" marL="0">
                         <a:lnSpc>
-                          <a:spcPts val="1534"/>
+                          <a:spcPct val="98333"/>
                         </a:lnSpc>
                         <a:buNone/>
                       </a:pPr>
@@ -7442,10 +8258,13 @@
                         </a:rPr>
                         <a:t>Win a client</a:t>
                       </a:r>
-                      <a:endParaRPr lang="en-US" sz="1300" dirty="0">
-                        <a:latin typeface="Arial" charset="0"/>
-                        <a:ea typeface="Arial" charset="0"/>
-                        <a:cs typeface="Arial" charset="0"/>
+                      <a:endParaRPr lang="en-US" sz="1300" b="1" dirty="0">
+                        <a:solidFill>
+                          <a:srgbClr val="0B1F3A"/>
+                        </a:solidFill>
+                        <a:latin typeface="Arial" pitchFamily="34" charset="0"/>
+                        <a:ea typeface="Arial" pitchFamily="34" charset="-122"/>
+                        <a:cs typeface="Arial" pitchFamily="34" charset="-120"/>
                       </a:endParaRPr>
                     </a:p>
                   </a:txBody>
@@ -7477,7 +8296,7 @@
                     <a:p>
                       <a:pPr algn="l" indent="0" marL="0">
                         <a:lnSpc>
-                          <a:spcPts val="1534"/>
+                          <a:spcPct val="98333"/>
                         </a:lnSpc>
                         <a:buNone/>
                       </a:pPr>
@@ -7493,9 +8312,12 @@
                         <a:t>Client proposal</a:t>
                       </a:r>
                       <a:endParaRPr lang="en-US" sz="1300" dirty="0">
-                        <a:latin typeface="Arial" charset="0"/>
-                        <a:ea typeface="Arial" charset="0"/>
-                        <a:cs typeface="Arial" charset="0"/>
+                        <a:solidFill>
+                          <a:srgbClr val="0B1F3A"/>
+                        </a:solidFill>
+                        <a:latin typeface="Arial" pitchFamily="34" charset="0"/>
+                        <a:ea typeface="Arial" pitchFamily="34" charset="-122"/>
+                        <a:cs typeface="Arial" pitchFamily="34" charset="-120"/>
                       </a:endParaRPr>
                     </a:p>
                   </a:txBody>
@@ -7527,7 +8349,7 @@
                     <a:p>
                       <a:pPr algn="l" indent="0" marL="0">
                         <a:lnSpc>
-                          <a:spcPts val="1534"/>
+                          <a:spcPct val="98333"/>
                         </a:lnSpc>
                         <a:buNone/>
                       </a:pPr>
@@ -7543,9 +8365,12 @@
                         <a:t>Buyer, procurement</a:t>
                       </a:r>
                       <a:endParaRPr lang="en-US" sz="1300" dirty="0">
-                        <a:latin typeface="Arial" charset="0"/>
-                        <a:ea typeface="Arial" charset="0"/>
-                        <a:cs typeface="Arial" charset="0"/>
+                        <a:solidFill>
+                          <a:srgbClr val="0B1F3A"/>
+                        </a:solidFill>
+                        <a:latin typeface="Arial" pitchFamily="34" charset="0"/>
+                        <a:ea typeface="Arial" pitchFamily="34" charset="-122"/>
+                        <a:cs typeface="Arial" pitchFamily="34" charset="-120"/>
                       </a:endParaRPr>
                     </a:p>
                   </a:txBody>
@@ -7579,7 +8404,7 @@
                     <a:p>
                       <a:pPr algn="l" indent="0" marL="0">
                         <a:lnSpc>
-                          <a:spcPts val="1534"/>
+                          <a:spcPct val="98333"/>
                         </a:lnSpc>
                         <a:buNone/>
                       </a:pPr>
@@ -7594,10 +8419,13 @@
                         </a:rPr>
                         <a:t>Ask for budget</a:t>
                       </a:r>
-                      <a:endParaRPr lang="en-US" sz="1300" dirty="0">
-                        <a:latin typeface="Arial" charset="0"/>
-                        <a:ea typeface="Arial" charset="0"/>
-                        <a:cs typeface="Arial" charset="0"/>
+                      <a:endParaRPr lang="en-US" sz="1300" b="1" dirty="0">
+                        <a:solidFill>
+                          <a:srgbClr val="0B1F3A"/>
+                        </a:solidFill>
+                        <a:latin typeface="Arial" pitchFamily="34" charset="0"/>
+                        <a:ea typeface="Arial" pitchFamily="34" charset="-122"/>
+                        <a:cs typeface="Arial" pitchFamily="34" charset="-120"/>
                       </a:endParaRPr>
                     </a:p>
                   </a:txBody>
@@ -7629,7 +8457,7 @@
                     <a:p>
                       <a:pPr algn="l" indent="0" marL="0">
                         <a:lnSpc>
-                          <a:spcPts val="1534"/>
+                          <a:spcPct val="98333"/>
                         </a:lnSpc>
                         <a:buNone/>
                       </a:pPr>
@@ -7645,9 +8473,12 @@
                         <a:t>Business case</a:t>
                       </a:r>
                       <a:endParaRPr lang="en-US" sz="1300" dirty="0">
-                        <a:latin typeface="Arial" charset="0"/>
-                        <a:ea typeface="Arial" charset="0"/>
-                        <a:cs typeface="Arial" charset="0"/>
+                        <a:solidFill>
+                          <a:srgbClr val="0B1F3A"/>
+                        </a:solidFill>
+                        <a:latin typeface="Arial" pitchFamily="34" charset="0"/>
+                        <a:ea typeface="Arial" pitchFamily="34" charset="-122"/>
+                        <a:cs typeface="Arial" pitchFamily="34" charset="-120"/>
                       </a:endParaRPr>
                     </a:p>
                   </a:txBody>
@@ -7679,7 +8510,7 @@
                     <a:p>
                       <a:pPr algn="l" indent="0" marL="0">
                         <a:lnSpc>
-                          <a:spcPts val="1534"/>
+                          <a:spcPct val="98333"/>
                         </a:lnSpc>
                         <a:buNone/>
                       </a:pPr>
@@ -7695,9 +8526,12 @@
                         <a:t>CFO, investment committee</a:t>
                       </a:r>
                       <a:endParaRPr lang="en-US" sz="1300" dirty="0">
-                        <a:latin typeface="Arial" charset="0"/>
-                        <a:ea typeface="Arial" charset="0"/>
-                        <a:cs typeface="Arial" charset="0"/>
+                        <a:solidFill>
+                          <a:srgbClr val="0B1F3A"/>
+                        </a:solidFill>
+                        <a:latin typeface="Arial" pitchFamily="34" charset="0"/>
+                        <a:ea typeface="Arial" pitchFamily="34" charset="-122"/>
+                        <a:cs typeface="Arial" pitchFamily="34" charset="-120"/>
                       </a:endParaRPr>
                     </a:p>
                   </a:txBody>
@@ -7731,7 +8565,7 @@
                     <a:p>
                       <a:pPr algn="l" indent="0" marL="0">
                         <a:lnSpc>
-                          <a:spcPts val="1534"/>
+                          <a:spcPct val="98333"/>
                         </a:lnSpc>
                         <a:buNone/>
                       </a:pPr>
@@ -7746,10 +8580,13 @@
                         </a:rPr>
                         <a:t>Raise money</a:t>
                       </a:r>
-                      <a:endParaRPr lang="en-US" sz="1300" dirty="0">
-                        <a:latin typeface="Arial" charset="0"/>
-                        <a:ea typeface="Arial" charset="0"/>
-                        <a:cs typeface="Arial" charset="0"/>
+                      <a:endParaRPr lang="en-US" sz="1300" b="1" dirty="0">
+                        <a:solidFill>
+                          <a:srgbClr val="0B1F3A"/>
+                        </a:solidFill>
+                        <a:latin typeface="Arial" pitchFamily="34" charset="0"/>
+                        <a:ea typeface="Arial" pitchFamily="34" charset="-122"/>
+                        <a:cs typeface="Arial" pitchFamily="34" charset="-120"/>
                       </a:endParaRPr>
                     </a:p>
                   </a:txBody>
@@ -7781,7 +8618,7 @@
                     <a:p>
                       <a:pPr algn="l" indent="0" marL="0">
                         <a:lnSpc>
-                          <a:spcPts val="1534"/>
+                          <a:spcPct val="98333"/>
                         </a:lnSpc>
                         <a:buNone/>
                       </a:pPr>
@@ -7797,9 +8634,12 @@
                         <a:t>Pitch deck</a:t>
                       </a:r>
                       <a:endParaRPr lang="en-US" sz="1300" dirty="0">
-                        <a:latin typeface="Arial" charset="0"/>
-                        <a:ea typeface="Arial" charset="0"/>
-                        <a:cs typeface="Arial" charset="0"/>
+                        <a:solidFill>
+                          <a:srgbClr val="0B1F3A"/>
+                        </a:solidFill>
+                        <a:latin typeface="Arial" pitchFamily="34" charset="0"/>
+                        <a:ea typeface="Arial" pitchFamily="34" charset="-122"/>
+                        <a:cs typeface="Arial" pitchFamily="34" charset="-120"/>
                       </a:endParaRPr>
                     </a:p>
                   </a:txBody>
@@ -7831,7 +8671,7 @@
                     <a:p>
                       <a:pPr algn="l" indent="0" marL="0">
                         <a:lnSpc>
-                          <a:spcPts val="1534"/>
+                          <a:spcPct val="98333"/>
                         </a:lnSpc>
                         <a:buNone/>
                       </a:pPr>
@@ -7847,9 +8687,12 @@
                         <a:t>Investors</a:t>
                       </a:r>
                       <a:endParaRPr lang="en-US" sz="1300" dirty="0">
-                        <a:latin typeface="Arial" charset="0"/>
-                        <a:ea typeface="Arial" charset="0"/>
-                        <a:cs typeface="Arial" charset="0"/>
+                        <a:solidFill>
+                          <a:srgbClr val="0B1F3A"/>
+                        </a:solidFill>
+                        <a:latin typeface="Arial" pitchFamily="34" charset="0"/>
+                        <a:ea typeface="Arial" pitchFamily="34" charset="-122"/>
+                        <a:cs typeface="Arial" pitchFamily="34" charset="-120"/>
                       </a:endParaRPr>
                     </a:p>
                   </a:txBody>
@@ -7883,7 +8726,7 @@
                     <a:p>
                       <a:pPr algn="l" indent="0" marL="0">
                         <a:lnSpc>
-                          <a:spcPts val="1534"/>
+                          <a:spcPct val="98333"/>
                         </a:lnSpc>
                         <a:buNone/>
                       </a:pPr>
@@ -7898,10 +8741,13 @@
                         </a:rPr>
                         <a:t>Review a quarter</a:t>
                       </a:r>
-                      <a:endParaRPr lang="en-US" sz="1300" dirty="0">
-                        <a:latin typeface="Arial" charset="0"/>
-                        <a:ea typeface="Arial" charset="0"/>
-                        <a:cs typeface="Arial" charset="0"/>
+                      <a:endParaRPr lang="en-US" sz="1300" b="1" dirty="0">
+                        <a:solidFill>
+                          <a:srgbClr val="0B1F3A"/>
+                        </a:solidFill>
+                        <a:latin typeface="Arial" pitchFamily="34" charset="0"/>
+                        <a:ea typeface="Arial" pitchFamily="34" charset="-122"/>
+                        <a:cs typeface="Arial" pitchFamily="34" charset="-120"/>
                       </a:endParaRPr>
                     </a:p>
                   </a:txBody>
@@ -7933,7 +8779,7 @@
                     <a:p>
                       <a:pPr algn="l" indent="0" marL="0">
                         <a:lnSpc>
-                          <a:spcPts val="1534"/>
+                          <a:spcPct val="98333"/>
                         </a:lnSpc>
                         <a:buNone/>
                       </a:pPr>
@@ -7949,9 +8795,12 @@
                         <a:t>Sales QBR</a:t>
                       </a:r>
                       <a:endParaRPr lang="en-US" sz="1300" dirty="0">
-                        <a:latin typeface="Arial" charset="0"/>
-                        <a:ea typeface="Arial" charset="0"/>
-                        <a:cs typeface="Arial" charset="0"/>
+                        <a:solidFill>
+                          <a:srgbClr val="0B1F3A"/>
+                        </a:solidFill>
+                        <a:latin typeface="Arial" pitchFamily="34" charset="0"/>
+                        <a:ea typeface="Arial" pitchFamily="34" charset="-122"/>
+                        <a:cs typeface="Arial" pitchFamily="34" charset="-120"/>
                       </a:endParaRPr>
                     </a:p>
                   </a:txBody>
@@ -7983,7 +8832,7 @@
                     <a:p>
                       <a:pPr algn="l" indent="0" marL="0">
                         <a:lnSpc>
-                          <a:spcPts val="1534"/>
+                          <a:spcPct val="98333"/>
                         </a:lnSpc>
                         <a:buNone/>
                       </a:pPr>
@@ -7999,9 +8848,12 @@
                         <a:t>Customer executives</a:t>
                       </a:r>
                       <a:endParaRPr lang="en-US" sz="1300" dirty="0">
-                        <a:latin typeface="Arial" charset="0"/>
-                        <a:ea typeface="Arial" charset="0"/>
-                        <a:cs typeface="Arial" charset="0"/>
+                        <a:solidFill>
+                          <a:srgbClr val="0B1F3A"/>
+                        </a:solidFill>
+                        <a:latin typeface="Arial" pitchFamily="34" charset="0"/>
+                        <a:ea typeface="Arial" pitchFamily="34" charset="-122"/>
+                        <a:cs typeface="Arial" pitchFamily="34" charset="-120"/>
                       </a:endParaRPr>
                     </a:p>
                   </a:txBody>
@@ -8035,7 +8887,7 @@
                     <a:p>
                       <a:pPr algn="l" indent="0" marL="0">
                         <a:lnSpc>
-                          <a:spcPts val="1534"/>
+                          <a:spcPct val="98333"/>
                         </a:lnSpc>
                         <a:buNone/>
                       </a:pPr>
@@ -8050,10 +8902,13 @@
                         </a:rPr>
                         <a:t>Tell a story</a:t>
                       </a:r>
-                      <a:endParaRPr lang="en-US" sz="1300" dirty="0">
-                        <a:latin typeface="Arial" charset="0"/>
-                        <a:ea typeface="Arial" charset="0"/>
-                        <a:cs typeface="Arial" charset="0"/>
+                      <a:endParaRPr lang="en-US" sz="1300" b="1" dirty="0">
+                        <a:solidFill>
+                          <a:srgbClr val="0B1F3A"/>
+                        </a:solidFill>
+                        <a:latin typeface="Arial" pitchFamily="34" charset="0"/>
+                        <a:ea typeface="Arial" pitchFamily="34" charset="-122"/>
+                        <a:cs typeface="Arial" pitchFamily="34" charset="-120"/>
                       </a:endParaRPr>
                     </a:p>
                   </a:txBody>
@@ -8085,7 +8940,7 @@
                     <a:p>
                       <a:pPr algn="l" indent="0" marL="0">
                         <a:lnSpc>
-                          <a:spcPts val="1534"/>
+                          <a:spcPct val="98333"/>
                         </a:lnSpc>
                         <a:buNone/>
                       </a:pPr>
@@ -8101,9 +8956,12 @@
                         <a:t>Narrative story</a:t>
                       </a:r>
                       <a:endParaRPr lang="en-US" sz="1300" dirty="0">
-                        <a:latin typeface="Arial" charset="0"/>
-                        <a:ea typeface="Arial" charset="0"/>
-                        <a:cs typeface="Arial" charset="0"/>
+                        <a:solidFill>
+                          <a:srgbClr val="0B1F3A"/>
+                        </a:solidFill>
+                        <a:latin typeface="Arial" pitchFamily="34" charset="0"/>
+                        <a:ea typeface="Arial" pitchFamily="34" charset="-122"/>
+                        <a:cs typeface="Arial" pitchFamily="34" charset="-120"/>
                       </a:endParaRPr>
                     </a:p>
                   </a:txBody>
@@ -8135,7 +8993,7 @@
                     <a:p>
                       <a:pPr algn="l" indent="0" marL="0">
                         <a:lnSpc>
-                          <a:spcPts val="1534"/>
+                          <a:spcPct val="98333"/>
                         </a:lnSpc>
                         <a:buNone/>
                       </a:pPr>
@@ -8151,9 +9009,12 @@
                         <a:t>Conference, all-hands</a:t>
                       </a:r>
                       <a:endParaRPr lang="en-US" sz="1300" dirty="0">
-                        <a:latin typeface="Arial" charset="0"/>
-                        <a:ea typeface="Arial" charset="0"/>
-                        <a:cs typeface="Arial" charset="0"/>
+                        <a:solidFill>
+                          <a:srgbClr val="0B1F3A"/>
+                        </a:solidFill>
+                        <a:latin typeface="Arial" pitchFamily="34" charset="0"/>
+                        <a:ea typeface="Arial" pitchFamily="34" charset="-122"/>
+                        <a:cs typeface="Arial" pitchFamily="34" charset="-120"/>
                       </a:endParaRPr>
                     </a:p>
                   </a:txBody>
@@ -8206,12 +9067,12 @@
           <a:p>
             <a:pPr algn="l" indent="0" marL="0">
               <a:lnSpc>
-                <a:spcPts val="1200"/>
+                <a:spcPct val="100000"/>
               </a:lnSpc>
               <a:buNone/>
             </a:pPr>
             <a:r>
-              <a:rPr lang="en-US" sz="1000" dirty="0">
+              <a:rPr lang="en-US" sz="1000" dirty="0" kern="400000">
                 <a:solidFill>
                   <a:srgbClr val="5B6B7F"/>
                 </a:solidFill>
@@ -8219,9 +9080,16 @@
                 <a:ea typeface="Arial" pitchFamily="34" charset="-122"/>
                 <a:cs typeface="Arial" pitchFamily="34" charset="-120"/>
               </a:rPr>
-              <a:t>14 storylines in all, each works in any of the 6 themes or in your own brand.</a:t>
-            </a:r>
-            <a:endParaRPr lang="en-US" sz="1000" dirty="0"/>
+              <a:t>14 storylines in all, each works in any of the 7 themes or in your own brand.</a:t>
+            </a:r>
+            <a:endParaRPr lang="en-US" sz="1000" dirty="0" kern="400000">
+              <a:solidFill>
+                <a:srgbClr val="5B6B7F"/>
+              </a:solidFill>
+              <a:latin typeface="Arial" pitchFamily="34" charset="0"/>
+              <a:ea typeface="Arial" pitchFamily="34" charset="-122"/>
+              <a:cs typeface="Arial" pitchFamily="34" charset="-120"/>
+            </a:endParaRPr>
           </a:p>
         </p:txBody>
       </p:sp>
@@ -8248,12 +9116,12 @@
           <a:p>
             <a:pPr algn="l" indent="0" marL="0">
               <a:lnSpc>
-                <a:spcPts val="960"/>
+                <a:spcPct val="100000"/>
               </a:lnSpc>
               <a:buNone/>
             </a:pPr>
             <a:r>
-              <a:rPr lang="en-US" sz="800" dirty="0">
+              <a:rPr lang="en-US" sz="800" dirty="0" kern="400000">
                 <a:solidFill>
                   <a:srgbClr val="5B6B7F"/>
                 </a:solidFill>
@@ -8265,12 +9133,12 @@
             </a:r>
             <a:pPr algn="l" indent="0" marL="0">
               <a:lnSpc>
-                <a:spcPts val="960"/>
+                <a:spcPct val="100000"/>
               </a:lnSpc>
               <a:buNone/>
             </a:pPr>
             <a:r>
-              <a:rPr lang="en-US" sz="800" u="sng" dirty="0">
+              <a:rPr lang="en-US" sz="800" u="sng" dirty="0" kern="400000">
                 <a:solidFill>
                   <a:srgbClr val="5B6B7F"/>
                 </a:solidFill>
@@ -8287,7 +9155,14 @@
               </a:rPr>
               <a:t>SlideCraft 0.4 release notes and test suite (Oct 2026)</a:t>
             </a:r>
-            <a:endParaRPr lang="en-US" sz="800" dirty="0"/>
+            <a:endParaRPr lang="en-US" sz="800" u="sng" dirty="0" kern="400000">
+              <a:solidFill>
+                <a:srgbClr val="5B6B7F"/>
+              </a:solidFill>
+              <a:latin typeface="Arial" pitchFamily="34" charset="0"/>
+              <a:ea typeface="Arial" pitchFamily="34" charset="-122"/>
+              <a:cs typeface="Arial" pitchFamily="34" charset="-120"/>
+            </a:endParaRPr>
           </a:p>
         </p:txBody>
       </p:sp>
@@ -8319,7 +9194,7 @@
           <a:bodyPr lIns="0" tIns="0" rIns="0" bIns="0"/>
           <a:lstStyle>
             <a:lvl1pPr>
-              <a:defRPr sz="850">
+              <a:defRPr sz="850" kern="400000">
                 <a:solidFill>
                   <a:srgbClr val="5B6B7F"/>
                 </a:solidFill>
@@ -8332,10 +9207,10 @@
           <a:p>
             <a:pPr algn="r"/>
             <a:fld id="{F7021451-1387-4CA6-816F-3879F97B5CBC}" type="slidenum">
-              <a:rPr b="0" lang="en-US"/>
+              <a:rPr b="0" lang="en-US" kern="400000"/>
               <a:t>7</a:t>
             </a:fld>
-            <a:endParaRPr lang="en-US"/>
+            <a:endParaRPr b="0" lang="en-US" kern="400000"/>
           </a:p>
         </p:txBody>
       </p:sp>
@@ -8391,12 +9266,12 @@
           <a:p>
             <a:pPr algn="l" indent="0" marL="0">
               <a:lnSpc>
-                <a:spcPts val="2688"/>
+                <a:spcPct val="93333"/>
               </a:lnSpc>
               <a:buNone/>
             </a:pPr>
             <a:r>
-              <a:rPr lang="en-US" sz="2400" b="1" dirty="0">
+              <a:rPr lang="en-US" sz="2400" b="1" dirty="0" kern="400000">
                 <a:solidFill>
                   <a:srgbClr val="0B1F3A"/>
                 </a:solidFill>
@@ -8406,7 +9281,14 @@
               </a:rPr>
               <a:t>One brief gives you a complete kit, not just slides</a:t>
             </a:r>
-            <a:endParaRPr lang="en-US" sz="2400" dirty="0"/>
+            <a:endParaRPr lang="en-US" sz="2400" b="1" dirty="0" kern="400000">
+              <a:solidFill>
+                <a:srgbClr val="0B1F3A"/>
+              </a:solidFill>
+              <a:latin typeface="Arial" pitchFamily="34" charset="0"/>
+              <a:ea typeface="Arial" pitchFamily="34" charset="-122"/>
+              <a:cs typeface="Arial" pitchFamily="34" charset="-120"/>
+            </a:endParaRPr>
           </a:p>
         </p:txBody>
       </p:sp>
@@ -8433,12 +9315,12 @@
           <a:p>
             <a:pPr algn="l" indent="0" marL="0">
               <a:lnSpc>
-                <a:spcPts val="1200"/>
+                <a:spcPct val="100000"/>
               </a:lnSpc>
               <a:buNone/>
             </a:pPr>
             <a:r>
-              <a:rPr lang="en-US" sz="1000" b="1" dirty="0">
+              <a:rPr lang="en-US" sz="1000" b="1" dirty="0" kern="400000">
                 <a:solidFill>
                   <a:srgbClr val="1F5FBF"/>
                 </a:solidFill>
@@ -8448,7 +9330,14 @@
               </a:rPr>
               <a:t>WHAT YOU GET</a:t>
             </a:r>
-            <a:endParaRPr lang="en-US" sz="1000" dirty="0"/>
+            <a:endParaRPr lang="en-US" sz="1000" b="1" dirty="0" kern="400000">
+              <a:solidFill>
+                <a:srgbClr val="1F5FBF"/>
+              </a:solidFill>
+              <a:latin typeface="Arial" pitchFamily="34" charset="0"/>
+              <a:ea typeface="Arial" pitchFamily="34" charset="-122"/>
+              <a:cs typeface="Arial" pitchFamily="34" charset="-120"/>
+            </a:endParaRPr>
           </a:p>
         </p:txBody>
       </p:sp>
@@ -8575,12 +9464,12 @@
           <a:p>
             <a:pPr algn="l" indent="0" marL="0">
               <a:lnSpc>
-                <a:spcPts val="1680"/>
+                <a:spcPct val="100000"/>
               </a:lnSpc>
               <a:buNone/>
             </a:pPr>
             <a:r>
-              <a:rPr lang="en-US" sz="1400" b="1" dirty="0">
+              <a:rPr lang="en-US" sz="1400" b="1" dirty="0" kern="400000">
                 <a:solidFill>
                   <a:srgbClr val="0B1F3A"/>
                 </a:solidFill>
@@ -8590,7 +9479,14 @@
               </a:rPr>
               <a:t>Slide layouts</a:t>
             </a:r>
-            <a:endParaRPr lang="en-US" sz="1400" dirty="0"/>
+            <a:endParaRPr lang="en-US" sz="1400" b="1" dirty="0" kern="400000">
+              <a:solidFill>
+                <a:srgbClr val="0B1F3A"/>
+              </a:solidFill>
+              <a:latin typeface="Arial" pitchFamily="34" charset="0"/>
+              <a:ea typeface="Arial" pitchFamily="34" charset="-122"/>
+              <a:cs typeface="Arial" pitchFamily="34" charset="-120"/>
+            </a:endParaRPr>
           </a:p>
         </p:txBody>
       </p:sp>
@@ -8617,12 +9513,12 @@
           <a:p>
             <a:pPr algn="l" indent="0" marL="0">
               <a:lnSpc>
-                <a:spcPts val="1680"/>
+                <a:spcPct val="100000"/>
               </a:lnSpc>
               <a:buNone/>
             </a:pPr>
             <a:r>
-              <a:rPr lang="en-US" sz="1400" b="1" dirty="0">
+              <a:rPr lang="en-US" sz="1400" b="1" dirty="0" kern="400000">
                 <a:solidFill>
                   <a:srgbClr val="0B1F3A"/>
                 </a:solidFill>
@@ -8632,7 +9528,14 @@
               </a:rPr>
               <a:t>Storylines</a:t>
             </a:r>
-            <a:endParaRPr lang="en-US" sz="1400" dirty="0"/>
+            <a:endParaRPr lang="en-US" sz="1400" b="1" dirty="0" kern="400000">
+              <a:solidFill>
+                <a:srgbClr val="0B1F3A"/>
+              </a:solidFill>
+              <a:latin typeface="Arial" pitchFamily="34" charset="0"/>
+              <a:ea typeface="Arial" pitchFamily="34" charset="-122"/>
+              <a:cs typeface="Arial" pitchFamily="34" charset="-120"/>
+            </a:endParaRPr>
           </a:p>
         </p:txBody>
       </p:sp>
@@ -8659,12 +9562,12 @@
           <a:p>
             <a:pPr algn="l" indent="0" marL="0">
               <a:lnSpc>
-                <a:spcPts val="1680"/>
+                <a:spcPct val="100000"/>
               </a:lnSpc>
               <a:buNone/>
             </a:pPr>
             <a:r>
-              <a:rPr lang="en-US" sz="1400" b="1" dirty="0">
+              <a:rPr lang="en-US" sz="1400" b="1" dirty="0" kern="400000">
                 <a:solidFill>
                   <a:srgbClr val="0B1F3A"/>
                 </a:solidFill>
@@ -8674,7 +9577,14 @@
               </a:rPr>
               <a:t>Themes</a:t>
             </a:r>
-            <a:endParaRPr lang="en-US" sz="1400" dirty="0"/>
+            <a:endParaRPr lang="en-US" sz="1400" b="1" dirty="0" kern="400000">
+              <a:solidFill>
+                <a:srgbClr val="0B1F3A"/>
+              </a:solidFill>
+              <a:latin typeface="Arial" pitchFamily="34" charset="0"/>
+              <a:ea typeface="Arial" pitchFamily="34" charset="-122"/>
+              <a:cs typeface="Arial" pitchFamily="34" charset="-120"/>
+            </a:endParaRPr>
           </a:p>
         </p:txBody>
       </p:sp>
@@ -8701,12 +9611,12 @@
           <a:p>
             <a:pPr algn="l" indent="0" marL="0">
               <a:lnSpc>
-                <a:spcPts val="1680"/>
+                <a:spcPct val="100000"/>
               </a:lnSpc>
               <a:buNone/>
             </a:pPr>
             <a:r>
-              <a:rPr lang="en-US" sz="1400" b="1" dirty="0">
+              <a:rPr lang="en-US" sz="1400" b="1" dirty="0" kern="400000">
                 <a:solidFill>
                   <a:srgbClr val="0B1F3A"/>
                 </a:solidFill>
@@ -8716,7 +9626,14 @@
               </a:rPr>
               <a:t>Output formats</a:t>
             </a:r>
-            <a:endParaRPr lang="en-US" sz="1400" dirty="0"/>
+            <a:endParaRPr lang="en-US" sz="1400" b="1" dirty="0" kern="400000">
+              <a:solidFill>
+                <a:srgbClr val="0B1F3A"/>
+              </a:solidFill>
+              <a:latin typeface="Arial" pitchFamily="34" charset="0"/>
+              <a:ea typeface="Arial" pitchFamily="34" charset="-122"/>
+              <a:cs typeface="Arial" pitchFamily="34" charset="-120"/>
+            </a:endParaRPr>
           </a:p>
         </p:txBody>
       </p:sp>
@@ -8743,12 +9660,12 @@
           <a:p>
             <a:pPr algn="l" indent="0" marL="0">
               <a:lnSpc>
-                <a:spcPts val="6480"/>
+                <a:spcPct val="100000"/>
               </a:lnSpc>
               <a:buNone/>
             </a:pPr>
             <a:r>
-              <a:rPr lang="en-US" sz="5400" b="1" dirty="0">
+              <a:rPr lang="en-US" sz="5400" b="1" dirty="0" kern="400000">
                 <a:solidFill>
                   <a:srgbClr val="1F5FBF"/>
                 </a:solidFill>
@@ -8758,7 +9675,14 @@
               </a:rPr>
               <a:t>32</a:t>
             </a:r>
-            <a:endParaRPr lang="en-US" sz="5400" dirty="0"/>
+            <a:endParaRPr lang="en-US" sz="5400" b="1" dirty="0" kern="400000">
+              <a:solidFill>
+                <a:srgbClr val="1F5FBF"/>
+              </a:solidFill>
+              <a:latin typeface="Arial" pitchFamily="34" charset="0"/>
+              <a:ea typeface="Arial" pitchFamily="34" charset="-122"/>
+              <a:cs typeface="Arial" pitchFamily="34" charset="-120"/>
+            </a:endParaRPr>
           </a:p>
         </p:txBody>
       </p:sp>
@@ -8771,11 +9695,25 @@
         <p:spPr>
           <a:xfrm>
             <a:off x="822960" y="4425696"/>
-            <a:ext cx="2019224" cy="91"/>
-          </a:xfrm>
-          <a:prstGeom prst="line">
-            <a:avLst/>
-          </a:prstGeom>
+            <a:ext cx="2019224" cy="0"/>
+          </a:xfrm>
+          <a:custGeom>
+            <a:avLst/>
+            <a:gdLst/>
+            <a:ahLst/>
+            <a:cxnLst/>
+            <a:rect l="0" t="0" r="r" b="b"/>
+            <a:pathLst>
+              <a:path w="2019224" h="0" fill="none">
+                <a:moveTo>
+                  <a:pt x="0" y="0"/>
+                </a:moveTo>
+                <a:lnTo>
+                  <a:pt x="2019224" y="0"/>
+                </a:lnTo>
+              </a:path>
+            </a:pathLst>
+          </a:custGeom>
           <a:noFill/>
           <a:ln w="9525">
             <a:solidFill>
@@ -8808,12 +9746,12 @@
           <a:p>
             <a:pPr algn="l" indent="0" marL="0">
               <a:lnSpc>
-                <a:spcPts val="1200"/>
+                <a:spcPct val="100000"/>
               </a:lnSpc>
               <a:buNone/>
             </a:pPr>
             <a:r>
-              <a:rPr lang="en-US" sz="1000" dirty="0">
+              <a:rPr lang="en-US" sz="1000" dirty="0" kern="400000">
                 <a:solidFill>
                   <a:srgbClr val="5B6B7F"/>
                 </a:solidFill>
@@ -8823,7 +9761,14 @@
               </a:rPr>
               <a:t>From executive summaries to waterfalls, risk matrices and org charts</a:t>
             </a:r>
-            <a:endParaRPr lang="en-US" sz="1000" dirty="0"/>
+            <a:endParaRPr lang="en-US" sz="1000" dirty="0" kern="400000">
+              <a:solidFill>
+                <a:srgbClr val="5B6B7F"/>
+              </a:solidFill>
+              <a:latin typeface="Arial" pitchFamily="34" charset="0"/>
+              <a:ea typeface="Arial" pitchFamily="34" charset="-122"/>
+              <a:cs typeface="Arial" pitchFamily="34" charset="-120"/>
+            </a:endParaRPr>
           </a:p>
         </p:txBody>
       </p:sp>
@@ -8850,12 +9795,12 @@
           <a:p>
             <a:pPr algn="l" indent="0" marL="0">
               <a:lnSpc>
-                <a:spcPts val="6480"/>
+                <a:spcPct val="100000"/>
               </a:lnSpc>
               <a:buNone/>
             </a:pPr>
             <a:r>
-              <a:rPr lang="en-US" sz="5400" b="1" dirty="0">
+              <a:rPr lang="en-US" sz="5400" b="1" dirty="0" kern="400000">
                 <a:solidFill>
                   <a:srgbClr val="0B1F3A"/>
                 </a:solidFill>
@@ -8865,7 +9810,14 @@
               </a:rPr>
               <a:t>14</a:t>
             </a:r>
-            <a:endParaRPr lang="en-US" sz="5400" dirty="0"/>
+            <a:endParaRPr lang="en-US" sz="5400" b="1" dirty="0" kern="400000">
+              <a:solidFill>
+                <a:srgbClr val="0B1F3A"/>
+              </a:solidFill>
+              <a:latin typeface="Arial" pitchFamily="34" charset="0"/>
+              <a:ea typeface="Arial" pitchFamily="34" charset="-122"/>
+              <a:cs typeface="Arial" pitchFamily="34" charset="-120"/>
+            </a:endParaRPr>
           </a:p>
         </p:txBody>
       </p:sp>
@@ -8878,11 +9830,25 @@
         <p:spPr>
           <a:xfrm>
             <a:off x="3665144" y="4425696"/>
-            <a:ext cx="2019224" cy="91"/>
-          </a:xfrm>
-          <a:prstGeom prst="line">
-            <a:avLst/>
-          </a:prstGeom>
+            <a:ext cx="2019224" cy="0"/>
+          </a:xfrm>
+          <a:custGeom>
+            <a:avLst/>
+            <a:gdLst/>
+            <a:ahLst/>
+            <a:cxnLst/>
+            <a:rect l="0" t="0" r="r" b="b"/>
+            <a:pathLst>
+              <a:path w="2019224" h="0" fill="none">
+                <a:moveTo>
+                  <a:pt x="0" y="0"/>
+                </a:moveTo>
+                <a:lnTo>
+                  <a:pt x="2019224" y="0"/>
+                </a:lnTo>
+              </a:path>
+            </a:pathLst>
+          </a:custGeom>
           <a:noFill/>
           <a:ln w="9525">
             <a:solidFill>
@@ -8915,12 +9881,12 @@
           <a:p>
             <a:pPr algn="l" indent="0" marL="0">
               <a:lnSpc>
-                <a:spcPts val="1200"/>
+                <a:spcPct val="100000"/>
               </a:lnSpc>
               <a:buNone/>
             </a:pPr>
             <a:r>
-              <a:rPr lang="en-US" sz="1000" dirty="0">
+              <a:rPr lang="en-US" sz="1000" dirty="0" kern="400000">
                 <a:solidFill>
                   <a:srgbClr val="5B6B7F"/>
                 </a:solidFill>
@@ -8930,7 +9896,14 @@
               </a:rPr>
               <a:t>Strategy, board update, proposal, pitch, story talk and more</a:t>
             </a:r>
-            <a:endParaRPr lang="en-US" sz="1000" dirty="0"/>
+            <a:endParaRPr lang="en-US" sz="1000" dirty="0" kern="400000">
+              <a:solidFill>
+                <a:srgbClr val="5B6B7F"/>
+              </a:solidFill>
+              <a:latin typeface="Arial" pitchFamily="34" charset="0"/>
+              <a:ea typeface="Arial" pitchFamily="34" charset="-122"/>
+              <a:cs typeface="Arial" pitchFamily="34" charset="-120"/>
+            </a:endParaRPr>
           </a:p>
         </p:txBody>
       </p:sp>
@@ -8957,12 +9930,12 @@
           <a:p>
             <a:pPr algn="l" indent="0" marL="0">
               <a:lnSpc>
-                <a:spcPts val="6480"/>
+                <a:spcPct val="100000"/>
               </a:lnSpc>
               <a:buNone/>
             </a:pPr>
             <a:r>
-              <a:rPr lang="en-US" sz="5400" b="1" dirty="0">
+              <a:rPr lang="en-US" sz="5400" b="1" dirty="0" kern="400000">
                 <a:solidFill>
                   <a:srgbClr val="0B1F3A"/>
                 </a:solidFill>
@@ -8972,7 +9945,14 @@
               </a:rPr>
               <a:t>6</a:t>
             </a:r>
-            <a:endParaRPr lang="en-US" sz="5400" dirty="0"/>
+            <a:endParaRPr lang="en-US" sz="5400" b="1" dirty="0" kern="400000">
+              <a:solidFill>
+                <a:srgbClr val="0B1F3A"/>
+              </a:solidFill>
+              <a:latin typeface="Arial" pitchFamily="34" charset="0"/>
+              <a:ea typeface="Arial" pitchFamily="34" charset="-122"/>
+              <a:cs typeface="Arial" pitchFamily="34" charset="-120"/>
+            </a:endParaRPr>
           </a:p>
         </p:txBody>
       </p:sp>
@@ -8985,11 +9965,25 @@
         <p:spPr>
           <a:xfrm>
             <a:off x="6507328" y="4425696"/>
-            <a:ext cx="2019224" cy="91"/>
-          </a:xfrm>
-          <a:prstGeom prst="line">
-            <a:avLst/>
-          </a:prstGeom>
+            <a:ext cx="2019224" cy="0"/>
+          </a:xfrm>
+          <a:custGeom>
+            <a:avLst/>
+            <a:gdLst/>
+            <a:ahLst/>
+            <a:cxnLst/>
+            <a:rect l="0" t="0" r="r" b="b"/>
+            <a:pathLst>
+              <a:path w="2019224" h="0" fill="none">
+                <a:moveTo>
+                  <a:pt x="0" y="0"/>
+                </a:moveTo>
+                <a:lnTo>
+                  <a:pt x="2019224" y="0"/>
+                </a:lnTo>
+              </a:path>
+            </a:pathLst>
+          </a:custGeom>
           <a:noFill/>
           <a:ln w="9525">
             <a:solidFill>
@@ -9022,12 +10016,12 @@
           <a:p>
             <a:pPr algn="l" indent="0" marL="0">
               <a:lnSpc>
-                <a:spcPts val="1200"/>
+                <a:spcPct val="100000"/>
               </a:lnSpc>
               <a:buNone/>
             </a:pPr>
             <a:r>
-              <a:rPr lang="en-US" sz="1000" dirty="0">
+              <a:rPr lang="en-US" sz="1000" dirty="0" kern="400000">
                 <a:solidFill>
                   <a:srgbClr val="5B6B7F"/>
                 </a:solidFill>
@@ -9037,7 +10031,14 @@
               </a:rPr>
               <a:t>Plus your own brand, imported from a PowerPoint template</a:t>
             </a:r>
-            <a:endParaRPr lang="en-US" sz="1000" dirty="0"/>
+            <a:endParaRPr lang="en-US" sz="1000" dirty="0" kern="400000">
+              <a:solidFill>
+                <a:srgbClr val="5B6B7F"/>
+              </a:solidFill>
+              <a:latin typeface="Arial" pitchFamily="34" charset="0"/>
+              <a:ea typeface="Arial" pitchFamily="34" charset="-122"/>
+              <a:cs typeface="Arial" pitchFamily="34" charset="-120"/>
+            </a:endParaRPr>
           </a:p>
         </p:txBody>
       </p:sp>
@@ -9064,12 +10065,12 @@
           <a:p>
             <a:pPr algn="l" indent="0" marL="0">
               <a:lnSpc>
-                <a:spcPts val="6480"/>
+                <a:spcPct val="100000"/>
               </a:lnSpc>
               <a:buNone/>
             </a:pPr>
             <a:r>
-              <a:rPr lang="en-US" sz="5400" b="1" dirty="0">
+              <a:rPr lang="en-US" sz="5400" b="1" dirty="0" kern="400000">
                 <a:solidFill>
                   <a:srgbClr val="0B1F3A"/>
                 </a:solidFill>
@@ -9079,7 +10080,14 @@
               </a:rPr>
               <a:t>6</a:t>
             </a:r>
-            <a:endParaRPr lang="en-US" sz="5400" dirty="0"/>
+            <a:endParaRPr lang="en-US" sz="5400" b="1" dirty="0" kern="400000">
+              <a:solidFill>
+                <a:srgbClr val="0B1F3A"/>
+              </a:solidFill>
+              <a:latin typeface="Arial" pitchFamily="34" charset="0"/>
+              <a:ea typeface="Arial" pitchFamily="34" charset="-122"/>
+              <a:cs typeface="Arial" pitchFamily="34" charset="-120"/>
+            </a:endParaRPr>
           </a:p>
         </p:txBody>
       </p:sp>
@@ -9092,11 +10100,25 @@
         <p:spPr>
           <a:xfrm>
             <a:off x="9349511" y="4425696"/>
-            <a:ext cx="2019224" cy="91"/>
-          </a:xfrm>
-          <a:prstGeom prst="line">
-            <a:avLst/>
-          </a:prstGeom>
+            <a:ext cx="2019224" cy="0"/>
+          </a:xfrm>
+          <a:custGeom>
+            <a:avLst/>
+            <a:gdLst/>
+            <a:ahLst/>
+            <a:cxnLst/>
+            <a:rect l="0" t="0" r="r" b="b"/>
+            <a:pathLst>
+              <a:path w="2019224" h="0" fill="none">
+                <a:moveTo>
+                  <a:pt x="0" y="0"/>
+                </a:moveTo>
+                <a:lnTo>
+                  <a:pt x="2019224" y="0"/>
+                </a:lnTo>
+              </a:path>
+            </a:pathLst>
+          </a:custGeom>
           <a:noFill/>
           <a:ln w="9525">
             <a:solidFill>
@@ -9129,12 +10151,12 @@
           <a:p>
             <a:pPr algn="l" indent="0" marL="0">
               <a:lnSpc>
-                <a:spcPts val="1200"/>
+                <a:spcPct val="100000"/>
               </a:lnSpc>
               <a:buNone/>
             </a:pPr>
             <a:r>
-              <a:rPr lang="en-US" sz="1000" dirty="0">
+              <a:rPr lang="en-US" sz="1000" dirty="0" kern="400000">
                 <a:solidFill>
                   <a:srgbClr val="5B6B7F"/>
                 </a:solidFill>
@@ -9144,7 +10166,14 @@
               </a:rPr>
               <a:t>PowerPoint, PDF, HTML, images, a one-pager and a Word memo</a:t>
             </a:r>
-            <a:endParaRPr lang="en-US" sz="1000" dirty="0"/>
+            <a:endParaRPr lang="en-US" sz="1000" dirty="0" kern="400000">
+              <a:solidFill>
+                <a:srgbClr val="5B6B7F"/>
+              </a:solidFill>
+              <a:latin typeface="Arial" pitchFamily="34" charset="0"/>
+              <a:ea typeface="Arial" pitchFamily="34" charset="-122"/>
+              <a:cs typeface="Arial" pitchFamily="34" charset="-120"/>
+            </a:endParaRPr>
           </a:p>
         </p:txBody>
       </p:sp>
@@ -9171,12 +10200,12 @@
           <a:p>
             <a:pPr algn="l" indent="0" marL="0">
               <a:lnSpc>
-                <a:spcPts val="960"/>
+                <a:spcPct val="100000"/>
               </a:lnSpc>
               <a:buNone/>
             </a:pPr>
             <a:r>
-              <a:rPr lang="en-US" sz="800" dirty="0">
+              <a:rPr lang="en-US" sz="800" dirty="0" kern="400000">
                 <a:solidFill>
                   <a:srgbClr val="5B6B7F"/>
                 </a:solidFill>
@@ -9188,12 +10217,12 @@
             </a:r>
             <a:pPr algn="l" indent="0" marL="0">
               <a:lnSpc>
-                <a:spcPts val="960"/>
+                <a:spcPct val="100000"/>
               </a:lnSpc>
               <a:buNone/>
             </a:pPr>
             <a:r>
-              <a:rPr lang="en-US" sz="800" u="sng" dirty="0">
+              <a:rPr lang="en-US" sz="800" u="sng" dirty="0" kern="400000">
                 <a:solidFill>
                   <a:srgbClr val="5B6B7F"/>
                 </a:solidFill>
@@ -9210,7 +10239,14 @@
               </a:rPr>
               <a:t>SlideCraft 0.4 release notes and test suite (Oct 2026)</a:t>
             </a:r>
-            <a:endParaRPr lang="en-US" sz="800" dirty="0"/>
+            <a:endParaRPr lang="en-US" sz="800" u="sng" dirty="0" kern="400000">
+              <a:solidFill>
+                <a:srgbClr val="5B6B7F"/>
+              </a:solidFill>
+              <a:latin typeface="Arial" pitchFamily="34" charset="0"/>
+              <a:ea typeface="Arial" pitchFamily="34" charset="-122"/>
+              <a:cs typeface="Arial" pitchFamily="34" charset="-120"/>
+            </a:endParaRPr>
           </a:p>
         </p:txBody>
       </p:sp>
@@ -9242,7 +10278,7 @@
           <a:bodyPr lIns="0" tIns="0" rIns="0" bIns="0"/>
           <a:lstStyle>
             <a:lvl1pPr>
-              <a:defRPr sz="850">
+              <a:defRPr sz="850" kern="400000">
                 <a:solidFill>
                   <a:srgbClr val="5B6B7F"/>
                 </a:solidFill>
@@ -9255,10 +10291,10 @@
           <a:p>
             <a:pPr algn="r"/>
             <a:fld id="{F7021451-1387-4CA6-816F-3879F97B5CBC}" type="slidenum">
-              <a:rPr b="0" lang="en-US"/>
+              <a:rPr b="0" lang="en-US" kern="400000"/>
               <a:t>8</a:t>
             </a:fld>
-            <a:endParaRPr lang="en-US"/>
+            <a:endParaRPr b="0" lang="en-US" kern="400000"/>
           </a:p>
         </p:txBody>
       </p:sp>
@@ -9314,12 +10350,12 @@
           <a:p>
             <a:pPr algn="l" indent="0" marL="0">
               <a:lnSpc>
-                <a:spcPts val="2688"/>
+                <a:spcPct val="93333"/>
               </a:lnSpc>
               <a:buNone/>
             </a:pPr>
             <a:r>
-              <a:rPr lang="en-US" sz="2400" b="1" dirty="0">
+              <a:rPr lang="en-US" sz="2400" b="1" dirty="0" kern="400000">
                 <a:solidFill>
                   <a:srgbClr val="0B1F3A"/>
                 </a:solidFill>
@@ -9329,7 +10365,14 @@
               </a:rPr>
               <a:t>Every deck is checked before you see it, not after the meeting</a:t>
             </a:r>
-            <a:endParaRPr lang="en-US" sz="2400" dirty="0"/>
+            <a:endParaRPr lang="en-US" sz="2400" b="1" dirty="0" kern="400000">
+              <a:solidFill>
+                <a:srgbClr val="0B1F3A"/>
+              </a:solidFill>
+              <a:latin typeface="Arial" pitchFamily="34" charset="0"/>
+              <a:ea typeface="Arial" pitchFamily="34" charset="-122"/>
+              <a:cs typeface="Arial" pitchFamily="34" charset="-120"/>
+            </a:endParaRPr>
           </a:p>
         </p:txBody>
       </p:sp>
@@ -9356,12 +10399,12 @@
           <a:p>
             <a:pPr algn="l" indent="0" marL="0">
               <a:lnSpc>
-                <a:spcPts val="1200"/>
+                <a:spcPct val="100000"/>
               </a:lnSpc>
               <a:buNone/>
             </a:pPr>
             <a:r>
-              <a:rPr lang="en-US" sz="1000" b="1" dirty="0">
+              <a:rPr lang="en-US" sz="1000" b="1" dirty="0" kern="400000">
                 <a:solidFill>
                   <a:srgbClr val="1F5FBF"/>
                 </a:solidFill>
@@ -9371,7 +10414,14 @@
               </a:rPr>
               <a:t>QUALITY</a:t>
             </a:r>
-            <a:endParaRPr lang="en-US" sz="1000" dirty="0"/>
+            <a:endParaRPr lang="en-US" sz="1000" b="1" dirty="0" kern="400000">
+              <a:solidFill>
+                <a:srgbClr val="1F5FBF"/>
+              </a:solidFill>
+              <a:latin typeface="Arial" pitchFamily="34" charset="0"/>
+              <a:ea typeface="Arial" pitchFamily="34" charset="-122"/>
+              <a:cs typeface="Arial" pitchFamily="34" charset="-120"/>
+            </a:endParaRPr>
           </a:p>
         </p:txBody>
       </p:sp>
@@ -9388,7 +10438,7 @@
           </a:xfrm>
           <a:prstGeom prst="roundRect">
             <a:avLst>
-              <a:gd name="adj" fmla="val 1572"/>
+              <a:gd name="adj" fmla="val 2171"/>
             </a:avLst>
           </a:prstGeom>
           <a:solidFill>
@@ -9420,12 +10470,12 @@
           <a:p>
             <a:pPr algn="l" indent="0" marL="0">
               <a:lnSpc>
-                <a:spcPts val="1200"/>
+                <a:spcPct val="100000"/>
               </a:lnSpc>
               <a:buNone/>
             </a:pPr>
             <a:r>
-              <a:rPr lang="en-US" sz="1000" b="1" dirty="0">
+              <a:rPr lang="en-US" sz="1000" b="1" dirty="0" kern="400000">
                 <a:solidFill>
                   <a:srgbClr val="1F5FBF"/>
                 </a:solidFill>
@@ -9435,7 +10485,14 @@
               </a:rPr>
               <a:t>01</a:t>
             </a:r>
-            <a:endParaRPr lang="en-US" sz="1000" dirty="0"/>
+            <a:endParaRPr lang="en-US" sz="1000" b="1" dirty="0" kern="400000">
+              <a:solidFill>
+                <a:srgbClr val="1F5FBF"/>
+              </a:solidFill>
+              <a:latin typeface="Arial" pitchFamily="34" charset="0"/>
+              <a:ea typeface="Arial" pitchFamily="34" charset="-122"/>
+              <a:cs typeface="Arial" pitchFamily="34" charset="-120"/>
+            </a:endParaRPr>
           </a:p>
         </p:txBody>
       </p:sp>
@@ -9452,7 +10509,7 @@
           </a:xfrm>
           <a:prstGeom prst="roundRect">
             <a:avLst>
-              <a:gd name="adj" fmla="val 312500"/>
+              <a:gd name="adj" fmla="val 50000"/>
             </a:avLst>
           </a:prstGeom>
           <a:solidFill>
@@ -9484,12 +10541,12 @@
           <a:p>
             <a:pPr algn="ctr" indent="0" marL="0">
               <a:lnSpc>
-                <a:spcPts val="1080"/>
+                <a:spcPct val="100000"/>
               </a:lnSpc>
               <a:buNone/>
             </a:pPr>
             <a:r>
-              <a:rPr lang="en-US" sz="900" b="1" dirty="0">
+              <a:rPr lang="en-US" sz="900" b="1" dirty="0" kern="400000">
                 <a:solidFill>
                   <a:srgbClr val="FFFFFF"/>
                 </a:solidFill>
@@ -9499,7 +10556,14 @@
               </a:rPr>
               <a:t>Confirmed</a:t>
             </a:r>
-            <a:endParaRPr lang="en-US" sz="900" dirty="0"/>
+            <a:endParaRPr lang="en-US" sz="900" b="1" dirty="0" kern="400000">
+              <a:solidFill>
+                <a:srgbClr val="FFFFFF"/>
+              </a:solidFill>
+              <a:latin typeface="Arial" pitchFamily="34" charset="0"/>
+              <a:ea typeface="Arial" pitchFamily="34" charset="-122"/>
+              <a:cs typeface="Arial" pitchFamily="34" charset="-120"/>
+            </a:endParaRPr>
           </a:p>
         </p:txBody>
       </p:sp>
@@ -9526,12 +10590,12 @@
           <a:p>
             <a:pPr algn="l" indent="0" marL="0">
               <a:lnSpc>
-                <a:spcPts val="1680"/>
+                <a:spcPct val="100000"/>
               </a:lnSpc>
               <a:buNone/>
             </a:pPr>
             <a:r>
-              <a:rPr lang="en-US" sz="1400" b="1" dirty="0">
+              <a:rPr lang="en-US" sz="1400" b="1" dirty="0" kern="400000">
                 <a:solidFill>
                   <a:srgbClr val="0B1F3A"/>
                 </a:solidFill>
@@ -9541,7 +10605,14 @@
               </a:rPr>
               <a:t>Text fits</a:t>
             </a:r>
-            <a:endParaRPr lang="en-US" sz="1400" dirty="0"/>
+            <a:endParaRPr lang="en-US" sz="1400" b="1" dirty="0" kern="400000">
+              <a:solidFill>
+                <a:srgbClr val="0B1F3A"/>
+              </a:solidFill>
+              <a:latin typeface="Arial" pitchFamily="34" charset="0"/>
+              <a:ea typeface="Arial" pitchFamily="34" charset="-122"/>
+              <a:cs typeface="Arial" pitchFamily="34" charset="-120"/>
+            </a:endParaRPr>
           </a:p>
         </p:txBody>
       </p:sp>
@@ -9568,12 +10639,12 @@
           <a:p>
             <a:pPr algn="l" indent="0" marL="0">
               <a:lnSpc>
-                <a:spcPts val="1200"/>
+                <a:spcPct val="100000"/>
               </a:lnSpc>
               <a:buNone/>
             </a:pPr>
             <a:r>
-              <a:rPr lang="en-US" sz="1000" dirty="0">
+              <a:rPr lang="en-US" sz="1000" dirty="0" kern="400000">
                 <a:solidFill>
                   <a:srgbClr val="0B1F3A"/>
                 </a:solidFill>
@@ -9583,7 +10654,14 @@
               </a:rPr>
               <a:t>98.6% identical line breaks and no overflow, so what fits here fits in PowerPoint</a:t>
             </a:r>
-            <a:endParaRPr lang="en-US" sz="1000" dirty="0"/>
+            <a:endParaRPr lang="en-US" sz="1000" dirty="0" kern="400000">
+              <a:solidFill>
+                <a:srgbClr val="0B1F3A"/>
+              </a:solidFill>
+              <a:latin typeface="Arial" pitchFamily="34" charset="0"/>
+              <a:ea typeface="Arial" pitchFamily="34" charset="-122"/>
+              <a:cs typeface="Arial" pitchFamily="34" charset="-120"/>
+            </a:endParaRPr>
           </a:p>
         </p:txBody>
       </p:sp>
@@ -9596,11 +10674,25 @@
         <p:spPr>
           <a:xfrm>
             <a:off x="731520" y="4142232"/>
-            <a:ext cx="2160956" cy="91"/>
-          </a:xfrm>
-          <a:prstGeom prst="line">
-            <a:avLst/>
-          </a:prstGeom>
+            <a:ext cx="2160956" cy="0"/>
+          </a:xfrm>
+          <a:custGeom>
+            <a:avLst/>
+            <a:gdLst/>
+            <a:ahLst/>
+            <a:cxnLst/>
+            <a:rect l="0" t="0" r="r" b="b"/>
+            <a:pathLst>
+              <a:path w="2160956" h="0" fill="none">
+                <a:moveTo>
+                  <a:pt x="0" y="0"/>
+                </a:moveTo>
+                <a:lnTo>
+                  <a:pt x="2160956" y="0"/>
+                </a:lnTo>
+              </a:path>
+            </a:pathLst>
+          </a:custGeom>
           <a:noFill/>
           <a:ln w="6350">
             <a:solidFill>
@@ -9633,12 +10725,12 @@
           <a:p>
             <a:pPr algn="l" indent="0" marL="0">
               <a:lnSpc>
-                <a:spcPts val="1200"/>
+                <a:spcPct val="100000"/>
               </a:lnSpc>
               <a:buNone/>
             </a:pPr>
             <a:r>
-              <a:rPr lang="en-US" sz="1000" i="1" dirty="0">
+              <a:rPr lang="en-US" sz="1000" i="1" dirty="0" kern="400000">
                 <a:solidFill>
                   <a:srgbClr val="5B6B7F"/>
                 </a:solidFill>
@@ -9648,7 +10740,14 @@
               </a:rPr>
               <a:t>PowerPoint calibration, 144 strings</a:t>
             </a:r>
-            <a:endParaRPr lang="en-US" sz="1000" dirty="0"/>
+            <a:endParaRPr lang="en-US" sz="1000" i="1" dirty="0" kern="400000">
+              <a:solidFill>
+                <a:srgbClr val="5B6B7F"/>
+              </a:solidFill>
+              <a:latin typeface="Arial" pitchFamily="34" charset="0"/>
+              <a:ea typeface="Arial" pitchFamily="34" charset="-122"/>
+              <a:cs typeface="Arial" pitchFamily="34" charset="-120"/>
+            </a:endParaRPr>
           </a:p>
         </p:txBody>
       </p:sp>
@@ -9703,7 +10802,7 @@
           </a:xfrm>
           <a:prstGeom prst="roundRect">
             <a:avLst>
-              <a:gd name="adj" fmla="val 1572"/>
+              <a:gd name="adj" fmla="val 2171"/>
             </a:avLst>
           </a:prstGeom>
           <a:solidFill>
@@ -9735,12 +10834,12 @@
           <a:p>
             <a:pPr algn="l" indent="0" marL="0">
               <a:lnSpc>
-                <a:spcPts val="1200"/>
+                <a:spcPct val="100000"/>
               </a:lnSpc>
               <a:buNone/>
             </a:pPr>
             <a:r>
-              <a:rPr lang="en-US" sz="1000" b="1" dirty="0">
+              <a:rPr lang="en-US" sz="1000" b="1" dirty="0" kern="400000">
                 <a:solidFill>
                   <a:srgbClr val="1F5FBF"/>
                 </a:solidFill>
@@ -9750,7 +10849,14 @@
               </a:rPr>
               <a:t>02</a:t>
             </a:r>
-            <a:endParaRPr lang="en-US" sz="1000" dirty="0"/>
+            <a:endParaRPr lang="en-US" sz="1000" b="1" dirty="0" kern="400000">
+              <a:solidFill>
+                <a:srgbClr val="1F5FBF"/>
+              </a:solidFill>
+              <a:latin typeface="Arial" pitchFamily="34" charset="0"/>
+              <a:ea typeface="Arial" pitchFamily="34" charset="-122"/>
+              <a:cs typeface="Arial" pitchFamily="34" charset="-120"/>
+            </a:endParaRPr>
           </a:p>
         </p:txBody>
       </p:sp>
@@ -9767,7 +10873,7 @@
           </a:xfrm>
           <a:prstGeom prst="roundRect">
             <a:avLst>
-              <a:gd name="adj" fmla="val 312500"/>
+              <a:gd name="adj" fmla="val 50000"/>
             </a:avLst>
           </a:prstGeom>
           <a:solidFill>
@@ -9799,12 +10905,12 @@
           <a:p>
             <a:pPr algn="ctr" indent="0" marL="0">
               <a:lnSpc>
-                <a:spcPts val="1080"/>
+                <a:spcPct val="100000"/>
               </a:lnSpc>
               <a:buNone/>
             </a:pPr>
             <a:r>
-              <a:rPr lang="en-US" sz="900" b="1" dirty="0">
+              <a:rPr lang="en-US" sz="900" b="1" dirty="0" kern="400000">
                 <a:solidFill>
                   <a:srgbClr val="FFFFFF"/>
                 </a:solidFill>
@@ -9814,7 +10920,14 @@
               </a:rPr>
               <a:t>Confirmed</a:t>
             </a:r>
-            <a:endParaRPr lang="en-US" sz="900" dirty="0"/>
+            <a:endParaRPr lang="en-US" sz="900" b="1" dirty="0" kern="400000">
+              <a:solidFill>
+                <a:srgbClr val="FFFFFF"/>
+              </a:solidFill>
+              <a:latin typeface="Arial" pitchFamily="34" charset="0"/>
+              <a:ea typeface="Arial" pitchFamily="34" charset="-122"/>
+              <a:cs typeface="Arial" pitchFamily="34" charset="-120"/>
+            </a:endParaRPr>
           </a:p>
         </p:txBody>
       </p:sp>
@@ -9841,12 +10954,12 @@
           <a:p>
             <a:pPr algn="l" indent="0" marL="0">
               <a:lnSpc>
-                <a:spcPts val="1680"/>
+                <a:spcPct val="100000"/>
               </a:lnSpc>
               <a:buNone/>
             </a:pPr>
             <a:r>
-              <a:rPr lang="en-US" sz="1400" b="1" dirty="0">
+              <a:rPr lang="en-US" sz="1400" b="1" dirty="0" kern="400000">
                 <a:solidFill>
                   <a:srgbClr val="0B1F3A"/>
                 </a:solidFill>
@@ -9856,7 +10969,14 @@
               </a:rPr>
               <a:t>Every number has a source</a:t>
             </a:r>
-            <a:endParaRPr lang="en-US" sz="1400" dirty="0"/>
+            <a:endParaRPr lang="en-US" sz="1400" b="1" dirty="0" kern="400000">
+              <a:solidFill>
+                <a:srgbClr val="0B1F3A"/>
+              </a:solidFill>
+              <a:latin typeface="Arial" pitchFamily="34" charset="0"/>
+              <a:ea typeface="Arial" pitchFamily="34" charset="-122"/>
+              <a:cs typeface="Arial" pitchFamily="34" charset="-120"/>
+            </a:endParaRPr>
           </a:p>
         </p:txBody>
       </p:sp>
@@ -9883,12 +11003,12 @@
           <a:p>
             <a:pPr algn="l" indent="0" marL="0">
               <a:lnSpc>
-                <a:spcPts val="1200"/>
+                <a:spcPct val="100000"/>
               </a:lnSpc>
               <a:buNone/>
             </a:pPr>
             <a:r>
-              <a:rPr lang="en-US" sz="1000" dirty="0">
+              <a:rPr lang="en-US" sz="1000" dirty="0" kern="400000">
                 <a:solidFill>
                   <a:srgbClr val="0B1F3A"/>
                 </a:solidFill>
@@ -9898,7 +11018,14 @@
               </a:rPr>
               <a:t>Slides that show numbers without a source are flagged before delivery</a:t>
             </a:r>
-            <a:endParaRPr lang="en-US" sz="1000" dirty="0"/>
+            <a:endParaRPr lang="en-US" sz="1000" dirty="0" kern="400000">
+              <a:solidFill>
+                <a:srgbClr val="0B1F3A"/>
+              </a:solidFill>
+              <a:latin typeface="Arial" pitchFamily="34" charset="0"/>
+              <a:ea typeface="Arial" pitchFamily="34" charset="-122"/>
+              <a:cs typeface="Arial" pitchFamily="34" charset="-120"/>
+            </a:endParaRPr>
           </a:p>
         </p:txBody>
       </p:sp>
@@ -9911,11 +11038,25 @@
         <p:spPr>
           <a:xfrm>
             <a:off x="3587420" y="4142232"/>
-            <a:ext cx="2160956" cy="91"/>
-          </a:xfrm>
-          <a:prstGeom prst="line">
-            <a:avLst/>
-          </a:prstGeom>
+            <a:ext cx="2160956" cy="0"/>
+          </a:xfrm>
+          <a:custGeom>
+            <a:avLst/>
+            <a:gdLst/>
+            <a:ahLst/>
+            <a:cxnLst/>
+            <a:rect l="0" t="0" r="r" b="b"/>
+            <a:pathLst>
+              <a:path w="2160956" h="0" fill="none">
+                <a:moveTo>
+                  <a:pt x="0" y="0"/>
+                </a:moveTo>
+                <a:lnTo>
+                  <a:pt x="2160956" y="0"/>
+                </a:lnTo>
+              </a:path>
+            </a:pathLst>
+          </a:custGeom>
           <a:noFill/>
           <a:ln w="6350">
             <a:solidFill>
@@ -9948,12 +11089,12 @@
           <a:p>
             <a:pPr algn="l" indent="0" marL="0">
               <a:lnSpc>
-                <a:spcPts val="1200"/>
+                <a:spcPct val="100000"/>
               </a:lnSpc>
               <a:buNone/>
             </a:pPr>
             <a:r>
-              <a:rPr lang="en-US" sz="1000" i="1" dirty="0">
+              <a:rPr lang="en-US" sz="1000" i="1" dirty="0" kern="400000">
                 <a:solidFill>
                   <a:srgbClr val="5B6B7F"/>
                 </a:solidFill>
@@ -9963,7 +11104,14 @@
               </a:rPr>
               <a:t>The deck's source list</a:t>
             </a:r>
-            <a:endParaRPr lang="en-US" sz="1000" dirty="0"/>
+            <a:endParaRPr lang="en-US" sz="1000" i="1" dirty="0" kern="400000">
+              <a:solidFill>
+                <a:srgbClr val="5B6B7F"/>
+              </a:solidFill>
+              <a:latin typeface="Arial" pitchFamily="34" charset="0"/>
+              <a:ea typeface="Arial" pitchFamily="34" charset="-122"/>
+              <a:cs typeface="Arial" pitchFamily="34" charset="-120"/>
+            </a:endParaRPr>
           </a:p>
         </p:txBody>
       </p:sp>
@@ -10018,7 +11166,7 @@
           </a:xfrm>
           <a:prstGeom prst="roundRect">
             <a:avLst>
-              <a:gd name="adj" fmla="val 1572"/>
+              <a:gd name="adj" fmla="val 2171"/>
             </a:avLst>
           </a:prstGeom>
           <a:solidFill>
@@ -10050,12 +11198,12 @@
           <a:p>
             <a:pPr algn="l" indent="0" marL="0">
               <a:lnSpc>
-                <a:spcPts val="1200"/>
+                <a:spcPct val="100000"/>
               </a:lnSpc>
               <a:buNone/>
             </a:pPr>
             <a:r>
-              <a:rPr lang="en-US" sz="1000" b="1" dirty="0">
+              <a:rPr lang="en-US" sz="1000" b="1" dirty="0" kern="400000">
                 <a:solidFill>
                   <a:srgbClr val="1F5FBF"/>
                 </a:solidFill>
@@ -10065,7 +11213,14 @@
               </a:rPr>
               <a:t>03</a:t>
             </a:r>
-            <a:endParaRPr lang="en-US" sz="1000" dirty="0"/>
+            <a:endParaRPr lang="en-US" sz="1000" b="1" dirty="0" kern="400000">
+              <a:solidFill>
+                <a:srgbClr val="1F5FBF"/>
+              </a:solidFill>
+              <a:latin typeface="Arial" pitchFamily="34" charset="0"/>
+              <a:ea typeface="Arial" pitchFamily="34" charset="-122"/>
+              <a:cs typeface="Arial" pitchFamily="34" charset="-120"/>
+            </a:endParaRPr>
           </a:p>
         </p:txBody>
       </p:sp>
@@ -10082,7 +11237,7 @@
           </a:xfrm>
           <a:prstGeom prst="roundRect">
             <a:avLst>
-              <a:gd name="adj" fmla="val 312500"/>
+              <a:gd name="adj" fmla="val 50000"/>
             </a:avLst>
           </a:prstGeom>
           <a:solidFill>
@@ -10114,12 +11269,12 @@
           <a:p>
             <a:pPr algn="ctr" indent="0" marL="0">
               <a:lnSpc>
-                <a:spcPts val="1080"/>
+                <a:spcPct val="100000"/>
               </a:lnSpc>
               <a:buNone/>
             </a:pPr>
             <a:r>
-              <a:rPr lang="en-US" sz="900" b="1" dirty="0">
+              <a:rPr lang="en-US" sz="900" b="1" dirty="0" kern="400000">
                 <a:solidFill>
                   <a:srgbClr val="FFFFFF"/>
                 </a:solidFill>
@@ -10129,7 +11284,14 @@
               </a:rPr>
               <a:t>Confirmed</a:t>
             </a:r>
-            <a:endParaRPr lang="en-US" sz="900" dirty="0"/>
+            <a:endParaRPr lang="en-US" sz="900" b="1" dirty="0" kern="400000">
+              <a:solidFill>
+                <a:srgbClr val="FFFFFF"/>
+              </a:solidFill>
+              <a:latin typeface="Arial" pitchFamily="34" charset="0"/>
+              <a:ea typeface="Arial" pitchFamily="34" charset="-122"/>
+              <a:cs typeface="Arial" pitchFamily="34" charset="-120"/>
+            </a:endParaRPr>
           </a:p>
         </p:txBody>
       </p:sp>
@@ -10156,12 +11318,12 @@
           <a:p>
             <a:pPr algn="l" indent="0" marL="0">
               <a:lnSpc>
-                <a:spcPts val="1680"/>
+                <a:spcPct val="100000"/>
               </a:lnSpc>
               <a:buNone/>
             </a:pPr>
             <a:r>
-              <a:rPr lang="en-US" sz="1400" b="1" dirty="0">
+              <a:rPr lang="en-US" sz="1400" b="1" dirty="0" kern="400000">
                 <a:solidFill>
                   <a:srgbClr val="0B1F3A"/>
                 </a:solidFill>
@@ -10171,7 +11333,14 @@
               </a:rPr>
               <a:t>Readable and accessible</a:t>
             </a:r>
-            <a:endParaRPr lang="en-US" sz="1400" dirty="0"/>
+            <a:endParaRPr lang="en-US" sz="1400" b="1" dirty="0" kern="400000">
+              <a:solidFill>
+                <a:srgbClr val="0B1F3A"/>
+              </a:solidFill>
+              <a:latin typeface="Arial" pitchFamily="34" charset="0"/>
+              <a:ea typeface="Arial" pitchFamily="34" charset="-122"/>
+              <a:cs typeface="Arial" pitchFamily="34" charset="-120"/>
+            </a:endParaRPr>
           </a:p>
         </p:txBody>
       </p:sp>
@@ -10198,12 +11367,12 @@
           <a:p>
             <a:pPr algn="l" indent="0" marL="0">
               <a:lnSpc>
-                <a:spcPts val="1200"/>
+                <a:spcPct val="100000"/>
               </a:lnSpc>
               <a:buNone/>
             </a:pPr>
             <a:r>
-              <a:rPr lang="en-US" sz="1000" dirty="0">
+              <a:rPr lang="en-US" sz="1000" dirty="0" kern="400000">
                 <a:solidFill>
                   <a:srgbClr val="0B1F3A"/>
                 </a:solidFill>
@@ -10213,7 +11382,14 @@
               </a:rPr>
               <a:t>Colour contrast, slide titles and alt text are checked in PowerPoint and PDF</a:t>
             </a:r>
-            <a:endParaRPr lang="en-US" sz="1000" dirty="0"/>
+            <a:endParaRPr lang="en-US" sz="1000" dirty="0" kern="400000">
+              <a:solidFill>
+                <a:srgbClr val="0B1F3A"/>
+              </a:solidFill>
+              <a:latin typeface="Arial" pitchFamily="34" charset="0"/>
+              <a:ea typeface="Arial" pitchFamily="34" charset="-122"/>
+              <a:cs typeface="Arial" pitchFamily="34" charset="-120"/>
+            </a:endParaRPr>
           </a:p>
         </p:txBody>
       </p:sp>
@@ -10226,11 +11402,25 @@
         <p:spPr>
           <a:xfrm>
             <a:off x="6443320" y="4142232"/>
-            <a:ext cx="2160956" cy="91"/>
-          </a:xfrm>
-          <a:prstGeom prst="line">
-            <a:avLst/>
-          </a:prstGeom>
+            <a:ext cx="2160956" cy="0"/>
+          </a:xfrm>
+          <a:custGeom>
+            <a:avLst/>
+            <a:gdLst/>
+            <a:ahLst/>
+            <a:cxnLst/>
+            <a:rect l="0" t="0" r="r" b="b"/>
+            <a:pathLst>
+              <a:path w="2160956" h="0" fill="none">
+                <a:moveTo>
+                  <a:pt x="0" y="0"/>
+                </a:moveTo>
+                <a:lnTo>
+                  <a:pt x="2160956" y="0"/>
+                </a:lnTo>
+              </a:path>
+            </a:pathLst>
+          </a:custGeom>
           <a:noFill/>
           <a:ln w="6350">
             <a:solidFill>
@@ -10263,12 +11453,12 @@
           <a:p>
             <a:pPr algn="l" indent="0" marL="0">
               <a:lnSpc>
-                <a:spcPts val="1200"/>
+                <a:spcPct val="100000"/>
               </a:lnSpc>
               <a:buNone/>
             </a:pPr>
             <a:r>
-              <a:rPr lang="en-US" sz="1000" i="1" dirty="0">
+              <a:rPr lang="en-US" sz="1000" i="1" dirty="0" kern="400000">
                 <a:solidFill>
                   <a:srgbClr val="5B6B7F"/>
                 </a:solidFill>
@@ -10278,7 +11468,14 @@
               </a:rPr>
               <a:t>Contrast and accessibility checks</a:t>
             </a:r>
-            <a:endParaRPr lang="en-US" sz="1000" dirty="0"/>
+            <a:endParaRPr lang="en-US" sz="1000" i="1" dirty="0" kern="400000">
+              <a:solidFill>
+                <a:srgbClr val="5B6B7F"/>
+              </a:solidFill>
+              <a:latin typeface="Arial" pitchFamily="34" charset="0"/>
+              <a:ea typeface="Arial" pitchFamily="34" charset="-122"/>
+              <a:cs typeface="Arial" pitchFamily="34" charset="-120"/>
+            </a:endParaRPr>
           </a:p>
         </p:txBody>
       </p:sp>
@@ -10333,7 +11530,7 @@
           </a:xfrm>
           <a:prstGeom prst="roundRect">
             <a:avLst>
-              <a:gd name="adj" fmla="val 1572"/>
+              <a:gd name="adj" fmla="val 2171"/>
             </a:avLst>
           </a:prstGeom>
           <a:solidFill>
@@ -10365,12 +11562,12 @@
           <a:p>
             <a:pPr algn="l" indent="0" marL="0">
               <a:lnSpc>
-                <a:spcPts val="1200"/>
+                <a:spcPct val="100000"/>
               </a:lnSpc>
               <a:buNone/>
             </a:pPr>
             <a:r>
-              <a:rPr lang="en-US" sz="1000" b="1" dirty="0">
+              <a:rPr lang="en-US" sz="1000" b="1" dirty="0" kern="400000">
                 <a:solidFill>
                   <a:srgbClr val="1F5FBF"/>
                 </a:solidFill>
@@ -10380,7 +11577,14 @@
               </a:rPr>
               <a:t>04</a:t>
             </a:r>
-            <a:endParaRPr lang="en-US" sz="1000" dirty="0"/>
+            <a:endParaRPr lang="en-US" sz="1000" b="1" dirty="0" kern="400000">
+              <a:solidFill>
+                <a:srgbClr val="1F5FBF"/>
+              </a:solidFill>
+              <a:latin typeface="Arial" pitchFamily="34" charset="0"/>
+              <a:ea typeface="Arial" pitchFamily="34" charset="-122"/>
+              <a:cs typeface="Arial" pitchFamily="34" charset="-120"/>
+            </a:endParaRPr>
           </a:p>
         </p:txBody>
       </p:sp>
@@ -10397,7 +11601,7 @@
           </a:xfrm>
           <a:prstGeom prst="roundRect">
             <a:avLst>
-              <a:gd name="adj" fmla="val 312500"/>
+              <a:gd name="adj" fmla="val 50000"/>
             </a:avLst>
           </a:prstGeom>
           <a:solidFill>
@@ -10429,12 +11633,12 @@
           <a:p>
             <a:pPr algn="ctr" indent="0" marL="0">
               <a:lnSpc>
-                <a:spcPts val="1080"/>
+                <a:spcPct val="100000"/>
               </a:lnSpc>
               <a:buNone/>
             </a:pPr>
             <a:r>
-              <a:rPr lang="en-US" sz="900" b="1" dirty="0">
+              <a:rPr lang="en-US" sz="900" b="1" dirty="0" kern="400000">
                 <a:solidFill>
                   <a:srgbClr val="111111"/>
                 </a:solidFill>
@@ -10444,7 +11648,14 @@
               </a:rPr>
               <a:t>Your call</a:t>
             </a:r>
-            <a:endParaRPr lang="en-US" sz="900" dirty="0"/>
+            <a:endParaRPr lang="en-US" sz="900" b="1" dirty="0" kern="400000">
+              <a:solidFill>
+                <a:srgbClr val="111111"/>
+              </a:solidFill>
+              <a:latin typeface="Arial" pitchFamily="34" charset="0"/>
+              <a:ea typeface="Arial" pitchFamily="34" charset="-122"/>
+              <a:cs typeface="Arial" pitchFamily="34" charset="-120"/>
+            </a:endParaRPr>
           </a:p>
         </p:txBody>
       </p:sp>
@@ -10471,12 +11682,12 @@
           <a:p>
             <a:pPr algn="l" indent="0" marL="0">
               <a:lnSpc>
-                <a:spcPts val="1680"/>
+                <a:spcPct val="100000"/>
               </a:lnSpc>
               <a:buNone/>
             </a:pPr>
             <a:r>
-              <a:rPr lang="en-US" sz="1400" b="1" dirty="0">
+              <a:rPr lang="en-US" sz="1400" b="1" dirty="0" kern="400000">
                 <a:solidFill>
                   <a:srgbClr val="0B1F3A"/>
                 </a:solidFill>
@@ -10486,7 +11697,14 @@
               </a:rPr>
               <a:t>Partner-style review</a:t>
             </a:r>
-            <a:endParaRPr lang="en-US" sz="1400" dirty="0"/>
+            <a:endParaRPr lang="en-US" sz="1400" b="1" dirty="0" kern="400000">
+              <a:solidFill>
+                <a:srgbClr val="0B1F3A"/>
+              </a:solidFill>
+              <a:latin typeface="Arial" pitchFamily="34" charset="0"/>
+              <a:ea typeface="Arial" pitchFamily="34" charset="-122"/>
+              <a:cs typeface="Arial" pitchFamily="34" charset="-120"/>
+            </a:endParaRPr>
           </a:p>
         </p:txBody>
       </p:sp>
@@ -10513,12 +11731,12 @@
           <a:p>
             <a:pPr algn="l" indent="0" marL="0">
               <a:lnSpc>
-                <a:spcPts val="1200"/>
+                <a:spcPct val="100000"/>
               </a:lnSpc>
               <a:buNone/>
             </a:pPr>
             <a:r>
-              <a:rPr lang="en-US" sz="1000" dirty="0">
+              <a:rPr lang="en-US" sz="1000" dirty="0" kern="400000">
                 <a:solidFill>
                   <a:srgbClr val="0B1F3A"/>
                 </a:solidFill>
@@ -10528,7 +11746,14 @@
               </a:rPr>
               <a:t>The assistant reviews like a partner; you give the final sign-off</a:t>
             </a:r>
-            <a:endParaRPr lang="en-US" sz="1000" dirty="0"/>
+            <a:endParaRPr lang="en-US" sz="1000" dirty="0" kern="400000">
+              <a:solidFill>
+                <a:srgbClr val="0B1F3A"/>
+              </a:solidFill>
+              <a:latin typeface="Arial" pitchFamily="34" charset="0"/>
+              <a:ea typeface="Arial" pitchFamily="34" charset="-122"/>
+              <a:cs typeface="Arial" pitchFamily="34" charset="-120"/>
+            </a:endParaRPr>
           </a:p>
         </p:txBody>
       </p:sp>
@@ -10541,11 +11766,25 @@
         <p:spPr>
           <a:xfrm>
             <a:off x="9299219" y="4142232"/>
-            <a:ext cx="2160956" cy="91"/>
-          </a:xfrm>
-          <a:prstGeom prst="line">
-            <a:avLst/>
-          </a:prstGeom>
+            <a:ext cx="2160956" cy="0"/>
+          </a:xfrm>
+          <a:custGeom>
+            <a:avLst/>
+            <a:gdLst/>
+            <a:ahLst/>
+            <a:cxnLst/>
+            <a:rect l="0" t="0" r="r" b="b"/>
+            <a:pathLst>
+              <a:path w="2160956" h="0" fill="none">
+                <a:moveTo>
+                  <a:pt x="0" y="0"/>
+                </a:moveTo>
+                <a:lnTo>
+                  <a:pt x="2160956" y="0"/>
+                </a:lnTo>
+              </a:path>
+            </a:pathLst>
+          </a:custGeom>
           <a:noFill/>
           <a:ln w="6350">
             <a:solidFill>
@@ -10578,12 +11817,12 @@
           <a:p>
             <a:pPr algn="l" indent="0" marL="0">
               <a:lnSpc>
-                <a:spcPts val="1200"/>
+                <a:spcPct val="100000"/>
               </a:lnSpc>
               <a:buNone/>
             </a:pPr>
             <a:r>
-              <a:rPr lang="en-US" sz="1000" i="1" dirty="0">
+              <a:rPr lang="en-US" sz="1000" i="1" dirty="0" kern="400000">
                 <a:solidFill>
                   <a:srgbClr val="5B6B7F"/>
                 </a:solidFill>
@@ -10593,7 +11832,14 @@
               </a:rPr>
               <a:t>The review checklist</a:t>
             </a:r>
-            <a:endParaRPr lang="en-US" sz="1000" dirty="0"/>
+            <a:endParaRPr lang="en-US" sz="1000" i="1" dirty="0" kern="400000">
+              <a:solidFill>
+                <a:srgbClr val="5B6B7F"/>
+              </a:solidFill>
+              <a:latin typeface="Arial" pitchFamily="34" charset="0"/>
+              <a:ea typeface="Arial" pitchFamily="34" charset="-122"/>
+              <a:cs typeface="Arial" pitchFamily="34" charset="-120"/>
+            </a:endParaRPr>
           </a:p>
         </p:txBody>
       </p:sp>
@@ -10640,12 +11886,12 @@
           <a:p>
             <a:pPr algn="l" indent="0" marL="0">
               <a:lnSpc>
-                <a:spcPts val="1680"/>
+                <a:spcPct val="100000"/>
               </a:lnSpc>
               <a:buNone/>
             </a:pPr>
             <a:r>
-              <a:rPr lang="en-US" sz="1400" b="1" dirty="0">
+              <a:rPr lang="en-US" sz="1400" b="1" dirty="0" kern="400000">
                 <a:solidFill>
                   <a:srgbClr val="FFFFFF"/>
                 </a:solidFill>
@@ -10657,12 +11903,12 @@
             </a:r>
             <a:pPr algn="l" indent="0" marL="0">
               <a:lnSpc>
-                <a:spcPts val="1680"/>
+                <a:spcPct val="100000"/>
               </a:lnSpc>
               <a:buNone/>
             </a:pPr>
             <a:r>
-              <a:rPr lang="en-US" sz="1400" dirty="0">
+              <a:rPr lang="en-US" sz="1400" dirty="0" kern="400000">
                 <a:solidFill>
                   <a:srgbClr val="FFFFFF"/>
                 </a:solidFill>
@@ -10672,7 +11918,14 @@
               </a:rPr>
               <a:t>You open a deck that is ready to discuss, not ready to fix</a:t>
             </a:r>
-            <a:endParaRPr lang="en-US" sz="1400" dirty="0"/>
+            <a:endParaRPr lang="en-US" sz="1400" dirty="0" kern="400000">
+              <a:solidFill>
+                <a:srgbClr val="FFFFFF"/>
+              </a:solidFill>
+              <a:latin typeface="Arial" pitchFamily="34" charset="0"/>
+              <a:ea typeface="Arial" pitchFamily="34" charset="-122"/>
+              <a:cs typeface="Arial" pitchFamily="34" charset="-120"/>
+            </a:endParaRPr>
           </a:p>
         </p:txBody>
       </p:sp>
@@ -10699,12 +11952,12 @@
           <a:p>
             <a:pPr algn="l" indent="0" marL="0">
               <a:lnSpc>
-                <a:spcPts val="1200"/>
+                <a:spcPct val="100000"/>
               </a:lnSpc>
               <a:buNone/>
             </a:pPr>
             <a:r>
-              <a:rPr lang="en-US" sz="1000" b="1" dirty="0">
+              <a:rPr lang="en-US" sz="1000" b="1" dirty="0" kern="400000">
                 <a:solidFill>
                   <a:srgbClr val="5B6B7F"/>
                 </a:solidFill>
@@ -10716,12 +11969,12 @@
             </a:r>
             <a:pPr algn="l" indent="0" marL="0">
               <a:lnSpc>
-                <a:spcPts val="1200"/>
+                <a:spcPct val="100000"/>
               </a:lnSpc>
               <a:buNone/>
             </a:pPr>
             <a:r>
-              <a:rPr lang="en-US" sz="1000" dirty="0">
+              <a:rPr lang="en-US" sz="1000" dirty="0" kern="400000">
                 <a:solidFill>
                   <a:srgbClr val="5B6B7F"/>
                 </a:solidFill>
@@ -10731,7 +11984,14 @@
               </a:rPr>
               <a:t>The data behind a slide is missing — then SlideCraft flags the gap instead of inventing it</a:t>
             </a:r>
-            <a:endParaRPr lang="en-US" sz="1000" dirty="0"/>
+            <a:endParaRPr lang="en-US" sz="1000" dirty="0" kern="400000">
+              <a:solidFill>
+                <a:srgbClr val="5B6B7F"/>
+              </a:solidFill>
+              <a:latin typeface="Arial" pitchFamily="34" charset="0"/>
+              <a:ea typeface="Arial" pitchFamily="34" charset="-122"/>
+              <a:cs typeface="Arial" pitchFamily="34" charset="-120"/>
+            </a:endParaRPr>
           </a:p>
         </p:txBody>
       </p:sp>
@@ -10758,12 +12018,12 @@
           <a:p>
             <a:pPr algn="l" indent="0" marL="0">
               <a:lnSpc>
-                <a:spcPts val="960"/>
+                <a:spcPct val="100000"/>
               </a:lnSpc>
               <a:buNone/>
             </a:pPr>
             <a:r>
-              <a:rPr lang="en-US" sz="800" dirty="0">
+              <a:rPr lang="en-US" sz="800" dirty="0" kern="400000">
                 <a:solidFill>
                   <a:srgbClr val="5B6B7F"/>
                 </a:solidFill>
@@ -10775,12 +12035,12 @@
             </a:r>
             <a:pPr algn="l" indent="0" marL="0">
               <a:lnSpc>
-                <a:spcPts val="960"/>
+                <a:spcPct val="100000"/>
               </a:lnSpc>
               <a:buNone/>
             </a:pPr>
             <a:r>
-              <a:rPr lang="en-US" sz="800" u="sng" dirty="0">
+              <a:rPr lang="en-US" sz="800" u="sng" dirty="0" kern="400000">
                 <a:solidFill>
                   <a:srgbClr val="5B6B7F"/>
                 </a:solidFill>
@@ -10799,12 +12059,12 @@
             </a:r>
             <a:pPr algn="l" indent="0" marL="0">
               <a:lnSpc>
-                <a:spcPts val="960"/>
+                <a:spcPct val="100000"/>
               </a:lnSpc>
               <a:buNone/>
             </a:pPr>
             <a:r>
-              <a:rPr lang="en-US" sz="800" dirty="0">
+              <a:rPr lang="en-US" sz="800" dirty="0" kern="400000">
                 <a:solidFill>
                   <a:srgbClr val="5B6B7F"/>
                 </a:solidFill>
@@ -10816,12 +12076,12 @@
             </a:r>
             <a:pPr algn="l" indent="0" marL="0">
               <a:lnSpc>
-                <a:spcPts val="960"/>
+                <a:spcPct val="100000"/>
               </a:lnSpc>
               <a:buNone/>
             </a:pPr>
             <a:r>
-              <a:rPr lang="en-US" sz="800" u="sng" dirty="0">
+              <a:rPr lang="en-US" sz="800" u="sng" dirty="0" kern="400000">
                 <a:solidFill>
                   <a:srgbClr val="5B6B7F"/>
                 </a:solidFill>
@@ -10838,7 +12098,14 @@
               </a:rPr>
               <a:t>SlideCraft 0.4 release notes and test suite (Oct 2026)</a:t>
             </a:r>
-            <a:endParaRPr lang="en-US" sz="800" dirty="0"/>
+            <a:endParaRPr lang="en-US" sz="800" u="sng" dirty="0" kern="400000">
+              <a:solidFill>
+                <a:srgbClr val="5B6B7F"/>
+              </a:solidFill>
+              <a:latin typeface="Arial" pitchFamily="34" charset="0"/>
+              <a:ea typeface="Arial" pitchFamily="34" charset="-122"/>
+              <a:cs typeface="Arial" pitchFamily="34" charset="-120"/>
+            </a:endParaRPr>
           </a:p>
         </p:txBody>
       </p:sp>
@@ -10870,7 +12137,7 @@
           <a:bodyPr lIns="0" tIns="0" rIns="0" bIns="0"/>
           <a:lstStyle>
             <a:lvl1pPr>
-              <a:defRPr sz="850">
+              <a:defRPr sz="850" kern="400000">
                 <a:solidFill>
                   <a:srgbClr val="5B6B7F"/>
                 </a:solidFill>
@@ -10883,10 +12150,10 @@
           <a:p>
             <a:pPr algn="r"/>
             <a:fld id="{F7021451-1387-4CA6-816F-3879F97B5CBC}" type="slidenum">
-              <a:rPr b="0" lang="en-US"/>
+              <a:rPr b="0" lang="en-US" kern="400000"/>
               <a:t>9</a:t>
             </a:fld>
-            <a:endParaRPr lang="en-US"/>
+            <a:endParaRPr b="0" lang="en-US" kern="400000"/>
           </a:p>
         </p:txBody>
       </p:sp>

--- a/docs/showcase/slidecraft-overview.pptx
+++ b/docs/showcase/slidecraft-overview.pptx
@@ -1305,7 +1305,14 @@
           <a:p>
             <a:r>
               <a:rPr lang="en-US" dirty="0"/>
-              <a:t/>
+              <a:t>[Sources]</a:t>
+            </a:r>
+            <a:endParaRPr lang="en-US" dirty="0"/>
+          </a:p>
+          <a:p>
+            <a:r>
+              <a:rPr lang="en-US" dirty="0"/>
+              <a:t>- SlideCraft 0.4 release notes and test suite — Oct 2026 — https://github.com/eiler2005/slidecraft/blob/main/CHANGELOG.md</a:t>
             </a:r>
             <a:endParaRPr lang="en-US" dirty="0"/>
           </a:p>
@@ -1393,7 +1400,14 @@
           <a:p>
             <a:r>
               <a:rPr lang="en-US" dirty="0"/>
-              <a:t/>
+              <a:t>[Sources]</a:t>
+            </a:r>
+            <a:endParaRPr lang="en-US" dirty="0"/>
+          </a:p>
+          <a:p>
+            <a:r>
+              <a:rPr lang="en-US" dirty="0"/>
+              <a:t>- SlideCraft 0.4 release notes and test suite — Oct 2026 — https://github.com/eiler2005/slidecraft/blob/main/CHANGELOG.md</a:t>
             </a:r>
             <a:endParaRPr lang="en-US" dirty="0"/>
           </a:p>
@@ -1481,7 +1495,21 @@
           <a:p>
             <a:r>
               <a:rPr lang="en-US" dirty="0"/>
-              <a:t/>
+              <a:t>[Sources]</a:t>
+            </a:r>
+            <a:endParaRPr lang="en-US" dirty="0"/>
+          </a:p>
+          <a:p>
+            <a:r>
+              <a:rPr lang="en-US" dirty="0"/>
+              <a:t>- SlideCraft calibration against Microsoft PowerPoint, 144 strings — Oct 2026 — https://github.com/eiler2005/slidecraft/blob/main/docs/how-to/apply-brand.md</a:t>
+            </a:r>
+            <a:endParaRPr lang="en-US" dirty="0"/>
+          </a:p>
+          <a:p>
+            <a:r>
+              <a:rPr lang="en-US" dirty="0"/>
+              <a:t>- SlideCraft 0.4 release notes and test suite — Oct 2026 — https://github.com/eiler2005/slidecraft/blob/main/CHANGELOG.md</a:t>
             </a:r>
             <a:endParaRPr lang="en-US" dirty="0"/>
           </a:p>
@@ -2269,7 +2297,7 @@
       </p:grpSpPr>
       <p:sp>
         <p:nvSpPr>
-          <p:cNvPr id="3" name="SlideCraft Title sc:cover/title"/>
+          <p:cNvPr id="9" name="SlideCraft Title sc:cover/title"/>
           <p:cNvSpPr>
             <a:spLocks xmlns:a="http://schemas.openxmlformats.org/drawingml/2006/main" noGrp="1"/>
           </p:cNvSpPr>
@@ -2280,7 +2308,7 @@
         <p:spPr>
           <a:xfrm>
             <a:off x="822960" y="2011680"/>
-            <a:ext cx="8046519" cy="2148840"/>
+            <a:ext cx="5432424" cy="2148840"/>
           </a:xfrm>
           <a:prstGeom prst="rect">
             <a:avLst/>
@@ -2322,14 +2350,269 @@
       </p:sp>
       <p:sp>
         <p:nvSpPr>
-          <p:cNvPr id="2" name="sc:cover/kicker"/>
+          <p:cNvPr id="2" name="Shape 0"/>
+          <p:cNvSpPr/>
+          <p:nvPr/>
+        </p:nvSpPr>
+        <p:spPr>
+          <a:xfrm>
+            <a:off x="8531352" y="0"/>
+            <a:ext cx="3660343" cy="6858000"/>
+          </a:xfrm>
+          <a:prstGeom prst="rect">
+            <a:avLst/>
+          </a:prstGeom>
+          <a:solidFill>
+            <a:srgbClr val="1F5FBF"/>
+          </a:solidFill>
+          <a:ln/>
+        </p:spPr>
+      </p:sp>
+      <p:sp>
+        <p:nvSpPr>
+          <p:cNvPr id="3" name="Shape 1"/>
+          <p:cNvSpPr/>
+          <p:nvPr/>
+        </p:nvSpPr>
+        <p:spPr>
+          <a:xfrm>
+            <a:off x="9129447" y="640080"/>
+            <a:ext cx="2213159" cy="1027786"/>
+          </a:xfrm>
+          <a:custGeom>
+            <a:avLst/>
+            <a:gdLst/>
+            <a:ahLst/>
+            <a:cxnLst/>
+            <a:rect l="l" t="t" r="r" b="b"/>
+            <a:pathLst>
+              <a:path w="2213159" h="1027786">
+                <a:moveTo>
+                  <a:pt x="0" y="0"/>
+                </a:moveTo>
+                <a:lnTo>
+                  <a:pt x="1106579" y="462504"/>
+                </a:lnTo>
+                <a:lnTo>
+                  <a:pt x="2213159" y="0"/>
+                </a:lnTo>
+                <a:lnTo>
+                  <a:pt x="2213159" y="565282"/>
+                </a:lnTo>
+                <a:lnTo>
+                  <a:pt x="1106579" y="1027786"/>
+                </a:lnTo>
+                <a:lnTo>
+                  <a:pt x="0" y="565282"/>
+                </a:lnTo>
+                <a:close/>
+              </a:path>
+            </a:pathLst>
+          </a:custGeom>
+          <a:solidFill>
+            <a:srgbClr val="5787CF"/>
+          </a:solidFill>
+          <a:ln/>
+        </p:spPr>
+      </p:sp>
+      <p:sp>
+        <p:nvSpPr>
+          <p:cNvPr id="4" name="Shape 2"/>
+          <p:cNvSpPr/>
+          <p:nvPr/>
+        </p:nvSpPr>
+        <p:spPr>
+          <a:xfrm>
+            <a:off x="9500864" y="1777594"/>
+            <a:ext cx="2213159" cy="1027786"/>
+          </a:xfrm>
+          <a:custGeom>
+            <a:avLst/>
+            <a:gdLst/>
+            <a:ahLst/>
+            <a:cxnLst/>
+            <a:rect l="l" t="t" r="r" b="b"/>
+            <a:pathLst>
+              <a:path w="2213159" h="1027786">
+                <a:moveTo>
+                  <a:pt x="0" y="0"/>
+                </a:moveTo>
+                <a:lnTo>
+                  <a:pt x="1106579" y="462504"/>
+                </a:lnTo>
+                <a:lnTo>
+                  <a:pt x="2213159" y="0"/>
+                </a:lnTo>
+                <a:lnTo>
+                  <a:pt x="2213159" y="565282"/>
+                </a:lnTo>
+                <a:lnTo>
+                  <a:pt x="1106579" y="1027786"/>
+                </a:lnTo>
+                <a:lnTo>
+                  <a:pt x="0" y="565282"/>
+                </a:lnTo>
+                <a:close/>
+              </a:path>
+            </a:pathLst>
+          </a:custGeom>
+          <a:solidFill>
+            <a:srgbClr val="6D97D5"/>
+          </a:solidFill>
+          <a:ln/>
+        </p:spPr>
+      </p:sp>
+      <p:sp>
+        <p:nvSpPr>
+          <p:cNvPr id="5" name="Shape 3"/>
+          <p:cNvSpPr/>
+          <p:nvPr/>
+        </p:nvSpPr>
+        <p:spPr>
+          <a:xfrm>
+            <a:off x="9012736" y="2915107"/>
+            <a:ext cx="2213159" cy="1027786"/>
+          </a:xfrm>
+          <a:custGeom>
+            <a:avLst/>
+            <a:gdLst/>
+            <a:ahLst/>
+            <a:cxnLst/>
+            <a:rect l="l" t="t" r="r" b="b"/>
+            <a:pathLst>
+              <a:path w="2213159" h="1027786">
+                <a:moveTo>
+                  <a:pt x="0" y="0"/>
+                </a:moveTo>
+                <a:lnTo>
+                  <a:pt x="1106579" y="462504"/>
+                </a:lnTo>
+                <a:lnTo>
+                  <a:pt x="2213159" y="0"/>
+                </a:lnTo>
+                <a:lnTo>
+                  <a:pt x="2213159" y="565282"/>
+                </a:lnTo>
+                <a:lnTo>
+                  <a:pt x="1106579" y="1027786"/>
+                </a:lnTo>
+                <a:lnTo>
+                  <a:pt x="0" y="565282"/>
+                </a:lnTo>
+                <a:close/>
+              </a:path>
+            </a:pathLst>
+          </a:custGeom>
+          <a:solidFill>
+            <a:srgbClr val="84A7DC"/>
+          </a:solidFill>
+          <a:ln/>
+        </p:spPr>
+      </p:sp>
+      <p:sp>
+        <p:nvSpPr>
+          <p:cNvPr id="6" name="Shape 4"/>
+          <p:cNvSpPr/>
+          <p:nvPr/>
+        </p:nvSpPr>
+        <p:spPr>
+          <a:xfrm>
+            <a:off x="9421356" y="4052621"/>
+            <a:ext cx="2213159" cy="1027786"/>
+          </a:xfrm>
+          <a:custGeom>
+            <a:avLst/>
+            <a:gdLst/>
+            <a:ahLst/>
+            <a:cxnLst/>
+            <a:rect l="l" t="t" r="r" b="b"/>
+            <a:pathLst>
+              <a:path w="2213159" h="1027786">
+                <a:moveTo>
+                  <a:pt x="0" y="0"/>
+                </a:moveTo>
+                <a:lnTo>
+                  <a:pt x="1106579" y="462504"/>
+                </a:lnTo>
+                <a:lnTo>
+                  <a:pt x="2213159" y="0"/>
+                </a:lnTo>
+                <a:lnTo>
+                  <a:pt x="2213159" y="565282"/>
+                </a:lnTo>
+                <a:lnTo>
+                  <a:pt x="1106579" y="1027786"/>
+                </a:lnTo>
+                <a:lnTo>
+                  <a:pt x="0" y="565282"/>
+                </a:lnTo>
+                <a:close/>
+              </a:path>
+            </a:pathLst>
+          </a:custGeom>
+          <a:solidFill>
+            <a:srgbClr val="FFFFFF"/>
+          </a:solidFill>
+          <a:ln/>
+        </p:spPr>
+      </p:sp>
+      <p:sp>
+        <p:nvSpPr>
+          <p:cNvPr id="7" name="Shape 5"/>
+          <p:cNvSpPr/>
+          <p:nvPr/>
+        </p:nvSpPr>
+        <p:spPr>
+          <a:xfrm>
+            <a:off x="9116112" y="5190134"/>
+            <a:ext cx="2213159" cy="1027786"/>
+          </a:xfrm>
+          <a:custGeom>
+            <a:avLst/>
+            <a:gdLst/>
+            <a:ahLst/>
+            <a:cxnLst/>
+            <a:rect l="l" t="t" r="r" b="b"/>
+            <a:pathLst>
+              <a:path w="2213159" h="1027786">
+                <a:moveTo>
+                  <a:pt x="0" y="0"/>
+                </a:moveTo>
+                <a:lnTo>
+                  <a:pt x="1106579" y="462504"/>
+                </a:lnTo>
+                <a:lnTo>
+                  <a:pt x="2213159" y="0"/>
+                </a:lnTo>
+                <a:lnTo>
+                  <a:pt x="2213159" y="565282"/>
+                </a:lnTo>
+                <a:lnTo>
+                  <a:pt x="1106579" y="1027786"/>
+                </a:lnTo>
+                <a:lnTo>
+                  <a:pt x="0" y="565282"/>
+                </a:lnTo>
+                <a:close/>
+              </a:path>
+            </a:pathLst>
+          </a:custGeom>
+          <a:solidFill>
+            <a:srgbClr val="B1C7E9"/>
+          </a:solidFill>
+          <a:ln/>
+        </p:spPr>
+      </p:sp>
+      <p:sp>
+        <p:nvSpPr>
+          <p:cNvPr id="8" name="sc:cover/kicker"/>
           <p:cNvSpPr txBox="1"/>
           <p:nvPr/>
         </p:nvSpPr>
         <p:spPr>
           <a:xfrm>
             <a:off x="822960" y="1600200"/>
-            <a:ext cx="8046519" cy="274320"/>
+            <a:ext cx="7342632" cy="274320"/>
           </a:xfrm>
           <a:prstGeom prst="rect">
             <a:avLst/>
@@ -2371,14 +2654,14 @@
       </p:sp>
       <p:sp>
         <p:nvSpPr>
-          <p:cNvPr id="4" name="sc:cover/subtitle"/>
+          <p:cNvPr id="10" name="sc:cover/subtitle"/>
           <p:cNvSpPr txBox="1"/>
           <p:nvPr/>
         </p:nvSpPr>
         <p:spPr>
           <a:xfrm>
-            <a:off x="822960" y="3383280"/>
-            <a:ext cx="8046519" cy="822960"/>
+            <a:off x="822960" y="3931920"/>
+            <a:ext cx="7342632" cy="822960"/>
           </a:xfrm>
           <a:prstGeom prst="rect">
             <a:avLst/>
@@ -2420,7 +2703,7 @@
       </p:sp>
       <p:sp>
         <p:nvSpPr>
-          <p:cNvPr id="5" name="Shape 3"/>
+          <p:cNvPr id="11" name="Shape 9"/>
           <p:cNvSpPr/>
           <p:nvPr/>
         </p:nvSpPr>
@@ -2457,14 +2740,14 @@
       </p:sp>
       <p:sp>
         <p:nvSpPr>
-          <p:cNvPr id="6" name="sc:cover/presenter"/>
+          <p:cNvPr id="12" name="sc:cover/presenter"/>
           <p:cNvSpPr txBox="1"/>
           <p:nvPr/>
         </p:nvSpPr>
         <p:spPr>
           <a:xfrm>
             <a:off x="822960" y="5833872"/>
-            <a:ext cx="8046519" cy="274320"/>
+            <a:ext cx="7342632" cy="274320"/>
           </a:xfrm>
           <a:prstGeom prst="rect">
             <a:avLst/>

--- a/docs/showcase/slidecraft-overview.pptx
+++ b/docs/showcase/slidecraft-overview.pptx
@@ -4584,7 +4584,7 @@
                 <a:ea typeface="Arial" pitchFamily="34" charset="-122"/>
                 <a:cs typeface="Arial" pitchFamily="34" charset="-120"/>
               </a:rPr>
-              <a:t>Free and open source under the MIT licence</a:t>
+              <a:t>Free to use under the PolyForm Shield licence</a:t>
             </a:r>
             <a:endParaRPr lang="en-US" sz="1600" dirty="0" kern="400000">
               <a:solidFill>

--- a/docs/showcase/slidecraft-overview.pptx
+++ b/docs/showcase/slidecraft-overview.pptx
@@ -1312,7 +1312,7 @@
           <a:p>
             <a:r>
               <a:rPr lang="en-US" dirty="0"/>
-              <a:t>- SlideCraft 0.4 release notes and test suite — Oct 2026 — https://github.com/eiler2005/slidecraft/blob/main/CHANGELOG.md</a:t>
+              <a:t>- SlideCraft 0.8 release notes and layout registry — Oct 2026 — https://github.com/eiler2005/slidecraft/blob/main/CHANGELOG.md</a:t>
             </a:r>
             <a:endParaRPr lang="en-US" dirty="0"/>
           </a:p>
@@ -1407,7 +1407,7 @@
           <a:p>
             <a:r>
               <a:rPr lang="en-US" dirty="0"/>
-              <a:t>- SlideCraft 0.4 release notes and test suite — Oct 2026 — https://github.com/eiler2005/slidecraft/blob/main/CHANGELOG.md</a:t>
+              <a:t>- SlideCraft 0.8 release notes and layout registry — Oct 2026 — https://github.com/eiler2005/slidecraft/blob/main/CHANGELOG.md</a:t>
             </a:r>
             <a:endParaRPr lang="en-US" dirty="0"/>
           </a:p>
@@ -1509,7 +1509,7 @@
           <a:p>
             <a:r>
               <a:rPr lang="en-US" dirty="0"/>
-              <a:t>- SlideCraft 0.4 release notes and test suite — Oct 2026 — https://github.com/eiler2005/slidecraft/blob/main/CHANGELOG.md</a:t>
+              <a:t>- SlideCraft 0.8 release notes and layout registry — Oct 2026 — https://github.com/eiler2005/slidecraft/blob/main/CHANGELOG.md</a:t>
             </a:r>
             <a:endParaRPr lang="en-US" dirty="0"/>
           </a:p>
@@ -9436,7 +9436,7 @@
                   </a:extLst>
                 </a:hlinkClick>
               </a:rPr>
-              <a:t>SlideCraft 0.4 release notes and test suite (Oct 2026)</a:t>
+              <a:t>SlideCraft 0.8 release notes and layout registry (Oct 2026)</a:t>
             </a:r>
             <a:endParaRPr lang="en-US" sz="800" u="sng" dirty="0" kern="400000">
               <a:solidFill>
@@ -9956,7 +9956,7 @@
                 <a:ea typeface="Arial" pitchFamily="34" charset="-122"/>
                 <a:cs typeface="Arial" pitchFamily="34" charset="-120"/>
               </a:rPr>
-              <a:t>32</a:t>
+              <a:t>73</a:t>
             </a:r>
             <a:endParaRPr lang="en-US" sz="5400" b="1" dirty="0" kern="400000">
               <a:solidFill>
@@ -10042,7 +10042,7 @@
                 <a:ea typeface="Arial" pitchFamily="34" charset="-122"/>
                 <a:cs typeface="Arial" pitchFamily="34" charset="-120"/>
               </a:rPr>
-              <a:t>From executive summaries to waterfalls, risk matrices and org charts</a:t>
+              <a:t>From executive summaries to charts, architecture and editable diagrams</a:t>
             </a:r>
             <a:endParaRPr lang="en-US" sz="1000" dirty="0" kern="400000">
               <a:solidFill>
@@ -10226,7 +10226,7 @@
                 <a:ea typeface="Arial" pitchFamily="34" charset="-122"/>
                 <a:cs typeface="Arial" pitchFamily="34" charset="-120"/>
               </a:rPr>
-              <a:t>6</a:t>
+              <a:t>7</a:t>
             </a:r>
             <a:endParaRPr lang="en-US" sz="5400" b="1" dirty="0" kern="400000">
               <a:solidFill>
@@ -10520,7 +10520,7 @@
                   </a:extLst>
                 </a:hlinkClick>
               </a:rPr>
-              <a:t>SlideCraft 0.4 release notes and test suite (Oct 2026)</a:t>
+              <a:t>SlideCraft 0.8 release notes and layout registry (Oct 2026)</a:t>
             </a:r>
             <a:endParaRPr lang="en-US" sz="800" u="sng" dirty="0" kern="400000">
               <a:solidFill>
@@ -12379,7 +12379,7 @@
                   </a:extLst>
                 </a:hlinkClick>
               </a:rPr>
-              <a:t>SlideCraft 0.4 release notes and test suite (Oct 2026)</a:t>
+              <a:t>SlideCraft 0.8 release notes and layout registry (Oct 2026)</a:t>
             </a:r>
             <a:endParaRPr lang="en-US" sz="800" u="sng" dirty="0" kern="400000">
               <a:solidFill>
